--- a/figures/Fig9_species_level_v2.pptx
+++ b/figures/Fig9_species_level_v2.pptx
@@ -2307,7 +2307,7 @@
           <p:spPr>
             <a:xfrm>
               <a:off x="252469" y="252469"/>
-              <a:ext cx="5525395" cy="3589733"/>
+              <a:ext cx="5525395" cy="3648646"/>
             </a:xfrm>
             <a:prstGeom prst="rect">
               <a:avLst/>
@@ -2342,7 +2342,7 @@
           <p:spPr>
             <a:xfrm>
               <a:off x="5777865" y="252469"/>
-              <a:ext cx="5673985" cy="3589733"/>
+              <a:ext cx="5673985" cy="3648646"/>
             </a:xfrm>
             <a:prstGeom prst="rect">
               <a:avLst/>
@@ -2376,8 +2376,8 @@
           </p:nvSpPr>
           <p:spPr>
             <a:xfrm>
-              <a:off x="1728709" y="656226"/>
-              <a:ext cx="3947935" cy="2498443"/>
+              <a:off x="1728709" y="768698"/>
+              <a:ext cx="3947935" cy="2444885"/>
             </a:xfrm>
             <a:prstGeom prst="rect">
               <a:avLst/>
@@ -2402,15 +2402,15 @@
           </p:nvSpPr>
           <p:spPr>
             <a:xfrm>
-              <a:off x="3291081" y="656226"/>
-              <a:ext cx="0" cy="2498443"/>
+              <a:off x="3279742" y="768698"/>
+              <a:ext cx="0" cy="2444885"/>
             </a:xfrm>
             <a:custGeom>
               <a:avLst/>
               <a:pathLst>
-                <a:path w="0" h="2498443">
+                <a:path w="0" h="2444885">
                   <a:moveTo>
-                    <a:pt x="0" y="2498443"/>
+                    <a:pt x="0" y="2444885"/>
                   </a:moveTo>
                   <a:lnTo>
                     <a:pt x="0" y="0"/>
@@ -2445,18 +2445,18 @@
           </p:nvSpPr>
           <p:spPr>
             <a:xfrm>
-              <a:off x="2192059" y="2324169"/>
-              <a:ext cx="1947877" cy="0"/>
+              <a:off x="2189731" y="2400885"/>
+              <a:ext cx="1931905" cy="0"/>
             </a:xfrm>
             <a:custGeom>
               <a:avLst/>
               <a:pathLst>
-                <a:path w="1947877" h="0">
+                <a:path w="1931905" h="0">
                   <a:moveTo>
                     <a:pt x="0" y="0"/>
                   </a:moveTo>
                   <a:lnTo>
-                    <a:pt x="1947877" y="0"/>
+                    <a:pt x="1931905" y="0"/>
                   </a:lnTo>
                 </a:path>
               </a:pathLst>
@@ -2485,18 +2485,18 @@
           </p:nvSpPr>
           <p:spPr>
             <a:xfrm>
-              <a:off x="1908160" y="1977163"/>
-              <a:ext cx="2177689" cy="0"/>
+              <a:off x="1908160" y="2061318"/>
+              <a:ext cx="2159832" cy="0"/>
             </a:xfrm>
             <a:custGeom>
               <a:avLst/>
               <a:pathLst>
-                <a:path w="2177689" h="0">
+                <a:path w="2159832" h="0">
                   <a:moveTo>
                     <a:pt x="0" y="0"/>
                   </a:moveTo>
                   <a:lnTo>
-                    <a:pt x="2177689" y="0"/>
+                    <a:pt x="2159832" y="0"/>
                   </a:lnTo>
                 </a:path>
               </a:pathLst>
@@ -2525,18 +2525,18 @@
           </p:nvSpPr>
           <p:spPr>
             <a:xfrm>
-              <a:off x="3459272" y="936145"/>
-              <a:ext cx="1526097" cy="0"/>
+              <a:off x="3446553" y="1042615"/>
+              <a:ext cx="1513584" cy="0"/>
             </a:xfrm>
             <a:custGeom>
               <a:avLst/>
               <a:pathLst>
-                <a:path w="1526097" h="0">
+                <a:path w="1513584" h="0">
                   <a:moveTo>
                     <a:pt x="0" y="0"/>
                   </a:moveTo>
                   <a:lnTo>
-                    <a:pt x="1526097" y="0"/>
+                    <a:pt x="1513584" y="0"/>
                   </a:lnTo>
                 </a:path>
               </a:pathLst>
@@ -2565,18 +2565,18 @@
           </p:nvSpPr>
           <p:spPr>
             <a:xfrm>
-              <a:off x="2892717" y="1283151"/>
-              <a:ext cx="1293882" cy="0"/>
+              <a:off x="2884644" y="1382183"/>
+              <a:ext cx="1283273" cy="0"/>
             </a:xfrm>
             <a:custGeom>
               <a:avLst/>
               <a:pathLst>
-                <a:path w="1293882" h="0">
+                <a:path w="1283273" h="0">
                   <a:moveTo>
                     <a:pt x="0" y="0"/>
                   </a:moveTo>
                   <a:lnTo>
-                    <a:pt x="1293882" y="0"/>
+                    <a:pt x="1283273" y="0"/>
                   </a:lnTo>
                 </a:path>
               </a:pathLst>
@@ -2605,18 +2605,18 @@
           </p:nvSpPr>
           <p:spPr>
             <a:xfrm>
-              <a:off x="2488395" y="1630157"/>
-              <a:ext cx="1196726" cy="0"/>
+              <a:off x="2483637" y="1721750"/>
+              <a:ext cx="1186913" cy="0"/>
             </a:xfrm>
             <a:custGeom>
               <a:avLst/>
               <a:pathLst>
-                <a:path w="1196726" h="0">
+                <a:path w="1186913" h="0">
                   <a:moveTo>
                     <a:pt x="0" y="0"/>
                   </a:moveTo>
                   <a:lnTo>
-                    <a:pt x="1196726" y="0"/>
+                    <a:pt x="1186913" y="0"/>
                   </a:lnTo>
                 </a:path>
               </a:pathLst>
@@ -2645,18 +2645,18 @@
           </p:nvSpPr>
           <p:spPr>
             <a:xfrm>
-              <a:off x="2263471" y="3018181"/>
-              <a:ext cx="1181334" cy="0"/>
+              <a:off x="2260557" y="3080020"/>
+              <a:ext cx="1171647" cy="0"/>
             </a:xfrm>
             <a:custGeom>
               <a:avLst/>
               <a:pathLst>
-                <a:path w="1181334" h="0">
+                <a:path w="1171647" h="0">
                   <a:moveTo>
                     <a:pt x="0" y="0"/>
                   </a:moveTo>
                   <a:lnTo>
-                    <a:pt x="1181334" y="0"/>
+                    <a:pt x="1171647" y="0"/>
                   </a:lnTo>
                 </a:path>
               </a:pathLst>
@@ -2685,18 +2685,18 @@
           </p:nvSpPr>
           <p:spPr>
             <a:xfrm>
-              <a:off x="2300481" y="2671175"/>
-              <a:ext cx="1292663" cy="0"/>
+              <a:off x="2297264" y="2740453"/>
+              <a:ext cx="1282064" cy="0"/>
             </a:xfrm>
             <a:custGeom>
               <a:avLst/>
               <a:pathLst>
-                <a:path w="1292663" h="0">
+                <a:path w="1282064" h="0">
                   <a:moveTo>
                     <a:pt x="0" y="0"/>
                   </a:moveTo>
                   <a:lnTo>
-                    <a:pt x="1292663" y="0"/>
+                    <a:pt x="1282064" y="0"/>
                   </a:lnTo>
                 </a:path>
               </a:pathLst>
@@ -2725,18 +2725,18 @@
           </p:nvSpPr>
           <p:spPr>
             <a:xfrm>
-              <a:off x="1987060" y="2252454"/>
-              <a:ext cx="2085791" cy="0"/>
+              <a:off x="1986413" y="2330708"/>
+              <a:ext cx="2068688" cy="0"/>
             </a:xfrm>
             <a:custGeom>
               <a:avLst/>
               <a:pathLst>
-                <a:path w="2085791" h="0">
+                <a:path w="2068688" h="0">
                   <a:moveTo>
                     <a:pt x="0" y="0"/>
                   </a:moveTo>
                   <a:lnTo>
-                    <a:pt x="2085791" y="0"/>
+                    <a:pt x="2068688" y="0"/>
                   </a:lnTo>
                 </a:path>
               </a:pathLst>
@@ -2765,18 +2765,18 @@
           </p:nvSpPr>
           <p:spPr>
             <a:xfrm>
-              <a:off x="2291212" y="1905448"/>
-              <a:ext cx="1715111" cy="0"/>
+              <a:off x="2288071" y="1991140"/>
+              <a:ext cx="1701048" cy="0"/>
             </a:xfrm>
             <a:custGeom>
               <a:avLst/>
               <a:pathLst>
-                <a:path w="1715111" h="0">
+                <a:path w="1701048" h="0">
                   <a:moveTo>
                     <a:pt x="0" y="0"/>
                   </a:moveTo>
                   <a:lnTo>
-                    <a:pt x="1715111" y="0"/>
+                    <a:pt x="1701048" y="0"/>
                   </a:lnTo>
                 </a:path>
               </a:pathLst>
@@ -2805,18 +2805,18 @@
           </p:nvSpPr>
           <p:spPr>
             <a:xfrm>
-              <a:off x="3377938" y="864430"/>
-              <a:ext cx="1487942" cy="0"/>
+              <a:off x="3365886" y="972438"/>
+              <a:ext cx="1475742" cy="0"/>
             </a:xfrm>
             <a:custGeom>
               <a:avLst/>
               <a:pathLst>
-                <a:path w="1487942" h="0">
+                <a:path w="1475742" h="0">
                   <a:moveTo>
                     <a:pt x="0" y="0"/>
                   </a:moveTo>
                   <a:lnTo>
-                    <a:pt x="1487942" y="0"/>
+                    <a:pt x="1475742" y="0"/>
                   </a:lnTo>
                 </a:path>
               </a:pathLst>
@@ -2845,18 +2845,18 @@
           </p:nvSpPr>
           <p:spPr>
             <a:xfrm>
-              <a:off x="3117230" y="1211436"/>
-              <a:ext cx="1258051" cy="0"/>
+              <a:off x="3107316" y="1312006"/>
+              <a:ext cx="1247736" cy="0"/>
             </a:xfrm>
             <a:custGeom>
               <a:avLst/>
               <a:pathLst>
-                <a:path w="1258051" h="0">
+                <a:path w="1247736" h="0">
                   <a:moveTo>
                     <a:pt x="0" y="0"/>
                   </a:moveTo>
                   <a:lnTo>
-                    <a:pt x="1258051" y="0"/>
+                    <a:pt x="1247736" y="0"/>
                   </a:lnTo>
                 </a:path>
               </a:pathLst>
@@ -2885,18 +2885,18 @@
           </p:nvSpPr>
           <p:spPr>
             <a:xfrm>
-              <a:off x="2539300" y="1558442"/>
-              <a:ext cx="1143229" cy="0"/>
+              <a:off x="2534125" y="1651573"/>
+              <a:ext cx="1133855" cy="0"/>
             </a:xfrm>
             <a:custGeom>
               <a:avLst/>
               <a:pathLst>
-                <a:path w="1143229" h="0">
+                <a:path w="1133855" h="0">
                   <a:moveTo>
                     <a:pt x="0" y="0"/>
                   </a:moveTo>
                   <a:lnTo>
-                    <a:pt x="1143229" y="0"/>
+                    <a:pt x="1133855" y="0"/>
                   </a:lnTo>
                 </a:path>
               </a:pathLst>
@@ -2925,18 +2925,18 @@
           </p:nvSpPr>
           <p:spPr>
             <a:xfrm>
-              <a:off x="2358151" y="2946466"/>
-              <a:ext cx="1164182" cy="0"/>
+              <a:off x="2354462" y="3009843"/>
+              <a:ext cx="1154636" cy="0"/>
             </a:xfrm>
             <a:custGeom>
               <a:avLst/>
               <a:pathLst>
-                <a:path w="1164182" h="0">
+                <a:path w="1154636" h="0">
                   <a:moveTo>
                     <a:pt x="0" y="0"/>
                   </a:moveTo>
                   <a:lnTo>
-                    <a:pt x="1164182" y="0"/>
+                    <a:pt x="1154636" y="0"/>
                   </a:lnTo>
                 </a:path>
               </a:pathLst>
@@ -2965,18 +2965,18 @@
           </p:nvSpPr>
           <p:spPr>
             <a:xfrm>
-              <a:off x="2288389" y="2599460"/>
-              <a:ext cx="1262040" cy="0"/>
+              <a:off x="2285272" y="2670275"/>
+              <a:ext cx="1251692" cy="0"/>
             </a:xfrm>
             <a:custGeom>
               <a:avLst/>
               <a:pathLst>
-                <a:path w="1262040" h="0">
+                <a:path w="1251692" h="0">
                   <a:moveTo>
                     <a:pt x="0" y="0"/>
                   </a:moveTo>
                   <a:lnTo>
-                    <a:pt x="1262040" y="0"/>
+                    <a:pt x="1251692" y="0"/>
                   </a:lnTo>
                 </a:path>
               </a:pathLst>
@@ -3005,18 +3005,18 @@
           </p:nvSpPr>
           <p:spPr>
             <a:xfrm>
-              <a:off x="2316962" y="2180740"/>
-              <a:ext cx="1625756" cy="0"/>
+              <a:off x="2317321" y="2260531"/>
+              <a:ext cx="1614280" cy="0"/>
             </a:xfrm>
             <a:custGeom>
               <a:avLst/>
               <a:pathLst>
-                <a:path w="1625756" h="0">
+                <a:path w="1614280" h="0">
                   <a:moveTo>
                     <a:pt x="0" y="0"/>
                   </a:moveTo>
                   <a:lnTo>
-                    <a:pt x="1625756" y="0"/>
+                    <a:pt x="1614280" y="0"/>
                   </a:lnTo>
                 </a:path>
               </a:pathLst>
@@ -3045,18 +3045,18 @@
           </p:nvSpPr>
           <p:spPr>
             <a:xfrm>
-              <a:off x="2442479" y="1833734"/>
-              <a:ext cx="1536245" cy="0"/>
+              <a:off x="2443825" y="1920963"/>
+              <a:ext cx="1524790" cy="0"/>
             </a:xfrm>
             <a:custGeom>
               <a:avLst/>
               <a:pathLst>
-                <a:path w="1536245" h="0">
+                <a:path w="1524790" h="0">
                   <a:moveTo>
                     <a:pt x="0" y="0"/>
                   </a:moveTo>
                   <a:lnTo>
-                    <a:pt x="1536245" y="0"/>
+                    <a:pt x="1524790" y="0"/>
                   </a:lnTo>
                 </a:path>
               </a:pathLst>
@@ -3085,18 +3085,18 @@
           </p:nvSpPr>
           <p:spPr>
             <a:xfrm>
-              <a:off x="3997931" y="792715"/>
-              <a:ext cx="1499261" cy="0"/>
+              <a:off x="4006276" y="902261"/>
+              <a:ext cx="1490916" cy="0"/>
             </a:xfrm>
             <a:custGeom>
               <a:avLst/>
               <a:pathLst>
-                <a:path w="1499261" h="0">
+                <a:path w="1490916" h="0">
                   <a:moveTo>
                     <a:pt x="0" y="0"/>
                   </a:moveTo>
                   <a:lnTo>
-                    <a:pt x="1499261" y="0"/>
+                    <a:pt x="1490916" y="0"/>
                   </a:lnTo>
                 </a:path>
               </a:pathLst>
@@ -3125,18 +3125,18 @@
           </p:nvSpPr>
           <p:spPr>
             <a:xfrm>
-              <a:off x="3089791" y="1139721"/>
-              <a:ext cx="1125319" cy="0"/>
+              <a:off x="3068505" y="1241828"/>
+              <a:ext cx="1118365" cy="0"/>
             </a:xfrm>
             <a:custGeom>
               <a:avLst/>
               <a:pathLst>
-                <a:path w="1125319" h="0">
+                <a:path w="1118365" h="0">
                   <a:moveTo>
                     <a:pt x="0" y="0"/>
                   </a:moveTo>
                   <a:lnTo>
-                    <a:pt x="1125319" y="0"/>
+                    <a:pt x="1118365" y="0"/>
                   </a:lnTo>
                 </a:path>
               </a:pathLst>
@@ -3165,18 +3165,18 @@
           </p:nvSpPr>
           <p:spPr>
             <a:xfrm>
-              <a:off x="2892146" y="1486728"/>
-              <a:ext cx="1127901" cy="0"/>
+              <a:off x="2907164" y="1581396"/>
+              <a:ext cx="1119822" cy="0"/>
             </a:xfrm>
             <a:custGeom>
               <a:avLst/>
               <a:pathLst>
-                <a:path w="1127901" h="0">
+                <a:path w="1119822" h="0">
                   <a:moveTo>
                     <a:pt x="0" y="0"/>
                   </a:moveTo>
                   <a:lnTo>
-                    <a:pt x="1127901" y="0"/>
+                    <a:pt x="1119822" y="0"/>
                   </a:lnTo>
                 </a:path>
               </a:pathLst>
@@ -3205,18 +3205,18 @@
           </p:nvSpPr>
           <p:spPr>
             <a:xfrm>
-              <a:off x="2198724" y="2874752"/>
-              <a:ext cx="1113656" cy="0"/>
+              <a:off x="2220298" y="2939666"/>
+              <a:ext cx="1105054" cy="0"/>
             </a:xfrm>
             <a:custGeom>
               <a:avLst/>
               <a:pathLst>
-                <a:path w="1113656" h="0">
+                <a:path w="1105054" h="0">
                   <a:moveTo>
                     <a:pt x="0" y="0"/>
                   </a:moveTo>
                   <a:lnTo>
-                    <a:pt x="1113656" y="0"/>
+                    <a:pt x="1105054" y="0"/>
                   </a:lnTo>
                 </a:path>
               </a:pathLst>
@@ -3245,18 +3245,18 @@
           </p:nvSpPr>
           <p:spPr>
             <a:xfrm>
-              <a:off x="2256534" y="2527746"/>
-              <a:ext cx="1204374" cy="0"/>
+              <a:off x="2223275" y="2600098"/>
+              <a:ext cx="1195540" cy="0"/>
             </a:xfrm>
             <a:custGeom>
               <a:avLst/>
               <a:pathLst>
-                <a:path w="1204374" h="0">
+                <a:path w="1195540" h="0">
                   <a:moveTo>
                     <a:pt x="0" y="0"/>
                   </a:moveTo>
                   <a:lnTo>
-                    <a:pt x="1204374" y="0"/>
+                    <a:pt x="1195540" y="0"/>
                   </a:lnTo>
                 </a:path>
               </a:pathLst>
@@ -3285,7 +3285,7 @@
           </p:nvSpPr>
           <p:spPr>
             <a:xfrm>
-              <a:off x="3135215" y="2293386"/>
+              <a:off x="3124901" y="2370102"/>
               <a:ext cx="61566" cy="61566"/>
             </a:xfrm>
             <a:prstGeom prst="ellipse">
@@ -3315,7 +3315,7 @@
           </p:nvSpPr>
           <p:spPr>
             <a:xfrm>
-              <a:off x="2966222" y="1946380"/>
+              <a:off x="2957294" y="2030535"/>
               <a:ext cx="61566" cy="61566"/>
             </a:xfrm>
             <a:prstGeom prst="ellipse">
@@ -3345,7 +3345,7 @@
           </p:nvSpPr>
           <p:spPr>
             <a:xfrm>
-              <a:off x="4191537" y="905362"/>
+              <a:off x="4172562" y="1011832"/>
               <a:ext cx="61566" cy="61566"/>
             </a:xfrm>
             <a:prstGeom prst="ellipse">
@@ -3371,7 +3371,7 @@
           </p:nvSpPr>
           <p:spPr>
             <a:xfrm>
-              <a:off x="3508875" y="1252368"/>
+              <a:off x="3495497" y="1351400"/>
               <a:ext cx="61566" cy="61566"/>
             </a:xfrm>
             <a:prstGeom prst="ellipse">
@@ -3401,7 +3401,7 @@
           </p:nvSpPr>
           <p:spPr>
             <a:xfrm>
-              <a:off x="3055975" y="1599374"/>
+              <a:off x="3046311" y="1690967"/>
               <a:ext cx="61566" cy="61566"/>
             </a:xfrm>
             <a:prstGeom prst="ellipse">
@@ -3431,7 +3431,7 @@
           </p:nvSpPr>
           <p:spPr>
             <a:xfrm>
-              <a:off x="2823355" y="2987398"/>
+              <a:off x="2815598" y="3049237"/>
               <a:ext cx="61566" cy="61566"/>
             </a:xfrm>
             <a:prstGeom prst="ellipse">
@@ -3461,7 +3461,7 @@
           </p:nvSpPr>
           <p:spPr>
             <a:xfrm>
-              <a:off x="2916030" y="2640392"/>
+              <a:off x="2907513" y="2709670"/>
               <a:ext cx="61566" cy="61566"/>
             </a:xfrm>
             <a:prstGeom prst="ellipse">
@@ -3491,7 +3491,7 @@
           </p:nvSpPr>
           <p:spPr>
             <a:xfrm>
-              <a:off x="2999173" y="2221671"/>
+              <a:off x="2989974" y="2299925"/>
               <a:ext cx="61566" cy="61566"/>
             </a:xfrm>
             <a:prstGeom prst="ellipse">
@@ -3521,7 +3521,7 @@
           </p:nvSpPr>
           <p:spPr>
             <a:xfrm>
-              <a:off x="3117985" y="1874665"/>
+              <a:off x="3107812" y="1960357"/>
               <a:ext cx="61566" cy="61566"/>
             </a:xfrm>
             <a:prstGeom prst="ellipse">
@@ -3551,7 +3551,7 @@
           </p:nvSpPr>
           <p:spPr>
             <a:xfrm>
-              <a:off x="4091126" y="833647"/>
+              <a:off x="4072974" y="941655"/>
               <a:ext cx="61566" cy="61566"/>
             </a:xfrm>
             <a:prstGeom prst="ellipse">
@@ -3577,7 +3577,7 @@
           </p:nvSpPr>
           <p:spPr>
             <a:xfrm>
-              <a:off x="3715473" y="1180653"/>
+              <a:off x="3700401" y="1281222"/>
               <a:ext cx="61566" cy="61566"/>
             </a:xfrm>
             <a:prstGeom prst="ellipse">
@@ -3607,7 +3607,7 @@
           </p:nvSpPr>
           <p:spPr>
             <a:xfrm>
-              <a:off x="3080132" y="1527659"/>
+              <a:off x="3070270" y="1620790"/>
               <a:ext cx="61566" cy="61566"/>
             </a:xfrm>
             <a:prstGeom prst="ellipse">
@@ -3637,7 +3637,7 @@
           </p:nvSpPr>
           <p:spPr>
             <a:xfrm>
-              <a:off x="2909460" y="2915683"/>
+              <a:off x="2900997" y="2979060"/>
               <a:ext cx="61566" cy="61566"/>
             </a:xfrm>
             <a:prstGeom prst="ellipse">
@@ -3667,7 +3667,7 @@
           </p:nvSpPr>
           <p:spPr>
             <a:xfrm>
-              <a:off x="2888627" y="2568677"/>
+              <a:off x="2880335" y="2639492"/>
               <a:ext cx="61566" cy="61566"/>
             </a:xfrm>
             <a:prstGeom prst="ellipse">
@@ -3697,7 +3697,7 @@
           </p:nvSpPr>
           <p:spPr>
             <a:xfrm>
-              <a:off x="3099057" y="2149956"/>
+              <a:off x="3093678" y="2229748"/>
               <a:ext cx="61566" cy="61566"/>
             </a:xfrm>
             <a:prstGeom prst="ellipse">
@@ -3727,7 +3727,7 @@
           </p:nvSpPr>
           <p:spPr>
             <a:xfrm>
-              <a:off x="3179819" y="1802950"/>
+              <a:off x="3175437" y="1890180"/>
               <a:ext cx="61566" cy="61566"/>
             </a:xfrm>
             <a:prstGeom prst="ellipse">
@@ -3757,7 +3757,7 @@
           </p:nvSpPr>
           <p:spPr>
             <a:xfrm>
-              <a:off x="4716779" y="761932"/>
+              <a:off x="4720951" y="871478"/>
               <a:ext cx="61566" cy="61566"/>
             </a:xfrm>
             <a:prstGeom prst="ellipse">
@@ -3783,7 +3783,7 @@
           </p:nvSpPr>
           <p:spPr>
             <a:xfrm>
-              <a:off x="3621667" y="1108938"/>
+              <a:off x="3596905" y="1211045"/>
               <a:ext cx="61566" cy="61566"/>
             </a:xfrm>
             <a:prstGeom prst="ellipse">
@@ -3813,7 +3813,7 @@
           </p:nvSpPr>
           <p:spPr>
             <a:xfrm>
-              <a:off x="3425314" y="1455944"/>
+              <a:off x="3436292" y="1550613"/>
               <a:ext cx="61566" cy="61566"/>
             </a:xfrm>
             <a:prstGeom prst="ellipse">
@@ -3843,7 +3843,7 @@
           </p:nvSpPr>
           <p:spPr>
             <a:xfrm>
-              <a:off x="2724769" y="2843969"/>
+              <a:off x="2742042" y="2908882"/>
               <a:ext cx="61566" cy="61566"/>
             </a:xfrm>
             <a:prstGeom prst="ellipse">
@@ -3873,7 +3873,7 @@
           </p:nvSpPr>
           <p:spPr>
             <a:xfrm>
-              <a:off x="2827938" y="2496962"/>
+              <a:off x="2790262" y="2569315"/>
               <a:ext cx="61566" cy="61566"/>
             </a:xfrm>
             <a:prstGeom prst="ellipse">
@@ -3903,15 +3903,15 @@
           </p:nvSpPr>
           <p:spPr>
             <a:xfrm>
-              <a:off x="1728709" y="656226"/>
-              <a:ext cx="0" cy="2498443"/>
+              <a:off x="1728709" y="768698"/>
+              <a:ext cx="0" cy="2444885"/>
             </a:xfrm>
             <a:custGeom>
               <a:avLst/>
               <a:pathLst>
-                <a:path w="0" h="2498443">
+                <a:path w="0" h="2444885">
                   <a:moveTo>
-                    <a:pt x="0" y="2498443"/>
+                    <a:pt x="0" y="2444885"/>
                   </a:moveTo>
                   <a:lnTo>
                     <a:pt x="0" y="0"/>
@@ -3943,7 +3943,7 @@
           </p:nvSpPr>
           <p:spPr>
             <a:xfrm>
-              <a:off x="353689" y="2913776"/>
+              <a:off x="353689" y="2977153"/>
               <a:ext cx="1323776" cy="65379"/>
             </a:xfrm>
             <a:prstGeom prst="rect">
@@ -3986,7 +3986,7 @@
           </p:nvSpPr>
           <p:spPr>
             <a:xfrm>
-              <a:off x="480516" y="2566770"/>
+              <a:off x="480516" y="2637586"/>
               <a:ext cx="1196949" cy="65379"/>
             </a:xfrm>
             <a:prstGeom prst="rect">
@@ -4029,7 +4029,7 @@
           </p:nvSpPr>
           <p:spPr>
             <a:xfrm>
-              <a:off x="1226118" y="2219764"/>
+              <a:off x="1226118" y="2298018"/>
               <a:ext cx="451347" cy="65379"/>
             </a:xfrm>
             <a:prstGeom prst="rect">
@@ -4072,7 +4072,7 @@
           </p:nvSpPr>
           <p:spPr>
             <a:xfrm>
-              <a:off x="546444" y="1872758"/>
+              <a:off x="546444" y="1958451"/>
               <a:ext cx="1131021" cy="65379"/>
             </a:xfrm>
             <a:prstGeom prst="rect">
@@ -4115,7 +4115,7 @@
           </p:nvSpPr>
           <p:spPr>
             <a:xfrm>
-              <a:off x="800099" y="1525752"/>
+              <a:off x="800099" y="1618883"/>
               <a:ext cx="877366" cy="65379"/>
             </a:xfrm>
             <a:prstGeom prst="rect">
@@ -4158,7 +4158,7 @@
           </p:nvSpPr>
           <p:spPr>
             <a:xfrm>
-              <a:off x="1231147" y="1178746"/>
+              <a:off x="1231147" y="1279316"/>
               <a:ext cx="446318" cy="65379"/>
             </a:xfrm>
             <a:prstGeom prst="rect">
@@ -4201,7 +4201,7 @@
           </p:nvSpPr>
           <p:spPr>
             <a:xfrm>
-              <a:off x="967343" y="831740"/>
+              <a:off x="967343" y="939748"/>
               <a:ext cx="710123" cy="65379"/>
             </a:xfrm>
             <a:prstGeom prst="rect">
@@ -4244,7 +4244,7 @@
           </p:nvSpPr>
           <p:spPr>
             <a:xfrm>
-              <a:off x="1700240" y="2946466"/>
+              <a:off x="1700240" y="3009843"/>
               <a:ext cx="28468" cy="0"/>
             </a:xfrm>
             <a:custGeom>
@@ -4284,7 +4284,7 @@
           </p:nvSpPr>
           <p:spPr>
             <a:xfrm>
-              <a:off x="1700240" y="2599460"/>
+              <a:off x="1700240" y="2670275"/>
               <a:ext cx="28468" cy="0"/>
             </a:xfrm>
             <a:custGeom>
@@ -4324,7 +4324,7 @@
           </p:nvSpPr>
           <p:spPr>
             <a:xfrm>
-              <a:off x="1700240" y="2252454"/>
+              <a:off x="1700240" y="2330708"/>
               <a:ext cx="28468" cy="0"/>
             </a:xfrm>
             <a:custGeom>
@@ -4364,7 +4364,7 @@
           </p:nvSpPr>
           <p:spPr>
             <a:xfrm>
-              <a:off x="1700240" y="1905448"/>
+              <a:off x="1700240" y="1991140"/>
               <a:ext cx="28468" cy="0"/>
             </a:xfrm>
             <a:custGeom>
@@ -4404,7 +4404,7 @@
           </p:nvSpPr>
           <p:spPr>
             <a:xfrm>
-              <a:off x="1700240" y="1558442"/>
+              <a:off x="1700240" y="1651573"/>
               <a:ext cx="28468" cy="0"/>
             </a:xfrm>
             <a:custGeom>
@@ -4444,7 +4444,7 @@
           </p:nvSpPr>
           <p:spPr>
             <a:xfrm>
-              <a:off x="1700240" y="1211436"/>
+              <a:off x="1700240" y="1312006"/>
               <a:ext cx="28468" cy="0"/>
             </a:xfrm>
             <a:custGeom>
@@ -4484,7 +4484,7 @@
           </p:nvSpPr>
           <p:spPr>
             <a:xfrm>
-              <a:off x="1700240" y="864430"/>
+              <a:off x="1700240" y="972438"/>
               <a:ext cx="28468" cy="0"/>
             </a:xfrm>
             <a:custGeom>
@@ -4524,7 +4524,7 @@
           </p:nvSpPr>
           <p:spPr>
             <a:xfrm>
-              <a:off x="1728709" y="3154670"/>
+              <a:off x="1728709" y="3213583"/>
               <a:ext cx="3947935" cy="0"/>
             </a:xfrm>
             <a:custGeom>
@@ -4564,7 +4564,7 @@
           </p:nvSpPr>
           <p:spPr>
             <a:xfrm>
-              <a:off x="1883023" y="3154670"/>
+              <a:off x="1883229" y="3213583"/>
               <a:ext cx="0" cy="28468"/>
             </a:xfrm>
             <a:custGeom>
@@ -4604,7 +4604,7 @@
           </p:nvSpPr>
           <p:spPr>
             <a:xfrm>
-              <a:off x="2410169" y="3154670"/>
+              <a:off x="2406053" y="3213583"/>
               <a:ext cx="0" cy="28468"/>
             </a:xfrm>
             <a:custGeom>
@@ -4644,7 +4644,7 @@
           </p:nvSpPr>
           <p:spPr>
             <a:xfrm>
-              <a:off x="3291081" y="3154670"/>
+              <a:off x="3279742" y="3213583"/>
               <a:ext cx="0" cy="28468"/>
             </a:xfrm>
             <a:custGeom>
@@ -4684,7 +4684,7 @@
           </p:nvSpPr>
           <p:spPr>
             <a:xfrm>
-              <a:off x="1819609" y="3205913"/>
+              <a:off x="1819815" y="3264826"/>
               <a:ext cx="126827" cy="65379"/>
             </a:xfrm>
             <a:prstGeom prst="rect">
@@ -4727,7 +4727,7 @@
           </p:nvSpPr>
           <p:spPr>
             <a:xfrm>
-              <a:off x="2346756" y="3205913"/>
+              <a:off x="2342639" y="3264826"/>
               <a:ext cx="126827" cy="65379"/>
             </a:xfrm>
             <a:prstGeom prst="rect">
@@ -4770,7 +4770,7 @@
           </p:nvSpPr>
           <p:spPr>
             <a:xfrm>
-              <a:off x="3227668" y="3205913"/>
+              <a:off x="3216328" y="3264826"/>
               <a:ext cx="126827" cy="65379"/>
             </a:xfrm>
             <a:prstGeom prst="rect">
@@ -4813,7 +4813,7 @@
           </p:nvSpPr>
           <p:spPr>
             <a:xfrm>
-              <a:off x="2956480" y="3318871"/>
+              <a:off x="2956480" y="3377785"/>
               <a:ext cx="1492392" cy="81838"/>
             </a:xfrm>
             <a:prstGeom prst="rect">
@@ -4856,7 +4856,7 @@
           </p:nvSpPr>
           <p:spPr>
             <a:xfrm>
-              <a:off x="1878099" y="3538540"/>
+              <a:off x="1878099" y="3597454"/>
               <a:ext cx="3649155" cy="227745"/>
             </a:xfrm>
             <a:prstGeom prst="rect">
@@ -4882,7 +4882,7 @@
           </p:nvSpPr>
           <p:spPr>
             <a:xfrm>
-              <a:off x="1935035" y="3595477"/>
+              <a:off x="1935035" y="3654390"/>
               <a:ext cx="113872" cy="113872"/>
             </a:xfrm>
             <a:prstGeom prst="rect">
@@ -4908,7 +4908,7 @@
           </p:nvSpPr>
           <p:spPr>
             <a:xfrm>
-              <a:off x="1946423" y="3652413"/>
+              <a:off x="1946423" y="3711327"/>
               <a:ext cx="91098" cy="0"/>
             </a:xfrm>
             <a:custGeom>
@@ -4948,7 +4948,7 @@
           </p:nvSpPr>
           <p:spPr>
             <a:xfrm>
-              <a:off x="1961189" y="3621630"/>
+              <a:off x="1961189" y="3680544"/>
               <a:ext cx="61566" cy="61566"/>
             </a:xfrm>
             <a:prstGeom prst="ellipse">
@@ -4983,7 +4983,7 @@
           </p:nvSpPr>
           <p:spPr>
             <a:xfrm>
-              <a:off x="3151248" y="3595477"/>
+              <a:off x="3151248" y="3654390"/>
               <a:ext cx="113872" cy="113872"/>
             </a:xfrm>
             <a:prstGeom prst="rect">
@@ -5009,7 +5009,7 @@
           </p:nvSpPr>
           <p:spPr>
             <a:xfrm>
-              <a:off x="3162635" y="3652413"/>
+              <a:off x="3162635" y="3711327"/>
               <a:ext cx="91098" cy="0"/>
             </a:xfrm>
             <a:custGeom>
@@ -5049,7 +5049,7 @@
           </p:nvSpPr>
           <p:spPr>
             <a:xfrm>
-              <a:off x="3177401" y="3621630"/>
+              <a:off x="3177401" y="3680544"/>
               <a:ext cx="61566" cy="61566"/>
             </a:xfrm>
             <a:prstGeom prst="ellipse">
@@ -5084,7 +5084,7 @@
           </p:nvSpPr>
           <p:spPr>
             <a:xfrm>
-              <a:off x="4723527" y="3595477"/>
+              <a:off x="4723527" y="3654390"/>
               <a:ext cx="113872" cy="113872"/>
             </a:xfrm>
             <a:prstGeom prst="rect">
@@ -5110,7 +5110,7 @@
           </p:nvSpPr>
           <p:spPr>
             <a:xfrm>
-              <a:off x="4734915" y="3652413"/>
+              <a:off x="4734915" y="3711327"/>
               <a:ext cx="91098" cy="0"/>
             </a:xfrm>
             <a:custGeom>
@@ -5150,7 +5150,7 @@
           </p:nvSpPr>
           <p:spPr>
             <a:xfrm>
-              <a:off x="4749681" y="3621630"/>
+              <a:off x="4749681" y="3680544"/>
               <a:ext cx="61566" cy="61566"/>
             </a:xfrm>
             <a:prstGeom prst="ellipse">
@@ -5185,7 +5185,7 @@
           </p:nvSpPr>
           <p:spPr>
             <a:xfrm>
-              <a:off x="2105845" y="3616020"/>
+              <a:off x="2105845" y="3674934"/>
               <a:ext cx="988466" cy="72786"/>
             </a:xfrm>
             <a:prstGeom prst="rect">
@@ -5228,7 +5228,7 @@
           </p:nvSpPr>
           <p:spPr>
             <a:xfrm>
-              <a:off x="3322057" y="3616020"/>
+              <a:off x="3322057" y="3674934"/>
               <a:ext cx="1344533" cy="72786"/>
             </a:xfrm>
             <a:prstGeom prst="rect">
@@ -5271,7 +5271,7 @@
           </p:nvSpPr>
           <p:spPr>
             <a:xfrm>
-              <a:off x="4894337" y="3616020"/>
+              <a:off x="4894337" y="3674934"/>
               <a:ext cx="575980" cy="72786"/>
             </a:xfrm>
             <a:prstGeom prst="rect">
@@ -5315,7 +5315,7 @@
           <p:spPr>
             <a:xfrm>
               <a:off x="1728709" y="503004"/>
-              <a:ext cx="4374946" cy="74432"/>
+              <a:ext cx="4126412" cy="74432"/>
             </a:xfrm>
             <a:prstGeom prst="rect">
               <a:avLst/>
@@ -5344,7 +5344,7 @@
                   <a:latin typeface="Arial"/>
                   <a:cs typeface="Arial"/>
                 </a:rPr>
-                <a:t>Filled points are significant. Body mass, clutch size, habitat breadth and diet breadth are all null</a:t>
+                <a:t>Filled points are significant. M3 uses the dated phylogeny directly (Ives &amp; Garland logistic </a:t>
               </a:r>
             </a:p>
           </p:txBody>
@@ -5352,6 +5352,49 @@
         <p:sp>
           <p:nvSpPr>
             <p:cNvPr id="88" name="tx88"/>
+            <p:cNvSpPr/>
+            <p:nvPr/>
+          </p:nvSpPr>
+          <p:spPr>
+            <a:xfrm>
+              <a:off x="1728709" y="615475"/>
+              <a:ext cx="3851452" cy="74432"/>
+            </a:xfrm>
+            <a:prstGeom prst="rect">
+              <a:avLst/>
+            </a:prstGeom>
+            <a:noFill/>
+          </p:spPr>
+          <p:txBody>
+            <a:bodyPr lIns="0" rIns="0" tIns="0" bIns="0" anchorCtr="1" anchor="ctr" wrap="none"/>
+            <a:lstStyle/>
+            <a:p>
+              <a:pPr algn="l" marL="0" marR="0" indent="0">
+                <a:spcBef>
+                  <a:spcPts val="0"/>
+                </a:spcBef>
+                <a:spcAft>
+                  <a:spcPts val="0"/>
+                </a:spcAft>
+              </a:pPr>
+              <a:r>
+                <a:rPr sz="819" i="0" b="0">
+                  <a:solidFill>
+                    <a:srgbClr val="4D4D4D">
+                      <a:alpha val="100000"/>
+                    </a:srgbClr>
+                  </a:solidFill>
+                  <a:latin typeface="Arial"/>
+                  <a:cs typeface="Arial"/>
+                </a:rPr>
+                <a:t>regression, alpha = 0.60); M1 and M2 are coarser treatments shown for robustness.</a:t>
+              </a:r>
+            </a:p>
+          </p:txBody>
+        </p:sp>
+        <p:sp>
+          <p:nvSpPr>
+            <p:cNvPr id="89" name="tx89"/>
             <p:cNvSpPr/>
             <p:nvPr/>
           </p:nvSpPr>
@@ -5394,13 +5437,13 @@
         </p:sp>
         <p:sp>
           <p:nvSpPr>
-            <p:cNvPr id="89" name="tx89"/>
-            <p:cNvSpPr/>
-            <p:nvPr/>
-          </p:nvSpPr>
-          <p:spPr>
-            <a:xfrm>
-              <a:off x="337921" y="325363"/>
+            <p:cNvPr id="90" name="tx90"/>
+            <p:cNvSpPr/>
+            <p:nvPr/>
+          </p:nvSpPr>
+          <p:spPr>
+            <a:xfrm>
+              <a:off x="337921" y="326246"/>
               <a:ext cx="84764" cy="109179"/>
             </a:xfrm>
             <a:prstGeom prst="rect">
@@ -5437,14 +5480,14 @@
         </p:sp>
         <p:sp>
           <p:nvSpPr>
-            <p:cNvPr id="90" name="rc90"/>
-            <p:cNvSpPr/>
-            <p:nvPr/>
-          </p:nvSpPr>
-          <p:spPr>
-            <a:xfrm>
-              <a:off x="7402695" y="656226"/>
-              <a:ext cx="3947935" cy="2498443"/>
+            <p:cNvPr id="91" name="rc91"/>
+            <p:cNvSpPr/>
+            <p:nvPr/>
+          </p:nvSpPr>
+          <p:spPr>
+            <a:xfrm>
+              <a:off x="7402695" y="768698"/>
+              <a:ext cx="3947935" cy="2444885"/>
             </a:xfrm>
             <a:prstGeom prst="rect">
               <a:avLst/>
@@ -5463,21 +5506,21 @@
         </p:sp>
         <p:sp>
           <p:nvSpPr>
-            <p:cNvPr id="91" name="pl91"/>
-            <p:cNvSpPr/>
-            <p:nvPr/>
-          </p:nvSpPr>
-          <p:spPr>
-            <a:xfrm>
-              <a:off x="9300620" y="656226"/>
-              <a:ext cx="0" cy="2498443"/>
+            <p:cNvPr id="92" name="pl92"/>
+            <p:cNvSpPr/>
+            <p:nvPr/>
+          </p:nvSpPr>
+          <p:spPr>
+            <a:xfrm>
+              <a:off x="9300620" y="768698"/>
+              <a:ext cx="0" cy="2444885"/>
             </a:xfrm>
             <a:custGeom>
               <a:avLst/>
               <a:pathLst>
-                <a:path w="0" h="2498443">
+                <a:path w="0" h="2444885">
                   <a:moveTo>
-                    <a:pt x="0" y="2498443"/>
+                    <a:pt x="0" y="2444885"/>
                   </a:moveTo>
                   <a:lnTo>
                     <a:pt x="0" y="0"/>
@@ -5506,13 +5549,13 @@
         </p:sp>
         <p:sp>
           <p:nvSpPr>
-            <p:cNvPr id="92" name="pl92"/>
-            <p:cNvSpPr/>
-            <p:nvPr/>
-          </p:nvSpPr>
-          <p:spPr>
-            <a:xfrm>
-              <a:off x="10023225" y="808909"/>
+            <p:cNvPr id="93" name="pl93"/>
+            <p:cNvSpPr/>
+            <p:nvPr/>
+          </p:nvSpPr>
+          <p:spPr>
+            <a:xfrm>
+              <a:off x="10023225" y="918107"/>
               <a:ext cx="1147953" cy="0"/>
             </a:xfrm>
             <a:custGeom>
@@ -5546,13 +5589,13 @@
         </p:sp>
         <p:sp>
           <p:nvSpPr>
-            <p:cNvPr id="93" name="pl93"/>
-            <p:cNvSpPr/>
-            <p:nvPr/>
-          </p:nvSpPr>
-          <p:spPr>
-            <a:xfrm>
-              <a:off x="9228321" y="1187461"/>
+            <p:cNvPr id="94" name="pl94"/>
+            <p:cNvSpPr/>
+            <p:nvPr/>
+          </p:nvSpPr>
+          <p:spPr>
+            <a:xfrm>
+              <a:off x="9228321" y="1288545"/>
               <a:ext cx="1164297" cy="0"/>
             </a:xfrm>
             <a:custGeom>
@@ -5586,13 +5629,13 @@
         </p:sp>
         <p:sp>
           <p:nvSpPr>
-            <p:cNvPr id="94" name="pl94"/>
-            <p:cNvSpPr/>
-            <p:nvPr/>
-          </p:nvSpPr>
-          <p:spPr>
-            <a:xfrm>
-              <a:off x="8578265" y="2512393"/>
+            <p:cNvPr id="95" name="pl95"/>
+            <p:cNvSpPr/>
+            <p:nvPr/>
+          </p:nvSpPr>
+          <p:spPr>
+            <a:xfrm>
+              <a:off x="8578265" y="2585075"/>
               <a:ext cx="1293845" cy="0"/>
             </a:xfrm>
             <a:custGeom>
@@ -5626,13 +5669,13 @@
         </p:sp>
         <p:sp>
           <p:nvSpPr>
-            <p:cNvPr id="95" name="pl95"/>
-            <p:cNvSpPr/>
-            <p:nvPr/>
-          </p:nvSpPr>
-          <p:spPr>
-            <a:xfrm>
-              <a:off x="8338675" y="2323117"/>
+            <p:cNvPr id="96" name="pl96"/>
+            <p:cNvSpPr/>
+            <p:nvPr/>
+          </p:nvSpPr>
+          <p:spPr>
+            <a:xfrm>
+              <a:off x="8338675" y="2399856"/>
               <a:ext cx="1725930" cy="0"/>
             </a:xfrm>
             <a:custGeom>
@@ -5666,13 +5709,13 @@
         </p:sp>
         <p:sp>
           <p:nvSpPr>
-            <p:cNvPr id="96" name="pl96"/>
-            <p:cNvSpPr/>
-            <p:nvPr/>
-          </p:nvSpPr>
-          <p:spPr>
-            <a:xfrm>
-              <a:off x="7910123" y="2133841"/>
+            <p:cNvPr id="97" name="pl97"/>
+            <p:cNvSpPr/>
+            <p:nvPr/>
+          </p:nvSpPr>
+          <p:spPr>
+            <a:xfrm>
+              <a:off x="7910123" y="2214638"/>
               <a:ext cx="1811573" cy="0"/>
             </a:xfrm>
             <a:custGeom>
@@ -5706,13 +5749,13 @@
         </p:sp>
         <p:sp>
           <p:nvSpPr>
-            <p:cNvPr id="97" name="pl97"/>
-            <p:cNvSpPr/>
-            <p:nvPr/>
-          </p:nvSpPr>
-          <p:spPr>
-            <a:xfrm>
-              <a:off x="8312222" y="1944565"/>
+            <p:cNvPr id="98" name="pl98"/>
+            <p:cNvSpPr/>
+            <p:nvPr/>
+          </p:nvSpPr>
+          <p:spPr>
+            <a:xfrm>
+              <a:off x="8312222" y="2029419"/>
               <a:ext cx="2385469" cy="0"/>
             </a:xfrm>
             <a:custGeom>
@@ -5746,13 +5789,13 @@
         </p:sp>
         <p:sp>
           <p:nvSpPr>
-            <p:cNvPr id="98" name="pl98"/>
-            <p:cNvSpPr/>
-            <p:nvPr/>
-          </p:nvSpPr>
-          <p:spPr>
-            <a:xfrm>
-              <a:off x="7855275" y="2890945"/>
+            <p:cNvPr id="99" name="pl99"/>
+            <p:cNvSpPr/>
+            <p:nvPr/>
+          </p:nvSpPr>
+          <p:spPr>
+            <a:xfrm>
+              <a:off x="7855275" y="2955512"/>
               <a:ext cx="2170941" cy="0"/>
             </a:xfrm>
             <a:custGeom>
@@ -5786,13 +5829,13 @@
         </p:sp>
         <p:sp>
           <p:nvSpPr>
-            <p:cNvPr id="99" name="pl99"/>
-            <p:cNvSpPr/>
-            <p:nvPr/>
-          </p:nvSpPr>
-          <p:spPr>
-            <a:xfrm>
-              <a:off x="8083416" y="2701669"/>
+            <p:cNvPr id="100" name="pl100"/>
+            <p:cNvSpPr/>
+            <p:nvPr/>
+          </p:nvSpPr>
+          <p:spPr>
+            <a:xfrm>
+              <a:off x="8083416" y="2770293"/>
               <a:ext cx="2590469" cy="0"/>
             </a:xfrm>
             <a:custGeom>
@@ -5826,13 +5869,13 @@
         </p:sp>
         <p:sp>
           <p:nvSpPr>
-            <p:cNvPr id="100" name="pl100"/>
-            <p:cNvSpPr/>
-            <p:nvPr/>
-          </p:nvSpPr>
-          <p:spPr>
-            <a:xfrm>
-              <a:off x="8979564" y="1755289"/>
+            <p:cNvPr id="101" name="pl101"/>
+            <p:cNvSpPr/>
+            <p:nvPr/>
+          </p:nvSpPr>
+          <p:spPr>
+            <a:xfrm>
+              <a:off x="8979564" y="1844200"/>
               <a:ext cx="961192" cy="0"/>
             </a:xfrm>
             <a:custGeom>
@@ -5866,13 +5909,13 @@
         </p:sp>
         <p:sp>
           <p:nvSpPr>
-            <p:cNvPr id="101" name="pl101"/>
-            <p:cNvSpPr/>
-            <p:nvPr/>
-          </p:nvSpPr>
-          <p:spPr>
-            <a:xfrm>
-              <a:off x="8379130" y="3080221"/>
+            <p:cNvPr id="102" name="pl102"/>
+            <p:cNvSpPr/>
+            <p:nvPr/>
+          </p:nvSpPr>
+          <p:spPr>
+            <a:xfrm>
+              <a:off x="8379130" y="3140731"/>
               <a:ext cx="1187490" cy="0"/>
             </a:xfrm>
             <a:custGeom>
@@ -5906,13 +5949,13 @@
         </p:sp>
         <p:sp>
           <p:nvSpPr>
-            <p:cNvPr id="102" name="pl102"/>
-            <p:cNvSpPr/>
-            <p:nvPr/>
-          </p:nvSpPr>
-          <p:spPr>
-            <a:xfrm>
-              <a:off x="8458935" y="998185"/>
+            <p:cNvPr id="103" name="pl103"/>
+            <p:cNvSpPr/>
+            <p:nvPr/>
+          </p:nvSpPr>
+          <p:spPr>
+            <a:xfrm>
+              <a:off x="8458935" y="1103326"/>
               <a:ext cx="1790123" cy="0"/>
             </a:xfrm>
             <a:custGeom>
@@ -5946,13 +5989,13 @@
         </p:sp>
         <p:sp>
           <p:nvSpPr>
-            <p:cNvPr id="103" name="pl103"/>
-            <p:cNvSpPr/>
-            <p:nvPr/>
-          </p:nvSpPr>
-          <p:spPr>
-            <a:xfrm>
-              <a:off x="8825390" y="1376737"/>
+            <p:cNvPr id="104" name="pl104"/>
+            <p:cNvSpPr/>
+            <p:nvPr/>
+          </p:nvSpPr>
+          <p:spPr>
+            <a:xfrm>
+              <a:off x="8825390" y="1473763"/>
               <a:ext cx="1578709" cy="0"/>
             </a:xfrm>
             <a:custGeom>
@@ -5986,13 +6029,13 @@
         </p:sp>
         <p:sp>
           <p:nvSpPr>
-            <p:cNvPr id="104" name="pl104"/>
-            <p:cNvSpPr/>
-            <p:nvPr/>
-          </p:nvSpPr>
-          <p:spPr>
-            <a:xfrm>
-              <a:off x="8346212" y="1566013"/>
+            <p:cNvPr id="105" name="pl105"/>
+            <p:cNvSpPr/>
+            <p:nvPr/>
+          </p:nvSpPr>
+          <p:spPr>
+            <a:xfrm>
+              <a:off x="8346212" y="1658982"/>
               <a:ext cx="1941814" cy="0"/>
             </a:xfrm>
             <a:custGeom>
@@ -6026,13 +6069,13 @@
         </p:sp>
         <p:sp>
           <p:nvSpPr>
-            <p:cNvPr id="105" name="pl105"/>
-            <p:cNvSpPr/>
-            <p:nvPr/>
-          </p:nvSpPr>
-          <p:spPr>
-            <a:xfrm>
-              <a:off x="10039173" y="769792"/>
+            <p:cNvPr id="106" name="pl106"/>
+            <p:cNvSpPr/>
+            <p:nvPr/>
+          </p:nvSpPr>
+          <p:spPr>
+            <a:xfrm>
+              <a:off x="10039173" y="879829"/>
               <a:ext cx="1127197" cy="0"/>
             </a:xfrm>
             <a:custGeom>
@@ -6066,13 +6109,13 @@
         </p:sp>
         <p:sp>
           <p:nvSpPr>
-            <p:cNvPr id="106" name="pl106"/>
-            <p:cNvSpPr/>
-            <p:nvPr/>
-          </p:nvSpPr>
-          <p:spPr>
-            <a:xfrm>
-              <a:off x="9314444" y="1148344"/>
+            <p:cNvPr id="107" name="pl107"/>
+            <p:cNvSpPr/>
+            <p:nvPr/>
+          </p:nvSpPr>
+          <p:spPr>
+            <a:xfrm>
+              <a:off x="9314444" y="1250266"/>
               <a:ext cx="1120175" cy="0"/>
             </a:xfrm>
             <a:custGeom>
@@ -6106,13 +6149,13 @@
         </p:sp>
         <p:sp>
           <p:nvSpPr>
-            <p:cNvPr id="107" name="pl107"/>
-            <p:cNvSpPr/>
-            <p:nvPr/>
-          </p:nvSpPr>
-          <p:spPr>
-            <a:xfrm>
-              <a:off x="8715396" y="2473276"/>
+            <p:cNvPr id="108" name="pl108"/>
+            <p:cNvSpPr/>
+            <p:nvPr/>
+          </p:nvSpPr>
+          <p:spPr>
+            <a:xfrm>
+              <a:off x="8715396" y="2546796"/>
               <a:ext cx="1249210" cy="0"/>
             </a:xfrm>
             <a:custGeom>
@@ -6146,13 +6189,13 @@
         </p:sp>
         <p:sp>
           <p:nvSpPr>
-            <p:cNvPr id="108" name="pl108"/>
-            <p:cNvSpPr/>
-            <p:nvPr/>
-          </p:nvSpPr>
-          <p:spPr>
-            <a:xfrm>
-              <a:off x="8748383" y="2284000"/>
+            <p:cNvPr id="109" name="pl109"/>
+            <p:cNvSpPr/>
+            <p:nvPr/>
+          </p:nvSpPr>
+          <p:spPr>
+            <a:xfrm>
+              <a:off x="8748383" y="2361578"/>
               <a:ext cx="1852563" cy="0"/>
             </a:xfrm>
             <a:custGeom>
@@ -6186,13 +6229,13 @@
         </p:sp>
         <p:sp>
           <p:nvSpPr>
-            <p:cNvPr id="109" name="pl109"/>
-            <p:cNvSpPr/>
-            <p:nvPr/>
-          </p:nvSpPr>
-          <p:spPr>
-            <a:xfrm>
-              <a:off x="7989367" y="2094724"/>
+            <p:cNvPr id="110" name="pl110"/>
+            <p:cNvSpPr/>
+            <p:nvPr/>
+          </p:nvSpPr>
+          <p:spPr>
+            <a:xfrm>
+              <a:off x="7989367" y="2176359"/>
               <a:ext cx="1682014" cy="0"/>
             </a:xfrm>
             <a:custGeom>
@@ -6226,13 +6269,13 @@
         </p:sp>
         <p:sp>
           <p:nvSpPr>
-            <p:cNvPr id="110" name="pl110"/>
-            <p:cNvSpPr/>
-            <p:nvPr/>
-          </p:nvSpPr>
-          <p:spPr>
-            <a:xfrm>
-              <a:off x="7582146" y="1905448"/>
+            <p:cNvPr id="111" name="pl111"/>
+            <p:cNvSpPr/>
+            <p:nvPr/>
+          </p:nvSpPr>
+          <p:spPr>
+            <a:xfrm>
+              <a:off x="7582146" y="1991140"/>
               <a:ext cx="2757766" cy="0"/>
             </a:xfrm>
             <a:custGeom>
@@ -6266,13 +6309,13 @@
         </p:sp>
         <p:sp>
           <p:nvSpPr>
-            <p:cNvPr id="111" name="pl111"/>
-            <p:cNvSpPr/>
-            <p:nvPr/>
-          </p:nvSpPr>
-          <p:spPr>
-            <a:xfrm>
-              <a:off x="8029411" y="2851828"/>
+            <p:cNvPr id="112" name="pl112"/>
+            <p:cNvSpPr/>
+            <p:nvPr/>
+          </p:nvSpPr>
+          <p:spPr>
+            <a:xfrm>
+              <a:off x="8029411" y="2917233"/>
               <a:ext cx="2134428" cy="0"/>
             </a:xfrm>
             <a:custGeom>
@@ -6306,13 +6349,13 @@
         </p:sp>
         <p:sp>
           <p:nvSpPr>
-            <p:cNvPr id="112" name="pl112"/>
-            <p:cNvSpPr/>
-            <p:nvPr/>
-          </p:nvSpPr>
-          <p:spPr>
-            <a:xfrm>
-              <a:off x="8202073" y="2662552"/>
+            <p:cNvPr id="113" name="pl113"/>
+            <p:cNvSpPr/>
+            <p:nvPr/>
+          </p:nvSpPr>
+          <p:spPr>
+            <a:xfrm>
+              <a:off x="8202073" y="2732015"/>
               <a:ext cx="2898572" cy="0"/>
             </a:xfrm>
             <a:custGeom>
@@ -6346,13 +6389,13 @@
         </p:sp>
         <p:sp>
           <p:nvSpPr>
-            <p:cNvPr id="113" name="pl113"/>
-            <p:cNvSpPr/>
-            <p:nvPr/>
-          </p:nvSpPr>
-          <p:spPr>
-            <a:xfrm>
-              <a:off x="8998927" y="1716172"/>
+            <p:cNvPr id="114" name="pl114"/>
+            <p:cNvSpPr/>
+            <p:nvPr/>
+          </p:nvSpPr>
+          <p:spPr>
+            <a:xfrm>
+              <a:off x="8998927" y="1805922"/>
               <a:ext cx="937089" cy="0"/>
             </a:xfrm>
             <a:custGeom>
@@ -6386,13 +6429,13 @@
         </p:sp>
         <p:sp>
           <p:nvSpPr>
-            <p:cNvPr id="114" name="pl114"/>
-            <p:cNvSpPr/>
-            <p:nvPr/>
-          </p:nvSpPr>
-          <p:spPr>
-            <a:xfrm>
-              <a:off x="8376088" y="3041104"/>
+            <p:cNvPr id="115" name="pl115"/>
+            <p:cNvSpPr/>
+            <p:nvPr/>
+          </p:nvSpPr>
+          <p:spPr>
+            <a:xfrm>
+              <a:off x="8376088" y="3102452"/>
               <a:ext cx="1170676" cy="0"/>
             </a:xfrm>
             <a:custGeom>
@@ -6426,13 +6469,13 @@
         </p:sp>
         <p:sp>
           <p:nvSpPr>
-            <p:cNvPr id="115" name="pl115"/>
-            <p:cNvSpPr/>
-            <p:nvPr/>
-          </p:nvSpPr>
-          <p:spPr>
-            <a:xfrm>
-              <a:off x="8522112" y="959068"/>
+            <p:cNvPr id="116" name="pl116"/>
+            <p:cNvSpPr/>
+            <p:nvPr/>
+          </p:nvSpPr>
+          <p:spPr>
+            <a:xfrm>
+              <a:off x="8522112" y="1065047"/>
               <a:ext cx="1765060" cy="0"/>
             </a:xfrm>
             <a:custGeom>
@@ -6466,13 +6509,13 @@
         </p:sp>
         <p:sp>
           <p:nvSpPr>
-            <p:cNvPr id="116" name="pl116"/>
-            <p:cNvSpPr/>
-            <p:nvPr/>
-          </p:nvSpPr>
-          <p:spPr>
-            <a:xfrm>
-              <a:off x="8831872" y="1337620"/>
+            <p:cNvPr id="117" name="pl117"/>
+            <p:cNvSpPr/>
+            <p:nvPr/>
+          </p:nvSpPr>
+          <p:spPr>
+            <a:xfrm>
+              <a:off x="8831872" y="1435485"/>
               <a:ext cx="1575377" cy="0"/>
             </a:xfrm>
             <a:custGeom>
@@ -6506,13 +6549,13 @@
         </p:sp>
         <p:sp>
           <p:nvSpPr>
-            <p:cNvPr id="117" name="pl117"/>
-            <p:cNvSpPr/>
-            <p:nvPr/>
-          </p:nvSpPr>
-          <p:spPr>
-            <a:xfrm>
-              <a:off x="8333794" y="1526896"/>
+            <p:cNvPr id="118" name="pl118"/>
+            <p:cNvSpPr/>
+            <p:nvPr/>
+          </p:nvSpPr>
+          <p:spPr>
+            <a:xfrm>
+              <a:off x="8333794" y="1620703"/>
               <a:ext cx="1923810" cy="0"/>
             </a:xfrm>
             <a:custGeom>
@@ -6546,24 +6589,24 @@
         </p:sp>
         <p:sp>
           <p:nvSpPr>
-            <p:cNvPr id="118" name="pl118"/>
-            <p:cNvSpPr/>
-            <p:nvPr/>
-          </p:nvSpPr>
-          <p:spPr>
-            <a:xfrm>
-              <a:off x="9681487" y="730675"/>
-              <a:ext cx="1073578" cy="0"/>
+            <p:cNvPr id="119" name="pl119"/>
+            <p:cNvSpPr/>
+            <p:nvPr/>
+          </p:nvSpPr>
+          <p:spPr>
+            <a:xfrm>
+              <a:off x="9667806" y="841550"/>
+              <a:ext cx="1073801" cy="0"/>
             </a:xfrm>
             <a:custGeom>
               <a:avLst/>
               <a:pathLst>
-                <a:path w="1073578" h="0">
+                <a:path w="1073801" h="0">
                   <a:moveTo>
                     <a:pt x="0" y="0"/>
                   </a:moveTo>
                   <a:lnTo>
-                    <a:pt x="1073578" y="0"/>
+                    <a:pt x="1073801" y="0"/>
                   </a:lnTo>
                 </a:path>
               </a:pathLst>
@@ -6586,24 +6629,24 @@
         </p:sp>
         <p:sp>
           <p:nvSpPr>
-            <p:cNvPr id="119" name="pl119"/>
-            <p:cNvSpPr/>
-            <p:nvPr/>
-          </p:nvSpPr>
-          <p:spPr>
-            <a:xfrm>
-              <a:off x="9083239" y="1109227"/>
-              <a:ext cx="1051823" cy="0"/>
+            <p:cNvPr id="120" name="pl120"/>
+            <p:cNvSpPr/>
+            <p:nvPr/>
+          </p:nvSpPr>
+          <p:spPr>
+            <a:xfrm>
+              <a:off x="9079005" y="1211988"/>
+              <a:ext cx="1052101" cy="0"/>
             </a:xfrm>
             <a:custGeom>
               <a:avLst/>
               <a:pathLst>
-                <a:path w="1051823" h="0">
+                <a:path w="1052101" h="0">
                   <a:moveTo>
                     <a:pt x="0" y="0"/>
                   </a:moveTo>
                   <a:lnTo>
-                    <a:pt x="1051823" y="0"/>
+                    <a:pt x="1052101" y="0"/>
                   </a:lnTo>
                 </a:path>
               </a:pathLst>
@@ -6626,24 +6669,24 @@
         </p:sp>
         <p:sp>
           <p:nvSpPr>
-            <p:cNvPr id="120" name="pl120"/>
-            <p:cNvSpPr/>
-            <p:nvPr/>
-          </p:nvSpPr>
-          <p:spPr>
-            <a:xfrm>
-              <a:off x="8320328" y="2434159"/>
-              <a:ext cx="1206292" cy="0"/>
+            <p:cNvPr id="121" name="pl121"/>
+            <p:cNvSpPr/>
+            <p:nvPr/>
+          </p:nvSpPr>
+          <p:spPr>
+            <a:xfrm>
+              <a:off x="8320905" y="2508518"/>
+              <a:ext cx="1207786" cy="0"/>
             </a:xfrm>
             <a:custGeom>
               <a:avLst/>
               <a:pathLst>
-                <a:path w="1206292" h="0">
+                <a:path w="1207786" h="0">
                   <a:moveTo>
                     <a:pt x="0" y="0"/>
                   </a:moveTo>
                   <a:lnTo>
-                    <a:pt x="1206292" y="0"/>
+                    <a:pt x="1207786" y="0"/>
                   </a:lnTo>
                 </a:path>
               </a:pathLst>
@@ -6666,24 +6709,24 @@
         </p:sp>
         <p:sp>
           <p:nvSpPr>
-            <p:cNvPr id="121" name="pl121"/>
-            <p:cNvSpPr/>
-            <p:nvPr/>
-          </p:nvSpPr>
-          <p:spPr>
-            <a:xfrm>
-              <a:off x="8270716" y="2244883"/>
-              <a:ext cx="1445263" cy="0"/>
+            <p:cNvPr id="122" name="pl122"/>
+            <p:cNvSpPr/>
+            <p:nvPr/>
+          </p:nvSpPr>
+          <p:spPr>
+            <a:xfrm>
+              <a:off x="8272369" y="2323299"/>
+              <a:ext cx="1445968" cy="0"/>
             </a:xfrm>
             <a:custGeom>
               <a:avLst/>
               <a:pathLst>
-                <a:path w="1445263" h="0">
+                <a:path w="1445968" h="0">
                   <a:moveTo>
                     <a:pt x="0" y="0"/>
                   </a:moveTo>
                   <a:lnTo>
-                    <a:pt x="1445263" y="0"/>
+                    <a:pt x="1445968" y="0"/>
                   </a:lnTo>
                 </a:path>
               </a:pathLst>
@@ -6706,24 +6749,24 @@
         </p:sp>
         <p:sp>
           <p:nvSpPr>
-            <p:cNvPr id="122" name="pl122"/>
-            <p:cNvSpPr/>
-            <p:nvPr/>
-          </p:nvSpPr>
-          <p:spPr>
-            <a:xfrm>
-              <a:off x="8214499" y="2055607"/>
-              <a:ext cx="1610581" cy="0"/>
+            <p:cNvPr id="123" name="pl123"/>
+            <p:cNvSpPr/>
+            <p:nvPr/>
+          </p:nvSpPr>
+          <p:spPr>
+            <a:xfrm>
+              <a:off x="8217890" y="2138081"/>
+              <a:ext cx="1611995" cy="0"/>
             </a:xfrm>
             <a:custGeom>
               <a:avLst/>
               <a:pathLst>
-                <a:path w="1610581" h="0">
+                <a:path w="1611995" h="0">
                   <a:moveTo>
                     <a:pt x="0" y="0"/>
                   </a:moveTo>
                   <a:lnTo>
-                    <a:pt x="1610581" y="0"/>
+                    <a:pt x="1611995" y="0"/>
                   </a:lnTo>
                 </a:path>
               </a:pathLst>
@@ -6746,24 +6789,24 @@
         </p:sp>
         <p:sp>
           <p:nvSpPr>
-            <p:cNvPr id="123" name="pl123"/>
-            <p:cNvSpPr/>
-            <p:nvPr/>
-          </p:nvSpPr>
-          <p:spPr>
-            <a:xfrm>
-              <a:off x="8242737" y="1866331"/>
-              <a:ext cx="1988917" cy="0"/>
+            <p:cNvPr id="124" name="pl124"/>
+            <p:cNvSpPr/>
+            <p:nvPr/>
+          </p:nvSpPr>
+          <p:spPr>
+            <a:xfrm>
+              <a:off x="8239582" y="1952862"/>
+              <a:ext cx="1988820" cy="0"/>
             </a:xfrm>
             <a:custGeom>
               <a:avLst/>
               <a:pathLst>
-                <a:path w="1988917" h="0">
+                <a:path w="1988820" h="0">
                   <a:moveTo>
                     <a:pt x="0" y="0"/>
                   </a:moveTo>
                   <a:lnTo>
-                    <a:pt x="1988917" y="0"/>
+                    <a:pt x="1988820" y="0"/>
                   </a:lnTo>
                 </a:path>
               </a:pathLst>
@@ -6786,24 +6829,24 @@
         </p:sp>
         <p:sp>
           <p:nvSpPr>
-            <p:cNvPr id="124" name="pl124"/>
-            <p:cNvSpPr/>
-            <p:nvPr/>
-          </p:nvSpPr>
-          <p:spPr>
-            <a:xfrm>
-              <a:off x="7863091" y="2812711"/>
-              <a:ext cx="1943760" cy="0"/>
+            <p:cNvPr id="125" name="pl125"/>
+            <p:cNvSpPr/>
+            <p:nvPr/>
+          </p:nvSpPr>
+          <p:spPr>
+            <a:xfrm>
+              <a:off x="7866051" y="2878955"/>
+              <a:ext cx="1944199" cy="0"/>
             </a:xfrm>
             <a:custGeom>
               <a:avLst/>
               <a:pathLst>
-                <a:path w="1943760" h="0">
+                <a:path w="1944199" h="0">
                   <a:moveTo>
                     <a:pt x="0" y="0"/>
                   </a:moveTo>
                   <a:lnTo>
-                    <a:pt x="1943760" y="0"/>
+                    <a:pt x="1944199" y="0"/>
                   </a:lnTo>
                 </a:path>
               </a:pathLst>
@@ -6826,24 +6869,24 @@
         </p:sp>
         <p:sp>
           <p:nvSpPr>
-            <p:cNvPr id="125" name="pl125"/>
-            <p:cNvSpPr/>
-            <p:nvPr/>
-          </p:nvSpPr>
-          <p:spPr>
-            <a:xfrm>
-              <a:off x="7619432" y="2623435"/>
-              <a:ext cx="2458618" cy="0"/>
+            <p:cNvPr id="126" name="pl126"/>
+            <p:cNvSpPr/>
+            <p:nvPr/>
+          </p:nvSpPr>
+          <p:spPr>
+            <a:xfrm>
+              <a:off x="7618627" y="2693736"/>
+              <a:ext cx="2465586" cy="0"/>
             </a:xfrm>
             <a:custGeom>
               <a:avLst/>
               <a:pathLst>
-                <a:path w="2458618" h="0">
+                <a:path w="2465586" h="0">
                   <a:moveTo>
                     <a:pt x="0" y="0"/>
                   </a:moveTo>
                   <a:lnTo>
-                    <a:pt x="2458618" y="0"/>
+                    <a:pt x="2465586" y="0"/>
                   </a:lnTo>
                 </a:path>
               </a:pathLst>
@@ -6866,24 +6909,24 @@
         </p:sp>
         <p:sp>
           <p:nvSpPr>
-            <p:cNvPr id="126" name="pl126"/>
-            <p:cNvSpPr/>
-            <p:nvPr/>
-          </p:nvSpPr>
-          <p:spPr>
-            <a:xfrm>
-              <a:off x="8844208" y="1677055"/>
-              <a:ext cx="897923" cy="0"/>
+            <p:cNvPr id="127" name="pl127"/>
+            <p:cNvSpPr/>
+            <p:nvPr/>
+          </p:nvSpPr>
+          <p:spPr>
+            <a:xfrm>
+              <a:off x="8837275" y="1767643"/>
+              <a:ext cx="898175" cy="0"/>
             </a:xfrm>
             <a:custGeom>
               <a:avLst/>
               <a:pathLst>
-                <a:path w="897923" h="0">
+                <a:path w="898175" h="0">
                   <a:moveTo>
                     <a:pt x="0" y="0"/>
                   </a:moveTo>
                   <a:lnTo>
-                    <a:pt x="897923" y="0"/>
+                    <a:pt x="898175" y="0"/>
                   </a:lnTo>
                 </a:path>
               </a:pathLst>
@@ -6906,24 +6949,24 @@
         </p:sp>
         <p:sp>
           <p:nvSpPr>
-            <p:cNvPr id="127" name="pl127"/>
-            <p:cNvSpPr/>
-            <p:nvPr/>
-          </p:nvSpPr>
-          <p:spPr>
-            <a:xfrm>
-              <a:off x="7882593" y="3001987"/>
-              <a:ext cx="1112684" cy="0"/>
+            <p:cNvPr id="128" name="pl128"/>
+            <p:cNvSpPr/>
+            <p:nvPr/>
+          </p:nvSpPr>
+          <p:spPr>
+            <a:xfrm>
+              <a:off x="7870502" y="3064174"/>
+              <a:ext cx="1113467" cy="0"/>
             </a:xfrm>
             <a:custGeom>
               <a:avLst/>
               <a:pathLst>
-                <a:path w="1112684" h="0">
+                <a:path w="1113467" h="0">
                   <a:moveTo>
                     <a:pt x="0" y="0"/>
                   </a:moveTo>
                   <a:lnTo>
-                    <a:pt x="1112684" y="0"/>
+                    <a:pt x="1113467" y="0"/>
                   </a:lnTo>
                 </a:path>
               </a:pathLst>
@@ -6946,24 +6989,24 @@
         </p:sp>
         <p:sp>
           <p:nvSpPr>
-            <p:cNvPr id="128" name="pl128"/>
-            <p:cNvSpPr/>
-            <p:nvPr/>
-          </p:nvSpPr>
-          <p:spPr>
-            <a:xfrm>
-              <a:off x="8805167" y="919951"/>
-              <a:ext cx="1618921" cy="0"/>
+            <p:cNvPr id="129" name="pl129"/>
+            <p:cNvSpPr/>
+            <p:nvPr/>
+          </p:nvSpPr>
+          <p:spPr>
+            <a:xfrm>
+              <a:off x="8802644" y="1026769"/>
+              <a:ext cx="1620838" cy="0"/>
             </a:xfrm>
             <a:custGeom>
               <a:avLst/>
               <a:pathLst>
-                <a:path w="1618921" h="0">
+                <a:path w="1620838" h="0">
                   <a:moveTo>
                     <a:pt x="0" y="0"/>
                   </a:moveTo>
                   <a:lnTo>
-                    <a:pt x="1618921" y="0"/>
+                    <a:pt x="1620838" y="0"/>
                   </a:lnTo>
                 </a:path>
               </a:pathLst>
@@ -6986,24 +7029,24 @@
         </p:sp>
         <p:sp>
           <p:nvSpPr>
-            <p:cNvPr id="129" name="pl129"/>
-            <p:cNvSpPr/>
-            <p:nvPr/>
-          </p:nvSpPr>
-          <p:spPr>
-            <a:xfrm>
-              <a:off x="8715392" y="1298503"/>
-              <a:ext cx="1535231" cy="0"/>
+            <p:cNvPr id="130" name="pl130"/>
+            <p:cNvSpPr/>
+            <p:nvPr/>
+          </p:nvSpPr>
+          <p:spPr>
+            <a:xfrm>
+              <a:off x="8714618" y="1397206"/>
+              <a:ext cx="1536120" cy="0"/>
             </a:xfrm>
             <a:custGeom>
               <a:avLst/>
               <a:pathLst>
-                <a:path w="1535231" h="0">
+                <a:path w="1536120" h="0">
                   <a:moveTo>
                     <a:pt x="0" y="0"/>
                   </a:moveTo>
                   <a:lnTo>
-                    <a:pt x="1535231" y="0"/>
+                    <a:pt x="1536120" y="0"/>
                   </a:lnTo>
                 </a:path>
               </a:pathLst>
@@ -7026,24 +7069,24 @@
         </p:sp>
         <p:sp>
           <p:nvSpPr>
-            <p:cNvPr id="130" name="pl130"/>
-            <p:cNvSpPr/>
-            <p:nvPr/>
-          </p:nvSpPr>
-          <p:spPr>
-            <a:xfrm>
-              <a:off x="8411760" y="1487779"/>
-              <a:ext cx="1813168" cy="0"/>
+            <p:cNvPr id="131" name="pl131"/>
+            <p:cNvSpPr/>
+            <p:nvPr/>
+          </p:nvSpPr>
+          <p:spPr>
+            <a:xfrm>
+              <a:off x="8416346" y="1582425"/>
+              <a:ext cx="1817006" cy="0"/>
             </a:xfrm>
             <a:custGeom>
               <a:avLst/>
               <a:pathLst>
-                <a:path w="1813168" h="0">
+                <a:path w="1817006" h="0">
                   <a:moveTo>
                     <a:pt x="0" y="0"/>
                   </a:moveTo>
                   <a:lnTo>
-                    <a:pt x="1813168" y="0"/>
+                    <a:pt x="1817006" y="0"/>
                   </a:lnTo>
                 </a:path>
               </a:pathLst>
@@ -7066,13 +7109,13 @@
         </p:sp>
         <p:sp>
           <p:nvSpPr>
-            <p:cNvPr id="131" name="pt131"/>
-            <p:cNvSpPr/>
-            <p:nvPr/>
-          </p:nvSpPr>
-          <p:spPr>
-            <a:xfrm>
-              <a:off x="10566419" y="778126"/>
+            <p:cNvPr id="132" name="pt132"/>
+            <p:cNvSpPr/>
+            <p:nvPr/>
+          </p:nvSpPr>
+          <p:spPr>
+            <a:xfrm>
+              <a:off x="10566419" y="887324"/>
               <a:ext cx="61566" cy="61566"/>
             </a:xfrm>
             <a:prstGeom prst="ellipse">
@@ -7092,13 +7135,13 @@
         </p:sp>
         <p:sp>
           <p:nvSpPr>
-            <p:cNvPr id="132" name="pt132"/>
-            <p:cNvSpPr/>
-            <p:nvPr/>
-          </p:nvSpPr>
-          <p:spPr>
-            <a:xfrm>
-              <a:off x="9779686" y="1156678"/>
+            <p:cNvPr id="133" name="pt133"/>
+            <p:cNvSpPr/>
+            <p:nvPr/>
+          </p:nvSpPr>
+          <p:spPr>
+            <a:xfrm>
+              <a:off x="9779686" y="1257761"/>
               <a:ext cx="61566" cy="61566"/>
             </a:xfrm>
             <a:prstGeom prst="ellipse">
@@ -7122,13 +7165,13 @@
         </p:sp>
         <p:sp>
           <p:nvSpPr>
-            <p:cNvPr id="133" name="pt133"/>
-            <p:cNvSpPr/>
-            <p:nvPr/>
-          </p:nvSpPr>
-          <p:spPr>
-            <a:xfrm>
-              <a:off x="9194405" y="2481610"/>
+            <p:cNvPr id="134" name="pt134"/>
+            <p:cNvSpPr/>
+            <p:nvPr/>
+          </p:nvSpPr>
+          <p:spPr>
+            <a:xfrm>
+              <a:off x="9194405" y="2554292"/>
               <a:ext cx="61566" cy="61566"/>
             </a:xfrm>
             <a:prstGeom prst="ellipse">
@@ -7152,13 +7195,13 @@
         </p:sp>
         <p:sp>
           <p:nvSpPr>
-            <p:cNvPr id="134" name="pt134"/>
-            <p:cNvSpPr/>
-            <p:nvPr/>
-          </p:nvSpPr>
-          <p:spPr>
-            <a:xfrm>
-              <a:off x="9170858" y="2292334"/>
+            <p:cNvPr id="135" name="pt135"/>
+            <p:cNvSpPr/>
+            <p:nvPr/>
+          </p:nvSpPr>
+          <p:spPr>
+            <a:xfrm>
+              <a:off x="9170858" y="2369073"/>
               <a:ext cx="61566" cy="61566"/>
             </a:xfrm>
             <a:prstGeom prst="ellipse">
@@ -7182,13 +7225,13 @@
         </p:sp>
         <p:sp>
           <p:nvSpPr>
-            <p:cNvPr id="135" name="pt135"/>
-            <p:cNvSpPr/>
-            <p:nvPr/>
-          </p:nvSpPr>
-          <p:spPr>
-            <a:xfrm>
-              <a:off x="8785126" y="2103058"/>
+            <p:cNvPr id="136" name="pt136"/>
+            <p:cNvSpPr/>
+            <p:nvPr/>
+          </p:nvSpPr>
+          <p:spPr>
+            <a:xfrm>
+              <a:off x="8785126" y="2183854"/>
               <a:ext cx="61566" cy="61566"/>
             </a:xfrm>
             <a:prstGeom prst="ellipse">
@@ -7212,13 +7255,13 @@
         </p:sp>
         <p:sp>
           <p:nvSpPr>
-            <p:cNvPr id="136" name="pt136"/>
-            <p:cNvSpPr/>
-            <p:nvPr/>
-          </p:nvSpPr>
-          <p:spPr>
-            <a:xfrm>
-              <a:off x="9474174" y="1913782"/>
+            <p:cNvPr id="137" name="pt137"/>
+            <p:cNvSpPr/>
+            <p:nvPr/>
+          </p:nvSpPr>
+          <p:spPr>
+            <a:xfrm>
+              <a:off x="9474174" y="1998636"/>
               <a:ext cx="61566" cy="61566"/>
             </a:xfrm>
             <a:prstGeom prst="ellipse">
@@ -7242,13 +7285,13 @@
         </p:sp>
         <p:sp>
           <p:nvSpPr>
-            <p:cNvPr id="137" name="pt137"/>
-            <p:cNvSpPr/>
-            <p:nvPr/>
-          </p:nvSpPr>
-          <p:spPr>
-            <a:xfrm>
-              <a:off x="8909962" y="2860162"/>
+            <p:cNvPr id="138" name="pt138"/>
+            <p:cNvSpPr/>
+            <p:nvPr/>
+          </p:nvSpPr>
+          <p:spPr>
+            <a:xfrm>
+              <a:off x="8909962" y="2924729"/>
               <a:ext cx="61566" cy="61566"/>
             </a:xfrm>
             <a:prstGeom prst="ellipse">
@@ -7272,13 +7315,13 @@
         </p:sp>
         <p:sp>
           <p:nvSpPr>
-            <p:cNvPr id="138" name="pt138"/>
-            <p:cNvSpPr/>
-            <p:nvPr/>
-          </p:nvSpPr>
-          <p:spPr>
-            <a:xfrm>
-              <a:off x="9347867" y="2670886"/>
+            <p:cNvPr id="139" name="pt139"/>
+            <p:cNvSpPr/>
+            <p:nvPr/>
+          </p:nvSpPr>
+          <p:spPr>
+            <a:xfrm>
+              <a:off x="9347867" y="2739510"/>
               <a:ext cx="61566" cy="61566"/>
             </a:xfrm>
             <a:prstGeom prst="ellipse">
@@ -7302,13 +7345,13 @@
         </p:sp>
         <p:sp>
           <p:nvSpPr>
-            <p:cNvPr id="139" name="pt139"/>
-            <p:cNvSpPr/>
-            <p:nvPr/>
-          </p:nvSpPr>
-          <p:spPr>
-            <a:xfrm>
-              <a:off x="9429378" y="1724506"/>
+            <p:cNvPr id="140" name="pt140"/>
+            <p:cNvSpPr/>
+            <p:nvPr/>
+          </p:nvSpPr>
+          <p:spPr>
+            <a:xfrm>
+              <a:off x="9429378" y="1813417"/>
               <a:ext cx="61566" cy="61566"/>
             </a:xfrm>
             <a:prstGeom prst="ellipse">
@@ -7332,13 +7375,13 @@
         </p:sp>
         <p:sp>
           <p:nvSpPr>
-            <p:cNvPr id="140" name="pt140"/>
-            <p:cNvSpPr/>
-            <p:nvPr/>
-          </p:nvSpPr>
-          <p:spPr>
-            <a:xfrm>
-              <a:off x="8942092" y="3049438"/>
+            <p:cNvPr id="141" name="pt141"/>
+            <p:cNvSpPr/>
+            <p:nvPr/>
+          </p:nvSpPr>
+          <p:spPr>
+            <a:xfrm>
+              <a:off x="8942092" y="3109948"/>
               <a:ext cx="61566" cy="61566"/>
             </a:xfrm>
             <a:prstGeom prst="ellipse">
@@ -7362,13 +7405,13 @@
         </p:sp>
         <p:sp>
           <p:nvSpPr>
-            <p:cNvPr id="141" name="pt141"/>
-            <p:cNvSpPr/>
-            <p:nvPr/>
-          </p:nvSpPr>
-          <p:spPr>
-            <a:xfrm>
-              <a:off x="9323214" y="967402"/>
+            <p:cNvPr id="142" name="pt142"/>
+            <p:cNvSpPr/>
+            <p:nvPr/>
+          </p:nvSpPr>
+          <p:spPr>
+            <a:xfrm>
+              <a:off x="9323214" y="1072543"/>
               <a:ext cx="61566" cy="61566"/>
             </a:xfrm>
             <a:prstGeom prst="ellipse">
@@ -7392,13 +7435,13 @@
         </p:sp>
         <p:sp>
           <p:nvSpPr>
-            <p:cNvPr id="142" name="pt142"/>
-            <p:cNvSpPr/>
-            <p:nvPr/>
-          </p:nvSpPr>
-          <p:spPr>
-            <a:xfrm>
-              <a:off x="9583961" y="1345954"/>
+            <p:cNvPr id="143" name="pt143"/>
+            <p:cNvSpPr/>
+            <p:nvPr/>
+          </p:nvSpPr>
+          <p:spPr>
+            <a:xfrm>
+              <a:off x="9583961" y="1442980"/>
               <a:ext cx="61566" cy="61566"/>
             </a:xfrm>
             <a:prstGeom prst="ellipse">
@@ -7422,13 +7465,13 @@
         </p:sp>
         <p:sp>
           <p:nvSpPr>
-            <p:cNvPr id="143" name="pt143"/>
-            <p:cNvSpPr/>
-            <p:nvPr/>
-          </p:nvSpPr>
-          <p:spPr>
-            <a:xfrm>
-              <a:off x="9286337" y="1535230"/>
+            <p:cNvPr id="144" name="pt144"/>
+            <p:cNvSpPr/>
+            <p:nvPr/>
+          </p:nvSpPr>
+          <p:spPr>
+            <a:xfrm>
+              <a:off x="9286337" y="1628199"/>
               <a:ext cx="61566" cy="61566"/>
             </a:xfrm>
             <a:prstGeom prst="ellipse">
@@ -7452,13 +7495,13 @@
         </p:sp>
         <p:sp>
           <p:nvSpPr>
-            <p:cNvPr id="144" name="pt144"/>
-            <p:cNvSpPr/>
-            <p:nvPr/>
-          </p:nvSpPr>
-          <p:spPr>
-            <a:xfrm>
-              <a:off x="10571988" y="739009"/>
+            <p:cNvPr id="145" name="pt145"/>
+            <p:cNvSpPr/>
+            <p:nvPr/>
+          </p:nvSpPr>
+          <p:spPr>
+            <a:xfrm>
+              <a:off x="10571988" y="849046"/>
               <a:ext cx="61566" cy="61566"/>
             </a:xfrm>
             <a:prstGeom prst="ellipse">
@@ -7478,13 +7521,13 @@
         </p:sp>
         <p:sp>
           <p:nvSpPr>
-            <p:cNvPr id="145" name="pt145"/>
-            <p:cNvSpPr/>
-            <p:nvPr/>
-          </p:nvSpPr>
-          <p:spPr>
-            <a:xfrm>
-              <a:off x="9843748" y="1078444"/>
+            <p:cNvPr id="146" name="pt146"/>
+            <p:cNvSpPr/>
+            <p:nvPr/>
+          </p:nvSpPr>
+          <p:spPr>
+            <a:xfrm>
+              <a:off x="9843748" y="1181204"/>
               <a:ext cx="61566" cy="61566"/>
             </a:xfrm>
             <a:prstGeom prst="ellipse">
@@ -7504,13 +7547,13 @@
         </p:sp>
         <p:sp>
           <p:nvSpPr>
-            <p:cNvPr id="146" name="pt146"/>
-            <p:cNvSpPr/>
-            <p:nvPr/>
-          </p:nvSpPr>
-          <p:spPr>
-            <a:xfrm>
-              <a:off x="9309219" y="2442493"/>
+            <p:cNvPr id="147" name="pt147"/>
+            <p:cNvSpPr/>
+            <p:nvPr/>
+          </p:nvSpPr>
+          <p:spPr>
+            <a:xfrm>
+              <a:off x="9309219" y="2516013"/>
               <a:ext cx="61566" cy="61566"/>
             </a:xfrm>
             <a:prstGeom prst="ellipse">
@@ -7534,13 +7577,13 @@
         </p:sp>
         <p:sp>
           <p:nvSpPr>
-            <p:cNvPr id="147" name="pt147"/>
-            <p:cNvSpPr/>
-            <p:nvPr/>
-          </p:nvSpPr>
-          <p:spPr>
-            <a:xfrm>
-              <a:off x="9643881" y="2253217"/>
+            <p:cNvPr id="148" name="pt148"/>
+            <p:cNvSpPr/>
+            <p:nvPr/>
+          </p:nvSpPr>
+          <p:spPr>
+            <a:xfrm>
+              <a:off x="9643881" y="2330795"/>
               <a:ext cx="61566" cy="61566"/>
             </a:xfrm>
             <a:prstGeom prst="ellipse">
@@ -7564,13 +7607,13 @@
         </p:sp>
         <p:sp>
           <p:nvSpPr>
-            <p:cNvPr id="148" name="pt148"/>
-            <p:cNvSpPr/>
-            <p:nvPr/>
-          </p:nvSpPr>
-          <p:spPr>
-            <a:xfrm>
-              <a:off x="8799591" y="2063941"/>
+            <p:cNvPr id="149" name="pt149"/>
+            <p:cNvSpPr/>
+            <p:nvPr/>
+          </p:nvSpPr>
+          <p:spPr>
+            <a:xfrm>
+              <a:off x="8799591" y="2145576"/>
               <a:ext cx="61566" cy="61566"/>
             </a:xfrm>
             <a:prstGeom prst="ellipse">
@@ -7594,13 +7637,13 @@
         </p:sp>
         <p:sp>
           <p:nvSpPr>
-            <p:cNvPr id="149" name="pt149"/>
-            <p:cNvSpPr/>
-            <p:nvPr/>
-          </p:nvSpPr>
-          <p:spPr>
-            <a:xfrm>
-              <a:off x="8930247" y="1874665"/>
+            <p:cNvPr id="150" name="pt150"/>
+            <p:cNvSpPr/>
+            <p:nvPr/>
+          </p:nvSpPr>
+          <p:spPr>
+            <a:xfrm>
+              <a:off x="8930247" y="1960357"/>
               <a:ext cx="61566" cy="61566"/>
             </a:xfrm>
             <a:prstGeom prst="ellipse">
@@ -7624,13 +7667,13 @@
         </p:sp>
         <p:sp>
           <p:nvSpPr>
-            <p:cNvPr id="150" name="pt150"/>
-            <p:cNvSpPr/>
-            <p:nvPr/>
-          </p:nvSpPr>
-          <p:spPr>
-            <a:xfrm>
-              <a:off x="9065842" y="2821045"/>
+            <p:cNvPr id="151" name="pt151"/>
+            <p:cNvSpPr/>
+            <p:nvPr/>
+          </p:nvSpPr>
+          <p:spPr>
+            <a:xfrm>
+              <a:off x="9065842" y="2886450"/>
               <a:ext cx="61566" cy="61566"/>
             </a:xfrm>
             <a:prstGeom prst="ellipse">
@@ -7654,13 +7697,13 @@
         </p:sp>
         <p:sp>
           <p:nvSpPr>
-            <p:cNvPr id="151" name="pt151"/>
-            <p:cNvSpPr/>
-            <p:nvPr/>
-          </p:nvSpPr>
-          <p:spPr>
-            <a:xfrm>
-              <a:off x="9620576" y="2631769"/>
+            <p:cNvPr id="152" name="pt152"/>
+            <p:cNvSpPr/>
+            <p:nvPr/>
+          </p:nvSpPr>
+          <p:spPr>
+            <a:xfrm>
+              <a:off x="9620576" y="2701232"/>
               <a:ext cx="61566" cy="61566"/>
             </a:xfrm>
             <a:prstGeom prst="ellipse">
@@ -7684,13 +7727,13 @@
         </p:sp>
         <p:sp>
           <p:nvSpPr>
-            <p:cNvPr id="152" name="pt152"/>
-            <p:cNvSpPr/>
-            <p:nvPr/>
-          </p:nvSpPr>
-          <p:spPr>
-            <a:xfrm>
-              <a:off x="9436688" y="1685389"/>
+            <p:cNvPr id="153" name="pt153"/>
+            <p:cNvSpPr/>
+            <p:nvPr/>
+          </p:nvSpPr>
+          <p:spPr>
+            <a:xfrm>
+              <a:off x="9436688" y="1775139"/>
               <a:ext cx="61566" cy="61566"/>
             </a:xfrm>
             <a:prstGeom prst="ellipse">
@@ -7714,13 +7757,13 @@
         </p:sp>
         <p:sp>
           <p:nvSpPr>
-            <p:cNvPr id="153" name="pt153"/>
-            <p:cNvSpPr/>
-            <p:nvPr/>
-          </p:nvSpPr>
-          <p:spPr>
-            <a:xfrm>
-              <a:off x="8930643" y="3010321"/>
+            <p:cNvPr id="154" name="pt154"/>
+            <p:cNvSpPr/>
+            <p:nvPr/>
+          </p:nvSpPr>
+          <p:spPr>
+            <a:xfrm>
+              <a:off x="8930643" y="3071669"/>
               <a:ext cx="61566" cy="61566"/>
             </a:xfrm>
             <a:prstGeom prst="ellipse">
@@ -7744,13 +7787,13 @@
         </p:sp>
         <p:sp>
           <p:nvSpPr>
-            <p:cNvPr id="154" name="pt154"/>
-            <p:cNvSpPr/>
-            <p:nvPr/>
-          </p:nvSpPr>
-          <p:spPr>
-            <a:xfrm>
-              <a:off x="9373859" y="928285"/>
+            <p:cNvPr id="155" name="pt155"/>
+            <p:cNvSpPr/>
+            <p:nvPr/>
+          </p:nvSpPr>
+          <p:spPr>
+            <a:xfrm>
+              <a:off x="9373859" y="1034264"/>
               <a:ext cx="61566" cy="61566"/>
             </a:xfrm>
             <a:prstGeom prst="ellipse">
@@ -7774,13 +7817,13 @@
         </p:sp>
         <p:sp>
           <p:nvSpPr>
-            <p:cNvPr id="155" name="pt155"/>
-            <p:cNvSpPr/>
-            <p:nvPr/>
-          </p:nvSpPr>
-          <p:spPr>
-            <a:xfrm>
-              <a:off x="9588778" y="1306837"/>
+            <p:cNvPr id="156" name="pt156"/>
+            <p:cNvSpPr/>
+            <p:nvPr/>
+          </p:nvSpPr>
+          <p:spPr>
+            <a:xfrm>
+              <a:off x="9588778" y="1404702"/>
               <a:ext cx="61566" cy="61566"/>
             </a:xfrm>
             <a:prstGeom prst="ellipse">
@@ -7804,13 +7847,13 @@
         </p:sp>
         <p:sp>
           <p:nvSpPr>
-            <p:cNvPr id="156" name="pt156"/>
-            <p:cNvSpPr/>
-            <p:nvPr/>
-          </p:nvSpPr>
-          <p:spPr>
-            <a:xfrm>
-              <a:off x="9264916" y="1496113"/>
+            <p:cNvPr id="157" name="pt157"/>
+            <p:cNvSpPr/>
+            <p:nvPr/>
+          </p:nvSpPr>
+          <p:spPr>
+            <a:xfrm>
+              <a:off x="9264916" y="1589920"/>
               <a:ext cx="61566" cy="61566"/>
             </a:xfrm>
             <a:prstGeom prst="ellipse">
@@ -7834,13 +7877,13 @@
         </p:sp>
         <p:sp>
           <p:nvSpPr>
-            <p:cNvPr id="157" name="pt157"/>
-            <p:cNvSpPr/>
-            <p:nvPr/>
-          </p:nvSpPr>
-          <p:spPr>
-            <a:xfrm>
-              <a:off x="10187493" y="699892"/>
+            <p:cNvPr id="158" name="pt158"/>
+            <p:cNvSpPr/>
+            <p:nvPr/>
+          </p:nvSpPr>
+          <p:spPr>
+            <a:xfrm>
+              <a:off x="10173924" y="810767"/>
               <a:ext cx="61566" cy="61566"/>
             </a:xfrm>
             <a:prstGeom prst="ellipse">
@@ -7860,13 +7903,13 @@
         </p:sp>
         <p:sp>
           <p:nvSpPr>
-            <p:cNvPr id="158" name="pt158"/>
-            <p:cNvSpPr/>
-            <p:nvPr/>
-          </p:nvSpPr>
-          <p:spPr>
-            <a:xfrm>
-              <a:off x="9578368" y="1117561"/>
+            <p:cNvPr id="159" name="pt159"/>
+            <p:cNvSpPr/>
+            <p:nvPr/>
+          </p:nvSpPr>
+          <p:spPr>
+            <a:xfrm>
+              <a:off x="9574272" y="1219483"/>
               <a:ext cx="61566" cy="61566"/>
             </a:xfrm>
             <a:prstGeom prst="ellipse">
@@ -7890,13 +7933,13 @@
         </p:sp>
         <p:sp>
           <p:nvSpPr>
-            <p:cNvPr id="159" name="pt159"/>
-            <p:cNvSpPr/>
-            <p:nvPr/>
-          </p:nvSpPr>
-          <p:spPr>
-            <a:xfrm>
-              <a:off x="8892691" y="2403376"/>
+            <p:cNvPr id="160" name="pt160"/>
+            <p:cNvSpPr/>
+            <p:nvPr/>
+          </p:nvSpPr>
+          <p:spPr>
+            <a:xfrm>
+              <a:off x="8894015" y="2477735"/>
               <a:ext cx="61566" cy="61566"/>
             </a:xfrm>
             <a:prstGeom prst="ellipse">
@@ -7920,13 +7963,13 @@
         </p:sp>
         <p:sp>
           <p:nvSpPr>
-            <p:cNvPr id="160" name="pt160"/>
-            <p:cNvSpPr/>
-            <p:nvPr/>
-          </p:nvSpPr>
-          <p:spPr>
-            <a:xfrm>
-              <a:off x="8962565" y="2214100"/>
+            <p:cNvPr id="161" name="pt161"/>
+            <p:cNvSpPr/>
+            <p:nvPr/>
+          </p:nvSpPr>
+          <p:spPr>
+            <a:xfrm>
+              <a:off x="8964570" y="2292516"/>
               <a:ext cx="61566" cy="61566"/>
             </a:xfrm>
             <a:prstGeom prst="ellipse">
@@ -7950,13 +7993,13 @@
         </p:sp>
         <p:sp>
           <p:nvSpPr>
-            <p:cNvPr id="161" name="pt161"/>
-            <p:cNvSpPr/>
-            <p:nvPr/>
-          </p:nvSpPr>
-          <p:spPr>
-            <a:xfrm>
-              <a:off x="8989007" y="2024824"/>
+            <p:cNvPr id="162" name="pt162"/>
+            <p:cNvSpPr/>
+            <p:nvPr/>
+          </p:nvSpPr>
+          <p:spPr>
+            <a:xfrm>
+              <a:off x="8993104" y="2107297"/>
               <a:ext cx="61566" cy="61566"/>
             </a:xfrm>
             <a:prstGeom prst="ellipse">
@@ -7980,13 +8023,13 @@
         </p:sp>
         <p:sp>
           <p:nvSpPr>
-            <p:cNvPr id="162" name="pt162"/>
-            <p:cNvSpPr/>
-            <p:nvPr/>
-          </p:nvSpPr>
-          <p:spPr>
-            <a:xfrm>
-              <a:off x="9206413" y="1835548"/>
+            <p:cNvPr id="163" name="pt163"/>
+            <p:cNvSpPr/>
+            <p:nvPr/>
+          </p:nvSpPr>
+          <p:spPr>
+            <a:xfrm>
+              <a:off x="9203209" y="1922079"/>
               <a:ext cx="61566" cy="61566"/>
             </a:xfrm>
             <a:prstGeom prst="ellipse">
@@ -8010,13 +8053,13 @@
         </p:sp>
         <p:sp>
           <p:nvSpPr>
-            <p:cNvPr id="163" name="pt163"/>
-            <p:cNvSpPr/>
-            <p:nvPr/>
-          </p:nvSpPr>
-          <p:spPr>
-            <a:xfrm>
-              <a:off x="8804188" y="2781928"/>
+            <p:cNvPr id="164" name="pt164"/>
+            <p:cNvSpPr/>
+            <p:nvPr/>
+          </p:nvSpPr>
+          <p:spPr>
+            <a:xfrm>
+              <a:off x="8807367" y="2848172"/>
               <a:ext cx="61566" cy="61566"/>
             </a:xfrm>
             <a:prstGeom prst="ellipse">
@@ -8040,13 +8083,13 @@
         </p:sp>
         <p:sp>
           <p:nvSpPr>
-            <p:cNvPr id="164" name="pt164"/>
-            <p:cNvSpPr/>
-            <p:nvPr/>
-          </p:nvSpPr>
-          <p:spPr>
-            <a:xfrm>
-              <a:off x="8817958" y="2592652"/>
+            <p:cNvPr id="165" name="pt165"/>
+            <p:cNvSpPr/>
+            <p:nvPr/>
+          </p:nvSpPr>
+          <p:spPr>
+            <a:xfrm>
+              <a:off x="8820637" y="2662953"/>
               <a:ext cx="61566" cy="61566"/>
             </a:xfrm>
             <a:prstGeom prst="ellipse">
@@ -8070,13 +8113,13 @@
         </p:sp>
         <p:sp>
           <p:nvSpPr>
-            <p:cNvPr id="165" name="pt165"/>
-            <p:cNvSpPr/>
-            <p:nvPr/>
-          </p:nvSpPr>
-          <p:spPr>
-            <a:xfrm>
-              <a:off x="9262387" y="1646272"/>
+            <p:cNvPr id="166" name="pt166"/>
+            <p:cNvSpPr/>
+            <p:nvPr/>
+          </p:nvSpPr>
+          <p:spPr>
+            <a:xfrm>
+              <a:off x="9255579" y="1736860"/>
               <a:ext cx="61566" cy="61566"/>
             </a:xfrm>
             <a:prstGeom prst="ellipse">
@@ -8100,13 +8143,13 @@
         </p:sp>
         <p:sp>
           <p:nvSpPr>
-            <p:cNvPr id="166" name="pt166"/>
-            <p:cNvSpPr/>
-            <p:nvPr/>
-          </p:nvSpPr>
-          <p:spPr>
-            <a:xfrm>
-              <a:off x="8408152" y="2971204"/>
+            <p:cNvPr id="167" name="pt167"/>
+            <p:cNvSpPr/>
+            <p:nvPr/>
+          </p:nvSpPr>
+          <p:spPr>
+            <a:xfrm>
+              <a:off x="8396453" y="3033391"/>
               <a:ext cx="61566" cy="61566"/>
             </a:xfrm>
             <a:prstGeom prst="ellipse">
@@ -8126,13 +8169,13 @@
         </p:sp>
         <p:sp>
           <p:nvSpPr>
-            <p:cNvPr id="167" name="pt167"/>
-            <p:cNvSpPr/>
-            <p:nvPr/>
-          </p:nvSpPr>
-          <p:spPr>
-            <a:xfrm>
-              <a:off x="9583844" y="889168"/>
+            <p:cNvPr id="168" name="pt168"/>
+            <p:cNvSpPr/>
+            <p:nvPr/>
+          </p:nvSpPr>
+          <p:spPr>
+            <a:xfrm>
+              <a:off x="9582280" y="995986"/>
               <a:ext cx="61566" cy="61566"/>
             </a:xfrm>
             <a:prstGeom prst="ellipse">
@@ -8156,13 +8199,13 @@
         </p:sp>
         <p:sp>
           <p:nvSpPr>
-            <p:cNvPr id="168" name="pt168"/>
-            <p:cNvSpPr/>
-            <p:nvPr/>
-          </p:nvSpPr>
-          <p:spPr>
-            <a:xfrm>
-              <a:off x="9452225" y="1267720"/>
+            <p:cNvPr id="169" name="pt169"/>
+            <p:cNvSpPr/>
+            <p:nvPr/>
+          </p:nvSpPr>
+          <p:spPr>
+            <a:xfrm>
+              <a:off x="9451895" y="1366423"/>
               <a:ext cx="61566" cy="61566"/>
             </a:xfrm>
             <a:prstGeom prst="ellipse">
@@ -8186,13 +8229,13 @@
         </p:sp>
         <p:sp>
           <p:nvSpPr>
-            <p:cNvPr id="169" name="pt169"/>
-            <p:cNvSpPr/>
-            <p:nvPr/>
-          </p:nvSpPr>
-          <p:spPr>
-            <a:xfrm>
-              <a:off x="9287561" y="1456996"/>
+            <p:cNvPr id="170" name="pt170"/>
+            <p:cNvSpPr/>
+            <p:nvPr/>
+          </p:nvSpPr>
+          <p:spPr>
+            <a:xfrm>
+              <a:off x="9294066" y="1551642"/>
               <a:ext cx="61566" cy="61566"/>
             </a:xfrm>
             <a:prstGeom prst="ellipse">
@@ -8216,21 +8259,21 @@
         </p:sp>
         <p:sp>
           <p:nvSpPr>
-            <p:cNvPr id="170" name="pl170"/>
-            <p:cNvSpPr/>
-            <p:nvPr/>
-          </p:nvSpPr>
-          <p:spPr>
-            <a:xfrm>
-              <a:off x="7402695" y="656226"/>
-              <a:ext cx="0" cy="2498443"/>
+            <p:cNvPr id="171" name="pl171"/>
+            <p:cNvSpPr/>
+            <p:nvPr/>
+          </p:nvSpPr>
+          <p:spPr>
+            <a:xfrm>
+              <a:off x="7402695" y="768698"/>
+              <a:ext cx="0" cy="2444885"/>
             </a:xfrm>
             <a:custGeom>
               <a:avLst/>
               <a:pathLst>
-                <a:path w="0" h="2498443">
+                <a:path w="0" h="2444885">
                   <a:moveTo>
-                    <a:pt x="0" y="2498443"/>
+                    <a:pt x="0" y="2444885"/>
                   </a:moveTo>
                   <a:lnTo>
                     <a:pt x="0" y="0"/>
@@ -8256,13 +8299,13 @@
         </p:sp>
         <p:sp>
           <p:nvSpPr>
-            <p:cNvPr id="171" name="tx171"/>
-            <p:cNvSpPr/>
-            <p:nvPr/>
-          </p:nvSpPr>
-          <p:spPr>
-            <a:xfrm>
-              <a:off x="6473994" y="3008414"/>
+            <p:cNvPr id="172" name="tx172"/>
+            <p:cNvSpPr/>
+            <p:nvPr/>
+          </p:nvSpPr>
+          <p:spPr>
+            <a:xfrm>
+              <a:off x="6473994" y="3069762"/>
               <a:ext cx="877458" cy="65379"/>
             </a:xfrm>
             <a:prstGeom prst="rect">
@@ -8299,13 +8342,13 @@
         </p:sp>
         <p:sp>
           <p:nvSpPr>
-            <p:cNvPr id="172" name="tx172"/>
-            <p:cNvSpPr/>
-            <p:nvPr/>
-          </p:nvSpPr>
-          <p:spPr>
-            <a:xfrm>
-              <a:off x="5879085" y="2819138"/>
+            <p:cNvPr id="173" name="tx173"/>
+            <p:cNvSpPr/>
+            <p:nvPr/>
+          </p:nvSpPr>
+          <p:spPr>
+            <a:xfrm>
+              <a:off x="5879085" y="2884544"/>
               <a:ext cx="1472366" cy="65379"/>
             </a:xfrm>
             <a:prstGeom prst="rect">
@@ -8342,13 +8385,13 @@
         </p:sp>
         <p:sp>
           <p:nvSpPr>
-            <p:cNvPr id="173" name="tx173"/>
-            <p:cNvSpPr/>
-            <p:nvPr/>
-          </p:nvSpPr>
-          <p:spPr>
-            <a:xfrm>
-              <a:off x="6360791" y="2629862"/>
+            <p:cNvPr id="174" name="tx174"/>
+            <p:cNvSpPr/>
+            <p:nvPr/>
+          </p:nvSpPr>
+          <p:spPr>
+            <a:xfrm>
+              <a:off x="6360791" y="2699325"/>
               <a:ext cx="990660" cy="65379"/>
             </a:xfrm>
             <a:prstGeom prst="rect">
@@ -8385,13 +8428,13 @@
         </p:sp>
         <p:sp>
           <p:nvSpPr>
-            <p:cNvPr id="174" name="tx174"/>
-            <p:cNvSpPr/>
-            <p:nvPr/>
-          </p:nvSpPr>
-          <p:spPr>
-            <a:xfrm>
-              <a:off x="6360882" y="2440586"/>
+            <p:cNvPr id="175" name="tx175"/>
+            <p:cNvSpPr/>
+            <p:nvPr/>
+          </p:nvSpPr>
+          <p:spPr>
+            <a:xfrm>
+              <a:off x="6360882" y="2514106"/>
               <a:ext cx="990569" cy="65379"/>
             </a:xfrm>
             <a:prstGeom prst="rect">
@@ -8428,13 +8471,13 @@
         </p:sp>
         <p:sp>
           <p:nvSpPr>
-            <p:cNvPr id="175" name="tx175"/>
-            <p:cNvSpPr/>
-            <p:nvPr/>
-          </p:nvSpPr>
-          <p:spPr>
-            <a:xfrm>
-              <a:off x="6091866" y="2251310"/>
+            <p:cNvPr id="176" name="tx176"/>
+            <p:cNvSpPr/>
+            <p:nvPr/>
+          </p:nvSpPr>
+          <p:spPr>
+            <a:xfrm>
+              <a:off x="6091866" y="2328888"/>
               <a:ext cx="1259586" cy="65379"/>
             </a:xfrm>
             <a:prstGeom prst="rect">
@@ -8471,13 +8514,13 @@
         </p:sp>
         <p:sp>
           <p:nvSpPr>
-            <p:cNvPr id="176" name="tx176"/>
-            <p:cNvSpPr/>
-            <p:nvPr/>
-          </p:nvSpPr>
-          <p:spPr>
-            <a:xfrm>
-              <a:off x="6355762" y="2062034"/>
+            <p:cNvPr id="177" name="tx177"/>
+            <p:cNvSpPr/>
+            <p:nvPr/>
+          </p:nvSpPr>
+          <p:spPr>
+            <a:xfrm>
+              <a:off x="6355762" y="2143669"/>
               <a:ext cx="995690" cy="65379"/>
             </a:xfrm>
             <a:prstGeom prst="rect">
@@ -8514,13 +8557,13 @@
         </p:sp>
         <p:sp>
           <p:nvSpPr>
-            <p:cNvPr id="177" name="tx177"/>
-            <p:cNvSpPr/>
-            <p:nvPr/>
-          </p:nvSpPr>
-          <p:spPr>
-            <a:xfrm>
-              <a:off x="5934680" y="1872758"/>
+            <p:cNvPr id="178" name="tx178"/>
+            <p:cNvSpPr/>
+            <p:nvPr/>
+          </p:nvSpPr>
+          <p:spPr>
+            <a:xfrm>
+              <a:off x="5934680" y="1958451"/>
               <a:ext cx="1416771" cy="65379"/>
             </a:xfrm>
             <a:prstGeom prst="rect">
@@ -8557,13 +8600,13 @@
         </p:sp>
         <p:sp>
           <p:nvSpPr>
-            <p:cNvPr id="178" name="tx178"/>
-            <p:cNvSpPr/>
-            <p:nvPr/>
-          </p:nvSpPr>
-          <p:spPr>
-            <a:xfrm>
-              <a:off x="6255909" y="1683482"/>
+            <p:cNvPr id="179" name="tx179"/>
+            <p:cNvSpPr/>
+            <p:nvPr/>
+          </p:nvSpPr>
+          <p:spPr>
+            <a:xfrm>
+              <a:off x="6255909" y="1773232"/>
               <a:ext cx="1095542" cy="65379"/>
             </a:xfrm>
             <a:prstGeom prst="rect">
@@ -8600,13 +8643,13 @@
         </p:sp>
         <p:sp>
           <p:nvSpPr>
-            <p:cNvPr id="179" name="tx179"/>
-            <p:cNvSpPr/>
-            <p:nvPr/>
-          </p:nvSpPr>
-          <p:spPr>
-            <a:xfrm>
-              <a:off x="6514684" y="1494206"/>
+            <p:cNvPr id="180" name="tx180"/>
+            <p:cNvSpPr/>
+            <p:nvPr/>
+          </p:nvSpPr>
+          <p:spPr>
+            <a:xfrm>
+              <a:off x="6514684" y="1588013"/>
               <a:ext cx="836767" cy="65379"/>
             </a:xfrm>
             <a:prstGeom prst="rect">
@@ -8643,13 +8686,13 @@
         </p:sp>
         <p:sp>
           <p:nvSpPr>
-            <p:cNvPr id="180" name="tx180"/>
-            <p:cNvSpPr/>
-            <p:nvPr/>
-          </p:nvSpPr>
-          <p:spPr>
-            <a:xfrm>
-              <a:off x="6343874" y="1304930"/>
+            <p:cNvPr id="181" name="tx181"/>
+            <p:cNvSpPr/>
+            <p:nvPr/>
+          </p:nvSpPr>
+          <p:spPr>
+            <a:xfrm>
+              <a:off x="6343874" y="1402795"/>
               <a:ext cx="1007577" cy="65379"/>
             </a:xfrm>
             <a:prstGeom prst="rect">
@@ -8686,13 +8729,13 @@
         </p:sp>
         <p:sp>
           <p:nvSpPr>
-            <p:cNvPr id="181" name="tx181"/>
-            <p:cNvSpPr/>
-            <p:nvPr/>
-          </p:nvSpPr>
-          <p:spPr>
-            <a:xfrm>
-              <a:off x="6545317" y="1115654"/>
+            <p:cNvPr id="182" name="tx182"/>
+            <p:cNvSpPr/>
+            <p:nvPr/>
+          </p:nvSpPr>
+          <p:spPr>
+            <a:xfrm>
+              <a:off x="6545317" y="1217576"/>
               <a:ext cx="806135" cy="65379"/>
             </a:xfrm>
             <a:prstGeom prst="rect">
@@ -8729,13 +8772,13 @@
         </p:sp>
         <p:sp>
           <p:nvSpPr>
-            <p:cNvPr id="182" name="tx182"/>
-            <p:cNvSpPr/>
-            <p:nvPr/>
-          </p:nvSpPr>
-          <p:spPr>
-            <a:xfrm>
-              <a:off x="6120761" y="926378"/>
+            <p:cNvPr id="183" name="tx183"/>
+            <p:cNvSpPr/>
+            <p:nvPr/>
+          </p:nvSpPr>
+          <p:spPr>
+            <a:xfrm>
+              <a:off x="6120761" y="1032358"/>
               <a:ext cx="1230690" cy="65379"/>
             </a:xfrm>
             <a:prstGeom prst="rect">
@@ -8772,13 +8815,13 @@
         </p:sp>
         <p:sp>
           <p:nvSpPr>
-            <p:cNvPr id="183" name="tx183"/>
-            <p:cNvSpPr/>
-            <p:nvPr/>
-          </p:nvSpPr>
-          <p:spPr>
-            <a:xfrm>
-              <a:off x="6337291" y="737102"/>
+            <p:cNvPr id="184" name="tx184"/>
+            <p:cNvSpPr/>
+            <p:nvPr/>
+          </p:nvSpPr>
+          <p:spPr>
+            <a:xfrm>
+              <a:off x="6337291" y="847139"/>
               <a:ext cx="1014161" cy="65379"/>
             </a:xfrm>
             <a:prstGeom prst="rect">
@@ -8815,13 +8858,13 @@
         </p:sp>
         <p:sp>
           <p:nvSpPr>
-            <p:cNvPr id="184" name="pl184"/>
-            <p:cNvSpPr/>
-            <p:nvPr/>
-          </p:nvSpPr>
-          <p:spPr>
-            <a:xfrm>
-              <a:off x="7374226" y="3041104"/>
+            <p:cNvPr id="185" name="pl185"/>
+            <p:cNvSpPr/>
+            <p:nvPr/>
+          </p:nvSpPr>
+          <p:spPr>
+            <a:xfrm>
+              <a:off x="7374226" y="3102452"/>
               <a:ext cx="28468" cy="0"/>
             </a:xfrm>
             <a:custGeom>
@@ -8855,13 +8898,13 @@
         </p:sp>
         <p:sp>
           <p:nvSpPr>
-            <p:cNvPr id="185" name="pl185"/>
-            <p:cNvSpPr/>
-            <p:nvPr/>
-          </p:nvSpPr>
-          <p:spPr>
-            <a:xfrm>
-              <a:off x="7374226" y="2851828"/>
+            <p:cNvPr id="186" name="pl186"/>
+            <p:cNvSpPr/>
+            <p:nvPr/>
+          </p:nvSpPr>
+          <p:spPr>
+            <a:xfrm>
+              <a:off x="7374226" y="2917233"/>
               <a:ext cx="28468" cy="0"/>
             </a:xfrm>
             <a:custGeom>
@@ -8895,13 +8938,13 @@
         </p:sp>
         <p:sp>
           <p:nvSpPr>
-            <p:cNvPr id="186" name="pl186"/>
-            <p:cNvSpPr/>
-            <p:nvPr/>
-          </p:nvSpPr>
-          <p:spPr>
-            <a:xfrm>
-              <a:off x="7374226" y="2662552"/>
+            <p:cNvPr id="187" name="pl187"/>
+            <p:cNvSpPr/>
+            <p:nvPr/>
+          </p:nvSpPr>
+          <p:spPr>
+            <a:xfrm>
+              <a:off x="7374226" y="2732015"/>
               <a:ext cx="28468" cy="0"/>
             </a:xfrm>
             <a:custGeom>
@@ -8935,13 +8978,13 @@
         </p:sp>
         <p:sp>
           <p:nvSpPr>
-            <p:cNvPr id="187" name="pl187"/>
-            <p:cNvSpPr/>
-            <p:nvPr/>
-          </p:nvSpPr>
-          <p:spPr>
-            <a:xfrm>
-              <a:off x="7374226" y="2473276"/>
+            <p:cNvPr id="188" name="pl188"/>
+            <p:cNvSpPr/>
+            <p:nvPr/>
+          </p:nvSpPr>
+          <p:spPr>
+            <a:xfrm>
+              <a:off x="7374226" y="2546796"/>
               <a:ext cx="28468" cy="0"/>
             </a:xfrm>
             <a:custGeom>
@@ -8975,13 +9018,13 @@
         </p:sp>
         <p:sp>
           <p:nvSpPr>
-            <p:cNvPr id="188" name="pl188"/>
-            <p:cNvSpPr/>
-            <p:nvPr/>
-          </p:nvSpPr>
-          <p:spPr>
-            <a:xfrm>
-              <a:off x="7374226" y="2284000"/>
+            <p:cNvPr id="189" name="pl189"/>
+            <p:cNvSpPr/>
+            <p:nvPr/>
+          </p:nvSpPr>
+          <p:spPr>
+            <a:xfrm>
+              <a:off x="7374226" y="2361578"/>
               <a:ext cx="28468" cy="0"/>
             </a:xfrm>
             <a:custGeom>
@@ -9015,13 +9058,13 @@
         </p:sp>
         <p:sp>
           <p:nvSpPr>
-            <p:cNvPr id="189" name="pl189"/>
-            <p:cNvSpPr/>
-            <p:nvPr/>
-          </p:nvSpPr>
-          <p:spPr>
-            <a:xfrm>
-              <a:off x="7374226" y="2094724"/>
+            <p:cNvPr id="190" name="pl190"/>
+            <p:cNvSpPr/>
+            <p:nvPr/>
+          </p:nvSpPr>
+          <p:spPr>
+            <a:xfrm>
+              <a:off x="7374226" y="2176359"/>
               <a:ext cx="28468" cy="0"/>
             </a:xfrm>
             <a:custGeom>
@@ -9055,13 +9098,13 @@
         </p:sp>
         <p:sp>
           <p:nvSpPr>
-            <p:cNvPr id="190" name="pl190"/>
-            <p:cNvSpPr/>
-            <p:nvPr/>
-          </p:nvSpPr>
-          <p:spPr>
-            <a:xfrm>
-              <a:off x="7374226" y="1905448"/>
+            <p:cNvPr id="191" name="pl191"/>
+            <p:cNvSpPr/>
+            <p:nvPr/>
+          </p:nvSpPr>
+          <p:spPr>
+            <a:xfrm>
+              <a:off x="7374226" y="1991140"/>
               <a:ext cx="28468" cy="0"/>
             </a:xfrm>
             <a:custGeom>
@@ -9095,13 +9138,13 @@
         </p:sp>
         <p:sp>
           <p:nvSpPr>
-            <p:cNvPr id="191" name="pl191"/>
-            <p:cNvSpPr/>
-            <p:nvPr/>
-          </p:nvSpPr>
-          <p:spPr>
-            <a:xfrm>
-              <a:off x="7374226" y="1716172"/>
+            <p:cNvPr id="192" name="pl192"/>
+            <p:cNvSpPr/>
+            <p:nvPr/>
+          </p:nvSpPr>
+          <p:spPr>
+            <a:xfrm>
+              <a:off x="7374226" y="1805922"/>
               <a:ext cx="28468" cy="0"/>
             </a:xfrm>
             <a:custGeom>
@@ -9135,13 +9178,13 @@
         </p:sp>
         <p:sp>
           <p:nvSpPr>
-            <p:cNvPr id="192" name="pl192"/>
-            <p:cNvSpPr/>
-            <p:nvPr/>
-          </p:nvSpPr>
-          <p:spPr>
-            <a:xfrm>
-              <a:off x="7374226" y="1526896"/>
+            <p:cNvPr id="193" name="pl193"/>
+            <p:cNvSpPr/>
+            <p:nvPr/>
+          </p:nvSpPr>
+          <p:spPr>
+            <a:xfrm>
+              <a:off x="7374226" y="1620703"/>
               <a:ext cx="28468" cy="0"/>
             </a:xfrm>
             <a:custGeom>
@@ -9175,13 +9218,13 @@
         </p:sp>
         <p:sp>
           <p:nvSpPr>
-            <p:cNvPr id="193" name="pl193"/>
-            <p:cNvSpPr/>
-            <p:nvPr/>
-          </p:nvSpPr>
-          <p:spPr>
-            <a:xfrm>
-              <a:off x="7374226" y="1337620"/>
+            <p:cNvPr id="194" name="pl194"/>
+            <p:cNvSpPr/>
+            <p:nvPr/>
+          </p:nvSpPr>
+          <p:spPr>
+            <a:xfrm>
+              <a:off x="7374226" y="1435485"/>
               <a:ext cx="28468" cy="0"/>
             </a:xfrm>
             <a:custGeom>
@@ -9215,13 +9258,13 @@
         </p:sp>
         <p:sp>
           <p:nvSpPr>
-            <p:cNvPr id="194" name="pl194"/>
-            <p:cNvSpPr/>
-            <p:nvPr/>
-          </p:nvSpPr>
-          <p:spPr>
-            <a:xfrm>
-              <a:off x="7374226" y="1148344"/>
+            <p:cNvPr id="195" name="pl195"/>
+            <p:cNvSpPr/>
+            <p:nvPr/>
+          </p:nvSpPr>
+          <p:spPr>
+            <a:xfrm>
+              <a:off x="7374226" y="1250266"/>
               <a:ext cx="28468" cy="0"/>
             </a:xfrm>
             <a:custGeom>
@@ -9255,13 +9298,13 @@
         </p:sp>
         <p:sp>
           <p:nvSpPr>
-            <p:cNvPr id="195" name="pl195"/>
-            <p:cNvSpPr/>
-            <p:nvPr/>
-          </p:nvSpPr>
-          <p:spPr>
-            <a:xfrm>
-              <a:off x="7374226" y="959068"/>
+            <p:cNvPr id="196" name="pl196"/>
+            <p:cNvSpPr/>
+            <p:nvPr/>
+          </p:nvSpPr>
+          <p:spPr>
+            <a:xfrm>
+              <a:off x="7374226" y="1065047"/>
               <a:ext cx="28468" cy="0"/>
             </a:xfrm>
             <a:custGeom>
@@ -9295,13 +9338,13 @@
         </p:sp>
         <p:sp>
           <p:nvSpPr>
-            <p:cNvPr id="196" name="pl196"/>
-            <p:cNvSpPr/>
-            <p:nvPr/>
-          </p:nvSpPr>
-          <p:spPr>
-            <a:xfrm>
-              <a:off x="7374226" y="769792"/>
+            <p:cNvPr id="197" name="pl197"/>
+            <p:cNvSpPr/>
+            <p:nvPr/>
+          </p:nvSpPr>
+          <p:spPr>
+            <a:xfrm>
+              <a:off x="7374226" y="879829"/>
               <a:ext cx="28468" cy="0"/>
             </a:xfrm>
             <a:custGeom>
@@ -9335,13 +9378,13 @@
         </p:sp>
         <p:sp>
           <p:nvSpPr>
-            <p:cNvPr id="197" name="pl197"/>
-            <p:cNvSpPr/>
-            <p:nvPr/>
-          </p:nvSpPr>
-          <p:spPr>
-            <a:xfrm>
-              <a:off x="7402695" y="3154670"/>
+            <p:cNvPr id="198" name="pl198"/>
+            <p:cNvSpPr/>
+            <p:nvPr/>
+          </p:nvSpPr>
+          <p:spPr>
+            <a:xfrm>
+              <a:off x="7402695" y="3213583"/>
               <a:ext cx="3947935" cy="0"/>
             </a:xfrm>
             <a:custGeom>
@@ -9375,13 +9418,13 @@
         </p:sp>
         <p:sp>
           <p:nvSpPr>
-            <p:cNvPr id="198" name="pl198"/>
-            <p:cNvSpPr/>
-            <p:nvPr/>
-          </p:nvSpPr>
-          <p:spPr>
-            <a:xfrm>
-              <a:off x="7588752" y="3154670"/>
+            <p:cNvPr id="199" name="pl199"/>
+            <p:cNvSpPr/>
+            <p:nvPr/>
+          </p:nvSpPr>
+          <p:spPr>
+            <a:xfrm>
+              <a:off x="7588752" y="3213583"/>
               <a:ext cx="0" cy="28468"/>
             </a:xfrm>
             <a:custGeom>
@@ -9415,13 +9458,13 @@
         </p:sp>
         <p:sp>
           <p:nvSpPr>
-            <p:cNvPr id="199" name="pl199"/>
-            <p:cNvSpPr/>
-            <p:nvPr/>
-          </p:nvSpPr>
-          <p:spPr>
-            <a:xfrm>
-              <a:off x="9300620" y="3154670"/>
+            <p:cNvPr id="200" name="pl200"/>
+            <p:cNvSpPr/>
+            <p:nvPr/>
+          </p:nvSpPr>
+          <p:spPr>
+            <a:xfrm>
+              <a:off x="9300620" y="3213583"/>
               <a:ext cx="0" cy="28468"/>
             </a:xfrm>
             <a:custGeom>
@@ -9455,13 +9498,13 @@
         </p:sp>
         <p:sp>
           <p:nvSpPr>
-            <p:cNvPr id="200" name="pl200"/>
-            <p:cNvSpPr/>
-            <p:nvPr/>
-          </p:nvSpPr>
-          <p:spPr>
-            <a:xfrm>
-              <a:off x="10862681" y="3154670"/>
+            <p:cNvPr id="201" name="pl201"/>
+            <p:cNvSpPr/>
+            <p:nvPr/>
+          </p:nvSpPr>
+          <p:spPr>
+            <a:xfrm>
+              <a:off x="10862681" y="3213583"/>
               <a:ext cx="0" cy="28468"/>
             </a:xfrm>
             <a:custGeom>
@@ -9495,13 +9538,13 @@
         </p:sp>
         <p:sp>
           <p:nvSpPr>
-            <p:cNvPr id="201" name="tx201"/>
-            <p:cNvSpPr/>
-            <p:nvPr/>
-          </p:nvSpPr>
-          <p:spPr>
-            <a:xfrm>
-              <a:off x="7525339" y="3205913"/>
+            <p:cNvPr id="202" name="tx202"/>
+            <p:cNvSpPr/>
+            <p:nvPr/>
+          </p:nvSpPr>
+          <p:spPr>
+            <a:xfrm>
+              <a:off x="7525339" y="3264826"/>
               <a:ext cx="126827" cy="65379"/>
             </a:xfrm>
             <a:prstGeom prst="rect">
@@ -9538,13 +9581,13 @@
         </p:sp>
         <p:sp>
           <p:nvSpPr>
-            <p:cNvPr id="202" name="tx202"/>
-            <p:cNvSpPr/>
-            <p:nvPr/>
-          </p:nvSpPr>
-          <p:spPr>
-            <a:xfrm>
-              <a:off x="9237207" y="3205913"/>
+            <p:cNvPr id="203" name="tx203"/>
+            <p:cNvSpPr/>
+            <p:nvPr/>
+          </p:nvSpPr>
+          <p:spPr>
+            <a:xfrm>
+              <a:off x="9237207" y="3264826"/>
               <a:ext cx="126827" cy="65379"/>
             </a:xfrm>
             <a:prstGeom prst="rect">
@@ -9581,13 +9624,13 @@
         </p:sp>
         <p:sp>
           <p:nvSpPr>
-            <p:cNvPr id="203" name="tx203"/>
-            <p:cNvSpPr/>
-            <p:nvPr/>
-          </p:nvSpPr>
-          <p:spPr>
-            <a:xfrm>
-              <a:off x="10799268" y="3205913"/>
+            <p:cNvPr id="204" name="tx204"/>
+            <p:cNvSpPr/>
+            <p:nvPr/>
+          </p:nvSpPr>
+          <p:spPr>
+            <a:xfrm>
+              <a:off x="10799268" y="3264826"/>
               <a:ext cx="126827" cy="65379"/>
             </a:xfrm>
             <a:prstGeom prst="rect">
@@ -9624,13 +9667,13 @@
         </p:sp>
         <p:sp>
           <p:nvSpPr>
-            <p:cNvPr id="204" name="tx204"/>
-            <p:cNvSpPr/>
-            <p:nvPr/>
-          </p:nvSpPr>
-          <p:spPr>
-            <a:xfrm>
-              <a:off x="8408176" y="3318871"/>
+            <p:cNvPr id="205" name="tx205"/>
+            <p:cNvSpPr/>
+            <p:nvPr/>
+          </p:nvSpPr>
+          <p:spPr>
+            <a:xfrm>
+              <a:off x="8408176" y="3377785"/>
               <a:ext cx="1936973" cy="81838"/>
             </a:xfrm>
             <a:prstGeom prst="rect">
@@ -9667,7 +9710,7 @@
         </p:sp>
         <p:sp>
           <p:nvSpPr>
-            <p:cNvPr id="205" name="tx205"/>
+            <p:cNvPr id="206" name="tx206"/>
             <p:cNvSpPr/>
             <p:nvPr/>
           </p:nvSpPr>
@@ -9710,7 +9753,7 @@
         </p:sp>
         <p:sp>
           <p:nvSpPr>
-            <p:cNvPr id="206" name="tx206"/>
+            <p:cNvPr id="207" name="tx207"/>
             <p:cNvSpPr/>
             <p:nvPr/>
           </p:nvSpPr>
@@ -9753,13 +9796,13 @@
         </p:sp>
         <p:sp>
           <p:nvSpPr>
-            <p:cNvPr id="207" name="tx207"/>
-            <p:cNvSpPr/>
-            <p:nvPr/>
-          </p:nvSpPr>
-          <p:spPr>
-            <a:xfrm>
-              <a:off x="5859900" y="325363"/>
+            <p:cNvPr id="208" name="tx208"/>
+            <p:cNvSpPr/>
+            <p:nvPr/>
+          </p:nvSpPr>
+          <p:spPr>
+            <a:xfrm>
+              <a:off x="5859900" y="326246"/>
               <a:ext cx="93085" cy="109179"/>
             </a:xfrm>
             <a:prstGeom prst="rect">
@@ -9796,14 +9839,14 @@
         </p:sp>
         <p:sp>
           <p:nvSpPr>
-            <p:cNvPr id="208" name="rc208"/>
-            <p:cNvSpPr/>
-            <p:nvPr/>
-          </p:nvSpPr>
-          <p:spPr>
-            <a:xfrm>
-              <a:off x="252469" y="3842202"/>
-              <a:ext cx="5606366" cy="3952048"/>
+            <p:cNvPr id="209" name="rc209"/>
+            <p:cNvSpPr/>
+            <p:nvPr/>
+          </p:nvSpPr>
+          <p:spPr>
+            <a:xfrm>
+              <a:off x="252469" y="3901115"/>
+              <a:ext cx="5606366" cy="3893135"/>
             </a:xfrm>
             <a:prstGeom prst="rect">
               <a:avLst/>
@@ -9831,14 +9874,14 @@
         </p:sp>
         <p:sp>
           <p:nvSpPr>
-            <p:cNvPr id="209" name="rc209"/>
-            <p:cNvSpPr/>
-            <p:nvPr/>
-          </p:nvSpPr>
-          <p:spPr>
-            <a:xfrm>
-              <a:off x="5858835" y="3842202"/>
-              <a:ext cx="5593015" cy="3952048"/>
+            <p:cNvPr id="210" name="rc210"/>
+            <p:cNvSpPr/>
+            <p:nvPr/>
+          </p:nvSpPr>
+          <p:spPr>
+            <a:xfrm>
+              <a:off x="5858835" y="3901115"/>
+              <a:ext cx="5593015" cy="3893135"/>
             </a:xfrm>
             <a:prstGeom prst="rect">
               <a:avLst/>
@@ -9866,14 +9909,14 @@
         </p:sp>
         <p:sp>
           <p:nvSpPr>
-            <p:cNvPr id="210" name="rc210"/>
-            <p:cNvSpPr/>
-            <p:nvPr/>
-          </p:nvSpPr>
-          <p:spPr>
-            <a:xfrm>
-              <a:off x="1728709" y="4358431"/>
-              <a:ext cx="4028905" cy="2748287"/>
+            <p:cNvPr id="211" name="rc211"/>
+            <p:cNvSpPr/>
+            <p:nvPr/>
+          </p:nvSpPr>
+          <p:spPr>
+            <a:xfrm>
+              <a:off x="1728709" y="4417344"/>
+              <a:ext cx="4028905" cy="2689374"/>
             </a:xfrm>
             <a:prstGeom prst="rect">
               <a:avLst/>
@@ -9892,21 +9935,21 @@
         </p:sp>
         <p:sp>
           <p:nvSpPr>
-            <p:cNvPr id="211" name="pl211"/>
-            <p:cNvSpPr/>
-            <p:nvPr/>
-          </p:nvSpPr>
-          <p:spPr>
-            <a:xfrm>
-              <a:off x="3056416" y="4358431"/>
-              <a:ext cx="0" cy="2748287"/>
+            <p:cNvPr id="212" name="pl212"/>
+            <p:cNvSpPr/>
+            <p:nvPr/>
+          </p:nvSpPr>
+          <p:spPr>
+            <a:xfrm>
+              <a:off x="3056416" y="4417344"/>
+              <a:ext cx="0" cy="2689374"/>
             </a:xfrm>
             <a:custGeom>
               <a:avLst/>
               <a:pathLst>
-                <a:path w="0" h="2748287">
+                <a:path w="0" h="2689374">
                   <a:moveTo>
-                    <a:pt x="0" y="2748287"/>
+                    <a:pt x="0" y="2689374"/>
                   </a:moveTo>
                   <a:lnTo>
                     <a:pt x="0" y="0"/>
@@ -9935,14 +9978,14 @@
         </p:sp>
         <p:sp>
           <p:nvSpPr>
-            <p:cNvPr id="212" name="rc212"/>
-            <p:cNvSpPr/>
-            <p:nvPr/>
-          </p:nvSpPr>
-          <p:spPr>
-            <a:xfrm>
-              <a:off x="1911841" y="4795658"/>
-              <a:ext cx="1100427" cy="624610"/>
+            <p:cNvPr id="213" name="rc213"/>
+            <p:cNvSpPr/>
+            <p:nvPr/>
+          </p:nvSpPr>
+          <p:spPr>
+            <a:xfrm>
+              <a:off x="1911841" y="4845199"/>
+              <a:ext cx="1100427" cy="611221"/>
             </a:xfrm>
             <a:prstGeom prst="rect">
               <a:avLst/>
@@ -9961,14 +10004,14 @@
         </p:sp>
         <p:sp>
           <p:nvSpPr>
-            <p:cNvPr id="213" name="rc213"/>
-            <p:cNvSpPr/>
-            <p:nvPr/>
-          </p:nvSpPr>
-          <p:spPr>
-            <a:xfrm>
-              <a:off x="1911841" y="6044880"/>
-              <a:ext cx="2387258" cy="624610"/>
+            <p:cNvPr id="214" name="rc214"/>
+            <p:cNvSpPr/>
+            <p:nvPr/>
+          </p:nvSpPr>
+          <p:spPr>
+            <a:xfrm>
+              <a:off x="1911841" y="6067642"/>
+              <a:ext cx="2387258" cy="611221"/>
             </a:xfrm>
             <a:prstGeom prst="rect">
               <a:avLst/>
@@ -9987,13 +10030,13 @@
         </p:sp>
         <p:sp>
           <p:nvSpPr>
-            <p:cNvPr id="214" name="tx214"/>
-            <p:cNvSpPr/>
-            <p:nvPr/>
-          </p:nvSpPr>
-          <p:spPr>
-            <a:xfrm>
-              <a:off x="3057311" y="5075640"/>
+            <p:cNvPr id="215" name="tx215"/>
+            <p:cNvSpPr/>
+            <p:nvPr/>
+          </p:nvSpPr>
+          <p:spPr>
+            <a:xfrm>
+              <a:off x="3057311" y="5118486"/>
               <a:ext cx="750722" cy="64648"/>
             </a:xfrm>
             <a:prstGeom prst="rect">
@@ -10030,13 +10073,13 @@
         </p:sp>
         <p:sp>
           <p:nvSpPr>
-            <p:cNvPr id="215" name="tx215"/>
-            <p:cNvSpPr/>
-            <p:nvPr/>
-          </p:nvSpPr>
-          <p:spPr>
-            <a:xfrm>
-              <a:off x="4350468" y="6324861"/>
+            <p:cNvPr id="216" name="tx216"/>
+            <p:cNvSpPr/>
+            <p:nvPr/>
+          </p:nvSpPr>
+          <p:spPr>
+            <a:xfrm>
+              <a:off x="4350468" y="6340929"/>
               <a:ext cx="856152" cy="64648"/>
             </a:xfrm>
             <a:prstGeom prst="rect">
@@ -10073,21 +10116,21 @@
         </p:sp>
         <p:sp>
           <p:nvSpPr>
-            <p:cNvPr id="216" name="pl216"/>
-            <p:cNvSpPr/>
-            <p:nvPr/>
-          </p:nvSpPr>
-          <p:spPr>
-            <a:xfrm>
-              <a:off x="1728709" y="4358431"/>
-              <a:ext cx="0" cy="2748287"/>
+            <p:cNvPr id="217" name="pl217"/>
+            <p:cNvSpPr/>
+            <p:nvPr/>
+          </p:nvSpPr>
+          <p:spPr>
+            <a:xfrm>
+              <a:off x="1728709" y="4417344"/>
+              <a:ext cx="0" cy="2689374"/>
             </a:xfrm>
             <a:custGeom>
               <a:avLst/>
               <a:pathLst>
-                <a:path w="0" h="2748287">
+                <a:path w="0" h="2689374">
                   <a:moveTo>
-                    <a:pt x="0" y="2748287"/>
+                    <a:pt x="0" y="2689374"/>
                   </a:moveTo>
                   <a:lnTo>
                     <a:pt x="0" y="0"/>
@@ -10113,13 +10156,13 @@
         </p:sp>
         <p:sp>
           <p:nvSpPr>
-            <p:cNvPr id="217" name="tx217"/>
-            <p:cNvSpPr/>
-            <p:nvPr/>
-          </p:nvSpPr>
-          <p:spPr>
-            <a:xfrm>
-              <a:off x="536112" y="6275118"/>
+            <p:cNvPr id="218" name="tx218"/>
+            <p:cNvSpPr/>
+            <p:nvPr/>
+          </p:nvSpPr>
+          <p:spPr>
+            <a:xfrm>
+              <a:off x="536112" y="6291185"/>
               <a:ext cx="1141354" cy="65379"/>
             </a:xfrm>
             <a:prstGeom prst="rect">
@@ -10156,13 +10199,13 @@
         </p:sp>
         <p:sp>
           <p:nvSpPr>
-            <p:cNvPr id="218" name="tx218"/>
-            <p:cNvSpPr/>
-            <p:nvPr/>
-          </p:nvSpPr>
-          <p:spPr>
-            <a:xfrm>
-              <a:off x="724021" y="6373873"/>
+            <p:cNvPr id="219" name="tx219"/>
+            <p:cNvSpPr/>
+            <p:nvPr/>
+          </p:nvSpPr>
+          <p:spPr>
+            <a:xfrm>
+              <a:off x="724021" y="6389941"/>
               <a:ext cx="953444" cy="65379"/>
             </a:xfrm>
             <a:prstGeom prst="rect">
@@ -10199,13 +10242,13 @@
         </p:sp>
         <p:sp>
           <p:nvSpPr>
-            <p:cNvPr id="219" name="tx219"/>
-            <p:cNvSpPr/>
-            <p:nvPr/>
-          </p:nvSpPr>
-          <p:spPr>
-            <a:xfrm>
-              <a:off x="967343" y="5025896"/>
+            <p:cNvPr id="220" name="tx220"/>
+            <p:cNvSpPr/>
+            <p:nvPr/>
+          </p:nvSpPr>
+          <p:spPr>
+            <a:xfrm>
+              <a:off x="967343" y="5068743"/>
               <a:ext cx="710123" cy="65379"/>
             </a:xfrm>
             <a:prstGeom prst="rect">
@@ -10242,13 +10285,13 @@
         </p:sp>
         <p:sp>
           <p:nvSpPr>
-            <p:cNvPr id="220" name="tx220"/>
-            <p:cNvSpPr/>
-            <p:nvPr/>
-          </p:nvSpPr>
-          <p:spPr>
-            <a:xfrm>
-              <a:off x="460125" y="5124652"/>
+            <p:cNvPr id="221" name="tx221"/>
+            <p:cNvSpPr/>
+            <p:nvPr/>
+          </p:nvSpPr>
+          <p:spPr>
+            <a:xfrm>
+              <a:off x="460125" y="5167498"/>
               <a:ext cx="1217340" cy="65379"/>
             </a:xfrm>
             <a:prstGeom prst="rect">
@@ -10285,13 +10328,13 @@
         </p:sp>
         <p:sp>
           <p:nvSpPr>
-            <p:cNvPr id="221" name="pl221"/>
-            <p:cNvSpPr/>
-            <p:nvPr/>
-          </p:nvSpPr>
-          <p:spPr>
-            <a:xfrm>
-              <a:off x="1700240" y="6357185"/>
+            <p:cNvPr id="222" name="pl222"/>
+            <p:cNvSpPr/>
+            <p:nvPr/>
+          </p:nvSpPr>
+          <p:spPr>
+            <a:xfrm>
+              <a:off x="1700240" y="6373253"/>
               <a:ext cx="28468" cy="0"/>
             </a:xfrm>
             <a:custGeom>
@@ -10325,13 +10368,13 @@
         </p:sp>
         <p:sp>
           <p:nvSpPr>
-            <p:cNvPr id="222" name="pl222"/>
-            <p:cNvSpPr/>
-            <p:nvPr/>
-          </p:nvSpPr>
-          <p:spPr>
-            <a:xfrm>
-              <a:off x="1700240" y="5107964"/>
+            <p:cNvPr id="223" name="pl223"/>
+            <p:cNvSpPr/>
+            <p:nvPr/>
+          </p:nvSpPr>
+          <p:spPr>
+            <a:xfrm>
+              <a:off x="1700240" y="5150810"/>
               <a:ext cx="28468" cy="0"/>
             </a:xfrm>
             <a:custGeom>
@@ -10365,7 +10408,7 @@
         </p:sp>
         <p:sp>
           <p:nvSpPr>
-            <p:cNvPr id="223" name="pl223"/>
+            <p:cNvPr id="224" name="pl224"/>
             <p:cNvSpPr/>
             <p:nvPr/>
           </p:nvSpPr>
@@ -10405,7 +10448,7 @@
         </p:sp>
         <p:sp>
           <p:nvSpPr>
-            <p:cNvPr id="224" name="pl224"/>
+            <p:cNvPr id="225" name="pl225"/>
             <p:cNvSpPr/>
             <p:nvPr/>
           </p:nvSpPr>
@@ -10445,7 +10488,7 @@
         </p:sp>
         <p:sp>
           <p:nvSpPr>
-            <p:cNvPr id="225" name="pl225"/>
+            <p:cNvPr id="226" name="pl226"/>
             <p:cNvSpPr/>
             <p:nvPr/>
           </p:nvSpPr>
@@ -10485,7 +10528,7 @@
         </p:sp>
         <p:sp>
           <p:nvSpPr>
-            <p:cNvPr id="226" name="pl226"/>
+            <p:cNvPr id="227" name="pl227"/>
             <p:cNvSpPr/>
             <p:nvPr/>
           </p:nvSpPr>
@@ -10525,7 +10568,7 @@
         </p:sp>
         <p:sp>
           <p:nvSpPr>
-            <p:cNvPr id="227" name="pl227"/>
+            <p:cNvPr id="228" name="pl228"/>
             <p:cNvSpPr/>
             <p:nvPr/>
           </p:nvSpPr>
@@ -10565,7 +10608,7 @@
         </p:sp>
         <p:sp>
           <p:nvSpPr>
-            <p:cNvPr id="228" name="tx228"/>
+            <p:cNvPr id="229" name="tx229"/>
             <p:cNvSpPr/>
             <p:nvPr/>
           </p:nvSpPr>
@@ -10608,7 +10651,7 @@
         </p:sp>
         <p:sp>
           <p:nvSpPr>
-            <p:cNvPr id="229" name="tx229"/>
+            <p:cNvPr id="230" name="tx230"/>
             <p:cNvSpPr/>
             <p:nvPr/>
           </p:nvSpPr>
@@ -10651,7 +10694,7 @@
         </p:sp>
         <p:sp>
           <p:nvSpPr>
-            <p:cNvPr id="230" name="tx230"/>
+            <p:cNvPr id="231" name="tx231"/>
             <p:cNvSpPr/>
             <p:nvPr/>
           </p:nvSpPr>
@@ -10694,7 +10737,7 @@
         </p:sp>
         <p:sp>
           <p:nvSpPr>
-            <p:cNvPr id="231" name="tx231"/>
+            <p:cNvPr id="232" name="tx232"/>
             <p:cNvSpPr/>
             <p:nvPr/>
           </p:nvSpPr>
@@ -10737,7 +10780,7 @@
         </p:sp>
         <p:sp>
           <p:nvSpPr>
-            <p:cNvPr id="232" name="tx232"/>
+            <p:cNvPr id="233" name="tx233"/>
             <p:cNvSpPr/>
             <p:nvPr/>
           </p:nvSpPr>
@@ -10780,13 +10823,13 @@
         </p:sp>
         <p:sp>
           <p:nvSpPr>
-            <p:cNvPr id="233" name="tx233"/>
-            <p:cNvSpPr/>
-            <p:nvPr/>
-          </p:nvSpPr>
-          <p:spPr>
-            <a:xfrm>
-              <a:off x="1728709" y="4092737"/>
+            <p:cNvPr id="234" name="tx234"/>
+            <p:cNvSpPr/>
+            <p:nvPr/>
+          </p:nvSpPr>
+          <p:spPr>
+            <a:xfrm>
+              <a:off x="1728709" y="4151650"/>
               <a:ext cx="3935760" cy="74432"/>
             </a:xfrm>
             <a:prstGeom prst="rect">
@@ -10823,13 +10866,13 @@
         </p:sp>
         <p:sp>
           <p:nvSpPr>
-            <p:cNvPr id="234" name="tx234"/>
-            <p:cNvSpPr/>
-            <p:nvPr/>
-          </p:nvSpPr>
-          <p:spPr>
-            <a:xfrm>
-              <a:off x="1728709" y="4205208"/>
+            <p:cNvPr id="235" name="tx235"/>
+            <p:cNvSpPr/>
+            <p:nvPr/>
+          </p:nvSpPr>
+          <p:spPr>
+            <a:xfrm>
+              <a:off x="1728709" y="4264122"/>
               <a:ext cx="4259092" cy="74432"/>
             </a:xfrm>
             <a:prstGeom prst="rect">
@@ -10866,13 +10909,13 @@
         </p:sp>
         <p:sp>
           <p:nvSpPr>
-            <p:cNvPr id="235" name="tx235"/>
-            <p:cNvSpPr/>
-            <p:nvPr/>
-          </p:nvSpPr>
-          <p:spPr>
-            <a:xfrm>
-              <a:off x="1728709" y="3918117"/>
+            <p:cNvPr id="236" name="tx236"/>
+            <p:cNvSpPr/>
+            <p:nvPr/>
+          </p:nvSpPr>
+          <p:spPr>
+            <a:xfrm>
+              <a:off x="1728709" y="3977031"/>
               <a:ext cx="2597810" cy="90982"/>
             </a:xfrm>
             <a:prstGeom prst="rect">
@@ -10909,13 +10952,13 @@
         </p:sp>
         <p:sp>
           <p:nvSpPr>
-            <p:cNvPr id="236" name="tx236"/>
-            <p:cNvSpPr/>
-            <p:nvPr/>
-          </p:nvSpPr>
-          <p:spPr>
-            <a:xfrm>
-              <a:off x="338326" y="3920531"/>
+            <p:cNvPr id="237" name="tx237"/>
+            <p:cNvSpPr/>
+            <p:nvPr/>
+          </p:nvSpPr>
+          <p:spPr>
+            <a:xfrm>
+              <a:off x="338326" y="3978560"/>
               <a:ext cx="84764" cy="109179"/>
             </a:xfrm>
             <a:prstGeom prst="rect">
@@ -10952,14 +10995,14 @@
         </p:sp>
         <p:sp>
           <p:nvSpPr>
-            <p:cNvPr id="237" name="rc237"/>
-            <p:cNvSpPr/>
-            <p:nvPr/>
-          </p:nvSpPr>
-          <p:spPr>
-            <a:xfrm>
-              <a:off x="7321725" y="4358431"/>
-              <a:ext cx="4028905" cy="2748287"/>
+            <p:cNvPr id="238" name="rc238"/>
+            <p:cNvSpPr/>
+            <p:nvPr/>
+          </p:nvSpPr>
+          <p:spPr>
+            <a:xfrm>
+              <a:off x="7321725" y="4417344"/>
+              <a:ext cx="4028905" cy="2689374"/>
             </a:xfrm>
             <a:prstGeom prst="rect">
               <a:avLst/>
@@ -10978,14 +11021,14 @@
         </p:sp>
         <p:sp>
           <p:nvSpPr>
-            <p:cNvPr id="238" name="rc238"/>
-            <p:cNvSpPr/>
-            <p:nvPr/>
-          </p:nvSpPr>
-          <p:spPr>
-            <a:xfrm>
-              <a:off x="7504857" y="4397886"/>
-              <a:ext cx="2388679" cy="84353"/>
+            <p:cNvPr id="239" name="rc239"/>
+            <p:cNvSpPr/>
+            <p:nvPr/>
+          </p:nvSpPr>
+          <p:spPr>
+            <a:xfrm>
+              <a:off x="7504857" y="4455954"/>
+              <a:ext cx="2388679" cy="82545"/>
             </a:xfrm>
             <a:prstGeom prst="rect">
               <a:avLst/>
@@ -11004,14 +11047,14 @@
         </p:sp>
         <p:sp>
           <p:nvSpPr>
-            <p:cNvPr id="239" name="rc239"/>
-            <p:cNvSpPr/>
-            <p:nvPr/>
-          </p:nvSpPr>
-          <p:spPr>
-            <a:xfrm>
-              <a:off x="7504857" y="4533940"/>
-              <a:ext cx="2388679" cy="84353"/>
+            <p:cNvPr id="240" name="rc240"/>
+            <p:cNvSpPr/>
+            <p:nvPr/>
+          </p:nvSpPr>
+          <p:spPr>
+            <a:xfrm>
+              <a:off x="7504857" y="4589091"/>
+              <a:ext cx="2388679" cy="82545"/>
             </a:xfrm>
             <a:prstGeom prst="rect">
               <a:avLst/>
@@ -11030,14 +11073,14 @@
         </p:sp>
         <p:sp>
           <p:nvSpPr>
-            <p:cNvPr id="240" name="rc240"/>
-            <p:cNvSpPr/>
-            <p:nvPr/>
-          </p:nvSpPr>
-          <p:spPr>
-            <a:xfrm>
-              <a:off x="7504857" y="4669994"/>
-              <a:ext cx="796226" cy="84353"/>
+            <p:cNvPr id="241" name="rc241"/>
+            <p:cNvSpPr/>
+            <p:nvPr/>
+          </p:nvSpPr>
+          <p:spPr>
+            <a:xfrm>
+              <a:off x="7504857" y="4722229"/>
+              <a:ext cx="796226" cy="82545"/>
             </a:xfrm>
             <a:prstGeom prst="rect">
               <a:avLst/>
@@ -11056,14 +11099,14 @@
         </p:sp>
         <p:sp>
           <p:nvSpPr>
-            <p:cNvPr id="241" name="rc241"/>
-            <p:cNvSpPr/>
-            <p:nvPr/>
-          </p:nvSpPr>
-          <p:spPr>
-            <a:xfrm>
-              <a:off x="7504857" y="4806048"/>
-              <a:ext cx="796226" cy="84353"/>
+            <p:cNvPr id="242" name="rc242"/>
+            <p:cNvSpPr/>
+            <p:nvPr/>
+          </p:nvSpPr>
+          <p:spPr>
+            <a:xfrm>
+              <a:off x="7504857" y="4855366"/>
+              <a:ext cx="796226" cy="82545"/>
             </a:xfrm>
             <a:prstGeom prst="rect">
               <a:avLst/>
@@ -11082,14 +11125,14 @@
         </p:sp>
         <p:sp>
           <p:nvSpPr>
-            <p:cNvPr id="242" name="rc242"/>
-            <p:cNvSpPr/>
-            <p:nvPr/>
-          </p:nvSpPr>
-          <p:spPr>
-            <a:xfrm>
-              <a:off x="7504857" y="4942102"/>
-              <a:ext cx="0" cy="84353"/>
+            <p:cNvPr id="243" name="rc243"/>
+            <p:cNvSpPr/>
+            <p:nvPr/>
+          </p:nvSpPr>
+          <p:spPr>
+            <a:xfrm>
+              <a:off x="7504857" y="4988503"/>
+              <a:ext cx="0" cy="82545"/>
             </a:xfrm>
             <a:prstGeom prst="rect">
               <a:avLst/>
@@ -11108,14 +11151,14 @@
         </p:sp>
         <p:sp>
           <p:nvSpPr>
-            <p:cNvPr id="243" name="rc243"/>
-            <p:cNvSpPr/>
-            <p:nvPr/>
-          </p:nvSpPr>
-          <p:spPr>
-            <a:xfrm>
-              <a:off x="7504857" y="5078156"/>
-              <a:ext cx="0" cy="84353"/>
+            <p:cNvPr id="244" name="rc244"/>
+            <p:cNvSpPr/>
+            <p:nvPr/>
+          </p:nvSpPr>
+          <p:spPr>
+            <a:xfrm>
+              <a:off x="7504857" y="5121641"/>
+              <a:ext cx="0" cy="82545"/>
             </a:xfrm>
             <a:prstGeom prst="rect">
               <a:avLst/>
@@ -11134,14 +11177,14 @@
         </p:sp>
         <p:sp>
           <p:nvSpPr>
-            <p:cNvPr id="244" name="rc244"/>
-            <p:cNvSpPr/>
-            <p:nvPr/>
-          </p:nvSpPr>
-          <p:spPr>
-            <a:xfrm>
-              <a:off x="7504857" y="5214210"/>
-              <a:ext cx="0" cy="84353"/>
+            <p:cNvPr id="245" name="rc245"/>
+            <p:cNvSpPr/>
+            <p:nvPr/>
+          </p:nvSpPr>
+          <p:spPr>
+            <a:xfrm>
+              <a:off x="7504857" y="5254778"/>
+              <a:ext cx="0" cy="82545"/>
             </a:xfrm>
             <a:prstGeom prst="rect">
               <a:avLst/>
@@ -11160,14 +11203,14 @@
         </p:sp>
         <p:sp>
           <p:nvSpPr>
-            <p:cNvPr id="245" name="rc245"/>
-            <p:cNvSpPr/>
-            <p:nvPr/>
-          </p:nvSpPr>
-          <p:spPr>
-            <a:xfrm>
-              <a:off x="7504857" y="5350263"/>
-              <a:ext cx="0" cy="84353"/>
+            <p:cNvPr id="246" name="rc246"/>
+            <p:cNvSpPr/>
+            <p:nvPr/>
+          </p:nvSpPr>
+          <p:spPr>
+            <a:xfrm>
+              <a:off x="7504857" y="5387915"/>
+              <a:ext cx="0" cy="82545"/>
             </a:xfrm>
             <a:prstGeom prst="rect">
               <a:avLst/>
@@ -11186,14 +11229,14 @@
         </p:sp>
         <p:sp>
           <p:nvSpPr>
-            <p:cNvPr id="246" name="rc246"/>
-            <p:cNvSpPr/>
-            <p:nvPr/>
-          </p:nvSpPr>
-          <p:spPr>
-            <a:xfrm>
-              <a:off x="7504857" y="5486317"/>
-              <a:ext cx="0" cy="84353"/>
+            <p:cNvPr id="247" name="rc247"/>
+            <p:cNvSpPr/>
+            <p:nvPr/>
+          </p:nvSpPr>
+          <p:spPr>
+            <a:xfrm>
+              <a:off x="7504857" y="5521053"/>
+              <a:ext cx="0" cy="82545"/>
             </a:xfrm>
             <a:prstGeom prst="rect">
               <a:avLst/>
@@ -11212,14 +11255,14 @@
         </p:sp>
         <p:sp>
           <p:nvSpPr>
-            <p:cNvPr id="247" name="rc247"/>
-            <p:cNvSpPr/>
-            <p:nvPr/>
-          </p:nvSpPr>
-          <p:spPr>
-            <a:xfrm>
-              <a:off x="7504857" y="5622371"/>
-              <a:ext cx="0" cy="84353"/>
+            <p:cNvPr id="248" name="rc248"/>
+            <p:cNvSpPr/>
+            <p:nvPr/>
+          </p:nvSpPr>
+          <p:spPr>
+            <a:xfrm>
+              <a:off x="7504857" y="5654190"/>
+              <a:ext cx="0" cy="82545"/>
             </a:xfrm>
             <a:prstGeom prst="rect">
               <a:avLst/>
@@ -11238,14 +11281,14 @@
         </p:sp>
         <p:sp>
           <p:nvSpPr>
-            <p:cNvPr id="248" name="rc248"/>
-            <p:cNvSpPr/>
-            <p:nvPr/>
-          </p:nvSpPr>
-          <p:spPr>
-            <a:xfrm>
-              <a:off x="7504857" y="5758425"/>
-              <a:ext cx="0" cy="84353"/>
+            <p:cNvPr id="249" name="rc249"/>
+            <p:cNvSpPr/>
+            <p:nvPr/>
+          </p:nvSpPr>
+          <p:spPr>
+            <a:xfrm>
+              <a:off x="7504857" y="5787327"/>
+              <a:ext cx="0" cy="82545"/>
             </a:xfrm>
             <a:prstGeom prst="rect">
               <a:avLst/>
@@ -11264,14 +11307,14 @@
         </p:sp>
         <p:sp>
           <p:nvSpPr>
-            <p:cNvPr id="249" name="rc249"/>
-            <p:cNvSpPr/>
-            <p:nvPr/>
-          </p:nvSpPr>
-          <p:spPr>
-            <a:xfrm>
-              <a:off x="7504857" y="5894479"/>
-              <a:ext cx="0" cy="84353"/>
+            <p:cNvPr id="250" name="rc250"/>
+            <p:cNvSpPr/>
+            <p:nvPr/>
+          </p:nvSpPr>
+          <p:spPr>
+            <a:xfrm>
+              <a:off x="7504857" y="5920465"/>
+              <a:ext cx="0" cy="82545"/>
             </a:xfrm>
             <a:prstGeom prst="rect">
               <a:avLst/>
@@ -11290,14 +11333,14 @@
         </p:sp>
         <p:sp>
           <p:nvSpPr>
-            <p:cNvPr id="250" name="rc250"/>
-            <p:cNvSpPr/>
-            <p:nvPr/>
-          </p:nvSpPr>
-          <p:spPr>
-            <a:xfrm>
-              <a:off x="7504857" y="6030533"/>
-              <a:ext cx="0" cy="84353"/>
+            <p:cNvPr id="251" name="rc251"/>
+            <p:cNvSpPr/>
+            <p:nvPr/>
+          </p:nvSpPr>
+          <p:spPr>
+            <a:xfrm>
+              <a:off x="7504857" y="6053602"/>
+              <a:ext cx="0" cy="82545"/>
             </a:xfrm>
             <a:prstGeom prst="rect">
               <a:avLst/>
@@ -11316,14 +11359,14 @@
         </p:sp>
         <p:sp>
           <p:nvSpPr>
-            <p:cNvPr id="251" name="rc251"/>
-            <p:cNvSpPr/>
-            <p:nvPr/>
-          </p:nvSpPr>
-          <p:spPr>
-            <a:xfrm>
-              <a:off x="7504857" y="6166586"/>
-              <a:ext cx="0" cy="84353"/>
+            <p:cNvPr id="252" name="rc252"/>
+            <p:cNvSpPr/>
+            <p:nvPr/>
+          </p:nvSpPr>
+          <p:spPr>
+            <a:xfrm>
+              <a:off x="7504857" y="6186740"/>
+              <a:ext cx="0" cy="82545"/>
             </a:xfrm>
             <a:prstGeom prst="rect">
               <a:avLst/>
@@ -11342,14 +11385,14 @@
         </p:sp>
         <p:sp>
           <p:nvSpPr>
-            <p:cNvPr id="252" name="rc252"/>
-            <p:cNvSpPr/>
-            <p:nvPr/>
-          </p:nvSpPr>
-          <p:spPr>
-            <a:xfrm>
-              <a:off x="7504857" y="6302640"/>
-              <a:ext cx="0" cy="84353"/>
+            <p:cNvPr id="253" name="rc253"/>
+            <p:cNvSpPr/>
+            <p:nvPr/>
+          </p:nvSpPr>
+          <p:spPr>
+            <a:xfrm>
+              <a:off x="7504857" y="6319877"/>
+              <a:ext cx="0" cy="82545"/>
             </a:xfrm>
             <a:prstGeom prst="rect">
               <a:avLst/>
@@ -11368,14 +11411,14 @@
         </p:sp>
         <p:sp>
           <p:nvSpPr>
-            <p:cNvPr id="253" name="rc253"/>
-            <p:cNvSpPr/>
-            <p:nvPr/>
-          </p:nvSpPr>
-          <p:spPr>
-            <a:xfrm>
-              <a:off x="7504857" y="6438694"/>
-              <a:ext cx="0" cy="84353"/>
+            <p:cNvPr id="254" name="rc254"/>
+            <p:cNvSpPr/>
+            <p:nvPr/>
+          </p:nvSpPr>
+          <p:spPr>
+            <a:xfrm>
+              <a:off x="7504857" y="6453014"/>
+              <a:ext cx="0" cy="82545"/>
             </a:xfrm>
             <a:prstGeom prst="rect">
               <a:avLst/>
@@ -11394,14 +11437,14 @@
         </p:sp>
         <p:sp>
           <p:nvSpPr>
-            <p:cNvPr id="254" name="rc254"/>
-            <p:cNvSpPr/>
-            <p:nvPr/>
-          </p:nvSpPr>
-          <p:spPr>
-            <a:xfrm>
-              <a:off x="7504857" y="6574748"/>
-              <a:ext cx="0" cy="84353"/>
+            <p:cNvPr id="255" name="rc255"/>
+            <p:cNvSpPr/>
+            <p:nvPr/>
+          </p:nvSpPr>
+          <p:spPr>
+            <a:xfrm>
+              <a:off x="7504857" y="6586152"/>
+              <a:ext cx="0" cy="82545"/>
             </a:xfrm>
             <a:prstGeom prst="rect">
               <a:avLst/>
@@ -11420,14 +11463,14 @@
         </p:sp>
         <p:sp>
           <p:nvSpPr>
-            <p:cNvPr id="255" name="rc255"/>
-            <p:cNvSpPr/>
-            <p:nvPr/>
-          </p:nvSpPr>
-          <p:spPr>
-            <a:xfrm>
-              <a:off x="7504857" y="6710802"/>
-              <a:ext cx="0" cy="84353"/>
+            <p:cNvPr id="256" name="rc256"/>
+            <p:cNvSpPr/>
+            <p:nvPr/>
+          </p:nvSpPr>
+          <p:spPr>
+            <a:xfrm>
+              <a:off x="7504857" y="6719289"/>
+              <a:ext cx="0" cy="82545"/>
             </a:xfrm>
             <a:prstGeom prst="rect">
               <a:avLst/>
@@ -11446,14 +11489,14 @@
         </p:sp>
         <p:sp>
           <p:nvSpPr>
-            <p:cNvPr id="256" name="rc256"/>
-            <p:cNvSpPr/>
-            <p:nvPr/>
-          </p:nvSpPr>
-          <p:spPr>
-            <a:xfrm>
-              <a:off x="7504857" y="6846856"/>
-              <a:ext cx="0" cy="84353"/>
+            <p:cNvPr id="257" name="rc257"/>
+            <p:cNvSpPr/>
+            <p:nvPr/>
+          </p:nvSpPr>
+          <p:spPr>
+            <a:xfrm>
+              <a:off x="7504857" y="6852426"/>
+              <a:ext cx="0" cy="82545"/>
             </a:xfrm>
             <a:prstGeom prst="rect">
               <a:avLst/>
@@ -11472,14 +11515,14 @@
         </p:sp>
         <p:sp>
           <p:nvSpPr>
-            <p:cNvPr id="257" name="rc257"/>
-            <p:cNvSpPr/>
-            <p:nvPr/>
-          </p:nvSpPr>
-          <p:spPr>
-            <a:xfrm>
-              <a:off x="7504857" y="6982909"/>
-              <a:ext cx="0" cy="84353"/>
+            <p:cNvPr id="258" name="rc258"/>
+            <p:cNvSpPr/>
+            <p:nvPr/>
+          </p:nvSpPr>
+          <p:spPr>
+            <a:xfrm>
+              <a:off x="7504857" y="6985564"/>
+              <a:ext cx="0" cy="82545"/>
             </a:xfrm>
             <a:prstGeom prst="rect">
               <a:avLst/>
@@ -11498,13 +11541,13 @@
         </p:sp>
         <p:sp>
           <p:nvSpPr>
-            <p:cNvPr id="258" name="tx258"/>
-            <p:cNvSpPr/>
-            <p:nvPr/>
-          </p:nvSpPr>
-          <p:spPr>
-            <a:xfrm>
-              <a:off x="9927085" y="4411625"/>
+            <p:cNvPr id="259" name="tx259"/>
+            <p:cNvSpPr/>
+            <p:nvPr/>
+          </p:nvSpPr>
+          <p:spPr>
+            <a:xfrm>
+              <a:off x="9927085" y="4468789"/>
               <a:ext cx="335493" cy="56875"/>
             </a:xfrm>
             <a:prstGeom prst="rect">
@@ -11534,20 +11577,20 @@
                   <a:latin typeface="Arial"/>
                   <a:cs typeface="Arial"/>
                 </a:rPr>
-                <a:t>1.91-2.50</a:t>
+                <a:t>1.89-2.50</a:t>
               </a:r>
             </a:p>
           </p:txBody>
         </p:sp>
         <p:sp>
           <p:nvSpPr>
-            <p:cNvPr id="259" name="tx259"/>
-            <p:cNvSpPr/>
-            <p:nvPr/>
-          </p:nvSpPr>
-          <p:spPr>
-            <a:xfrm>
-              <a:off x="9927085" y="4547679"/>
+            <p:cNvPr id="260" name="tx260"/>
+            <p:cNvSpPr/>
+            <p:nvPr/>
+          </p:nvSpPr>
+          <p:spPr>
+            <a:xfrm>
+              <a:off x="9927085" y="4601926"/>
               <a:ext cx="335493" cy="56875"/>
             </a:xfrm>
             <a:prstGeom prst="rect">
@@ -11577,20 +11620,20 @@
                   <a:latin typeface="Arial"/>
                   <a:cs typeface="Arial"/>
                 </a:rPr>
-                <a:t>1.23-1.45</a:t>
+                <a:t>1.23-1.46</a:t>
               </a:r>
             </a:p>
           </p:txBody>
         </p:sp>
         <p:sp>
           <p:nvSpPr>
-            <p:cNvPr id="260" name="tx260"/>
-            <p:cNvSpPr/>
-            <p:nvPr/>
-          </p:nvSpPr>
-          <p:spPr>
-            <a:xfrm>
-              <a:off x="8334632" y="4683733"/>
+            <p:cNvPr id="261" name="tx261"/>
+            <p:cNvSpPr/>
+            <p:nvPr/>
+          </p:nvSpPr>
+          <p:spPr>
+            <a:xfrm>
+              <a:off x="8334632" y="4735064"/>
               <a:ext cx="335493" cy="56875"/>
             </a:xfrm>
             <a:prstGeom prst="rect">
@@ -11620,20 +11663,20 @@
                   <a:latin typeface="Arial"/>
                   <a:cs typeface="Arial"/>
                 </a:rPr>
-                <a:t>0.55-0.79</a:t>
+                <a:t>0.54-0.79</a:t>
               </a:r>
             </a:p>
           </p:txBody>
         </p:sp>
         <p:sp>
           <p:nvSpPr>
-            <p:cNvPr id="261" name="tx261"/>
-            <p:cNvSpPr/>
-            <p:nvPr/>
-          </p:nvSpPr>
-          <p:spPr>
-            <a:xfrm>
-              <a:off x="8334632" y="4819787"/>
+            <p:cNvPr id="262" name="tx262"/>
+            <p:cNvSpPr/>
+            <p:nvPr/>
+          </p:nvSpPr>
+          <p:spPr>
+            <a:xfrm>
+              <a:off x="8334632" y="4868201"/>
               <a:ext cx="335493" cy="56875"/>
             </a:xfrm>
             <a:prstGeom prst="rect">
@@ -11670,13 +11713,13 @@
         </p:sp>
         <p:sp>
           <p:nvSpPr>
-            <p:cNvPr id="262" name="tx262"/>
-            <p:cNvSpPr/>
-            <p:nvPr/>
-          </p:nvSpPr>
-          <p:spPr>
-            <a:xfrm>
-              <a:off x="7538406" y="4955841"/>
+            <p:cNvPr id="263" name="tx263"/>
+            <p:cNvSpPr/>
+            <p:nvPr/>
+          </p:nvSpPr>
+          <p:spPr>
+            <a:xfrm>
+              <a:off x="7538406" y="5001338"/>
               <a:ext cx="335493" cy="56875"/>
             </a:xfrm>
             <a:prstGeom prst="rect">
@@ -11713,13 +11756,13 @@
         </p:sp>
         <p:sp>
           <p:nvSpPr>
-            <p:cNvPr id="263" name="tx263"/>
-            <p:cNvSpPr/>
-            <p:nvPr/>
-          </p:nvSpPr>
-          <p:spPr>
-            <a:xfrm>
-              <a:off x="7538406" y="5091895"/>
+            <p:cNvPr id="264" name="tx264"/>
+            <p:cNvSpPr/>
+            <p:nvPr/>
+          </p:nvSpPr>
+          <p:spPr>
+            <a:xfrm>
+              <a:off x="7538406" y="5134476"/>
               <a:ext cx="335493" cy="56875"/>
             </a:xfrm>
             <a:prstGeom prst="rect">
@@ -11756,13 +11799,13 @@
         </p:sp>
         <p:sp>
           <p:nvSpPr>
-            <p:cNvPr id="264" name="tx264"/>
-            <p:cNvSpPr/>
-            <p:nvPr/>
-          </p:nvSpPr>
-          <p:spPr>
-            <a:xfrm>
-              <a:off x="7538406" y="5227948"/>
+            <p:cNvPr id="265" name="tx265"/>
+            <p:cNvSpPr/>
+            <p:nvPr/>
+          </p:nvSpPr>
+          <p:spPr>
+            <a:xfrm>
+              <a:off x="7538406" y="5267613"/>
               <a:ext cx="335493" cy="56875"/>
             </a:xfrm>
             <a:prstGeom prst="rect">
@@ -11799,13 +11842,13 @@
         </p:sp>
         <p:sp>
           <p:nvSpPr>
-            <p:cNvPr id="265" name="tx265"/>
-            <p:cNvSpPr/>
-            <p:nvPr/>
-          </p:nvSpPr>
-          <p:spPr>
-            <a:xfrm>
-              <a:off x="7538406" y="5364002"/>
+            <p:cNvPr id="266" name="tx266"/>
+            <p:cNvSpPr/>
+            <p:nvPr/>
+          </p:nvSpPr>
+          <p:spPr>
+            <a:xfrm>
+              <a:off x="7538406" y="5400750"/>
               <a:ext cx="335493" cy="56875"/>
             </a:xfrm>
             <a:prstGeom prst="rect">
@@ -11842,13 +11885,13 @@
         </p:sp>
         <p:sp>
           <p:nvSpPr>
-            <p:cNvPr id="266" name="tx266"/>
-            <p:cNvSpPr/>
-            <p:nvPr/>
-          </p:nvSpPr>
-          <p:spPr>
-            <a:xfrm>
-              <a:off x="7538406" y="5500056"/>
+            <p:cNvPr id="267" name="tx267"/>
+            <p:cNvSpPr/>
+            <p:nvPr/>
+          </p:nvSpPr>
+          <p:spPr>
+            <a:xfrm>
+              <a:off x="7538406" y="5533888"/>
               <a:ext cx="335493" cy="56875"/>
             </a:xfrm>
             <a:prstGeom prst="rect">
@@ -11885,13 +11928,13 @@
         </p:sp>
         <p:sp>
           <p:nvSpPr>
-            <p:cNvPr id="267" name="tx267"/>
-            <p:cNvSpPr/>
-            <p:nvPr/>
-          </p:nvSpPr>
-          <p:spPr>
-            <a:xfrm>
-              <a:off x="7538406" y="5636110"/>
+            <p:cNvPr id="268" name="tx268"/>
+            <p:cNvSpPr/>
+            <p:nvPr/>
+          </p:nvSpPr>
+          <p:spPr>
+            <a:xfrm>
+              <a:off x="7538406" y="5667025"/>
               <a:ext cx="335493" cy="56875"/>
             </a:xfrm>
             <a:prstGeom prst="rect">
@@ -11921,20 +11964,20 @@
                   <a:latin typeface="Arial"/>
                   <a:cs typeface="Arial"/>
                 </a:rPr>
-                <a:t>0.90-0.92</a:t>
+                <a:t>0.89-0.92</a:t>
               </a:r>
             </a:p>
           </p:txBody>
         </p:sp>
         <p:sp>
           <p:nvSpPr>
-            <p:cNvPr id="268" name="tx268"/>
-            <p:cNvSpPr/>
-            <p:nvPr/>
-          </p:nvSpPr>
-          <p:spPr>
-            <a:xfrm>
-              <a:off x="7538406" y="5772164"/>
+            <p:cNvPr id="269" name="tx269"/>
+            <p:cNvSpPr/>
+            <p:nvPr/>
+          </p:nvSpPr>
+          <p:spPr>
+            <a:xfrm>
+              <a:off x="7538406" y="5800162"/>
               <a:ext cx="335493" cy="56875"/>
             </a:xfrm>
             <a:prstGeom prst="rect">
@@ -11964,20 +12007,20 @@
                   <a:latin typeface="Arial"/>
                   <a:cs typeface="Arial"/>
                 </a:rPr>
-                <a:t>0.87-0.91</a:t>
+                <a:t>0.88-0.91</a:t>
               </a:r>
             </a:p>
           </p:txBody>
         </p:sp>
         <p:sp>
           <p:nvSpPr>
-            <p:cNvPr id="269" name="tx269"/>
-            <p:cNvSpPr/>
-            <p:nvPr/>
-          </p:nvSpPr>
-          <p:spPr>
-            <a:xfrm>
-              <a:off x="7538406" y="5908218"/>
+            <p:cNvPr id="270" name="tx270"/>
+            <p:cNvSpPr/>
+            <p:nvPr/>
+          </p:nvSpPr>
+          <p:spPr>
+            <a:xfrm>
+              <a:off x="7538406" y="5933300"/>
               <a:ext cx="335493" cy="56875"/>
             </a:xfrm>
             <a:prstGeom prst="rect">
@@ -12014,13 +12057,13 @@
         </p:sp>
         <p:sp>
           <p:nvSpPr>
-            <p:cNvPr id="270" name="tx270"/>
-            <p:cNvSpPr/>
-            <p:nvPr/>
-          </p:nvSpPr>
-          <p:spPr>
-            <a:xfrm>
-              <a:off x="7538406" y="6044271"/>
+            <p:cNvPr id="271" name="tx271"/>
+            <p:cNvSpPr/>
+            <p:nvPr/>
+          </p:nvSpPr>
+          <p:spPr>
+            <a:xfrm>
+              <a:off x="7538406" y="6066437"/>
               <a:ext cx="335493" cy="56875"/>
             </a:xfrm>
             <a:prstGeom prst="rect">
@@ -12057,13 +12100,13 @@
         </p:sp>
         <p:sp>
           <p:nvSpPr>
-            <p:cNvPr id="271" name="tx271"/>
-            <p:cNvSpPr/>
-            <p:nvPr/>
-          </p:nvSpPr>
-          <p:spPr>
-            <a:xfrm>
-              <a:off x="7538406" y="6180325"/>
+            <p:cNvPr id="272" name="tx272"/>
+            <p:cNvSpPr/>
+            <p:nvPr/>
+          </p:nvSpPr>
+          <p:spPr>
+            <a:xfrm>
+              <a:off x="7538406" y="6199574"/>
               <a:ext cx="335493" cy="56875"/>
             </a:xfrm>
             <a:prstGeom prst="rect">
@@ -12093,20 +12136,20 @@
                   <a:latin typeface="Arial"/>
                   <a:cs typeface="Arial"/>
                 </a:rPr>
-                <a:t>1.00-1.01</a:t>
+                <a:t>1.00-1.02</a:t>
               </a:r>
             </a:p>
           </p:txBody>
         </p:sp>
         <p:sp>
           <p:nvSpPr>
-            <p:cNvPr id="272" name="tx272"/>
-            <p:cNvSpPr/>
-            <p:nvPr/>
-          </p:nvSpPr>
-          <p:spPr>
-            <a:xfrm>
-              <a:off x="7538406" y="6316379"/>
+            <p:cNvPr id="273" name="tx273"/>
+            <p:cNvSpPr/>
+            <p:nvPr/>
+          </p:nvSpPr>
+          <p:spPr>
+            <a:xfrm>
+              <a:off x="7538406" y="6332712"/>
               <a:ext cx="335493" cy="56875"/>
             </a:xfrm>
             <a:prstGeom prst="rect">
@@ -12143,13 +12186,13 @@
         </p:sp>
         <p:sp>
           <p:nvSpPr>
-            <p:cNvPr id="273" name="tx273"/>
-            <p:cNvSpPr/>
-            <p:nvPr/>
-          </p:nvSpPr>
-          <p:spPr>
-            <a:xfrm>
-              <a:off x="7538406" y="6452433"/>
+            <p:cNvPr id="274" name="tx274"/>
+            <p:cNvSpPr/>
+            <p:nvPr/>
+          </p:nvSpPr>
+          <p:spPr>
+            <a:xfrm>
+              <a:off x="7538406" y="6465849"/>
               <a:ext cx="335493" cy="56875"/>
             </a:xfrm>
             <a:prstGeom prst="rect">
@@ -12186,13 +12229,13 @@
         </p:sp>
         <p:sp>
           <p:nvSpPr>
-            <p:cNvPr id="274" name="tx274"/>
-            <p:cNvSpPr/>
-            <p:nvPr/>
-          </p:nvSpPr>
-          <p:spPr>
-            <a:xfrm>
-              <a:off x="7538406" y="6588487"/>
+            <p:cNvPr id="275" name="tx275"/>
+            <p:cNvSpPr/>
+            <p:nvPr/>
+          </p:nvSpPr>
+          <p:spPr>
+            <a:xfrm>
+              <a:off x="7538406" y="6598986"/>
               <a:ext cx="335493" cy="56875"/>
             </a:xfrm>
             <a:prstGeom prst="rect">
@@ -12229,13 +12272,13 @@
         </p:sp>
         <p:sp>
           <p:nvSpPr>
-            <p:cNvPr id="275" name="tx275"/>
-            <p:cNvSpPr/>
-            <p:nvPr/>
-          </p:nvSpPr>
-          <p:spPr>
-            <a:xfrm>
-              <a:off x="7538406" y="6724541"/>
+            <p:cNvPr id="276" name="tx276"/>
+            <p:cNvSpPr/>
+            <p:nvPr/>
+          </p:nvSpPr>
+          <p:spPr>
+            <a:xfrm>
+              <a:off x="7538406" y="6732124"/>
               <a:ext cx="335493" cy="56875"/>
             </a:xfrm>
             <a:prstGeom prst="rect">
@@ -12272,13 +12315,13 @@
         </p:sp>
         <p:sp>
           <p:nvSpPr>
-            <p:cNvPr id="276" name="tx276"/>
-            <p:cNvSpPr/>
-            <p:nvPr/>
-          </p:nvSpPr>
-          <p:spPr>
-            <a:xfrm>
-              <a:off x="7538406" y="6860594"/>
+            <p:cNvPr id="277" name="tx277"/>
+            <p:cNvSpPr/>
+            <p:nvPr/>
+          </p:nvSpPr>
+          <p:spPr>
+            <a:xfrm>
+              <a:off x="7538406" y="6865261"/>
               <a:ext cx="335493" cy="56875"/>
             </a:xfrm>
             <a:prstGeom prst="rect">
@@ -12315,13 +12358,13 @@
         </p:sp>
         <p:sp>
           <p:nvSpPr>
-            <p:cNvPr id="277" name="tx277"/>
-            <p:cNvSpPr/>
-            <p:nvPr/>
-          </p:nvSpPr>
-          <p:spPr>
-            <a:xfrm>
-              <a:off x="7538406" y="6996648"/>
+            <p:cNvPr id="278" name="tx278"/>
+            <p:cNvSpPr/>
+            <p:nvPr/>
+          </p:nvSpPr>
+          <p:spPr>
+            <a:xfrm>
+              <a:off x="7538406" y="6998398"/>
               <a:ext cx="335493" cy="56875"/>
             </a:xfrm>
             <a:prstGeom prst="rect">
@@ -12351,28 +12394,28 @@
                   <a:latin typeface="Arial"/>
                   <a:cs typeface="Arial"/>
                 </a:rPr>
-                <a:t>0.95-1.04</a:t>
+                <a:t>0.95-1.05</a:t>
               </a:r>
             </a:p>
           </p:txBody>
         </p:sp>
         <p:sp>
           <p:nvSpPr>
-            <p:cNvPr id="278" name="pl278"/>
-            <p:cNvSpPr/>
-            <p:nvPr/>
-          </p:nvSpPr>
-          <p:spPr>
-            <a:xfrm>
-              <a:off x="7321725" y="4358431"/>
-              <a:ext cx="0" cy="2748287"/>
+            <p:cNvPr id="279" name="pl279"/>
+            <p:cNvSpPr/>
+            <p:nvPr/>
+          </p:nvSpPr>
+          <p:spPr>
+            <a:xfrm>
+              <a:off x="7321725" y="4417344"/>
+              <a:ext cx="0" cy="2689374"/>
             </a:xfrm>
             <a:custGeom>
               <a:avLst/>
               <a:pathLst>
-                <a:path w="0" h="2748287">
+                <a:path w="0" h="2689374">
                   <a:moveTo>
-                    <a:pt x="0" y="2748287"/>
+                    <a:pt x="0" y="2689374"/>
                   </a:moveTo>
                   <a:lnTo>
                     <a:pt x="0" y="0"/>
@@ -12398,13 +12441,13 @@
         </p:sp>
         <p:sp>
           <p:nvSpPr>
-            <p:cNvPr id="279" name="tx279"/>
-            <p:cNvSpPr/>
-            <p:nvPr/>
-          </p:nvSpPr>
-          <p:spPr>
-            <a:xfrm>
-              <a:off x="6489401" y="6996008"/>
+            <p:cNvPr id="280" name="tx280"/>
+            <p:cNvSpPr/>
+            <p:nvPr/>
+          </p:nvSpPr>
+          <p:spPr>
+            <a:xfrm>
+              <a:off x="6489401" y="6997758"/>
               <a:ext cx="781080" cy="58155"/>
             </a:xfrm>
             <a:prstGeom prst="rect">
@@ -12441,13 +12484,13 @@
         </p:sp>
         <p:sp>
           <p:nvSpPr>
-            <p:cNvPr id="280" name="tx280"/>
-            <p:cNvSpPr/>
-            <p:nvPr/>
-          </p:nvSpPr>
-          <p:spPr>
-            <a:xfrm>
-              <a:off x="6009524" y="6859954"/>
+            <p:cNvPr id="281" name="tx281"/>
+            <p:cNvSpPr/>
+            <p:nvPr/>
+          </p:nvSpPr>
+          <p:spPr>
+            <a:xfrm>
+              <a:off x="6009524" y="6864621"/>
               <a:ext cx="1260957" cy="58155"/>
             </a:xfrm>
             <a:prstGeom prst="rect">
@@ -12484,13 +12527,13 @@
         </p:sp>
         <p:sp>
           <p:nvSpPr>
-            <p:cNvPr id="281" name="tx281"/>
-            <p:cNvSpPr/>
-            <p:nvPr/>
-          </p:nvSpPr>
-          <p:spPr>
-            <a:xfrm>
-              <a:off x="6388817" y="6723901"/>
+            <p:cNvPr id="282" name="tx282"/>
+            <p:cNvSpPr/>
+            <p:nvPr/>
+          </p:nvSpPr>
+          <p:spPr>
+            <a:xfrm>
+              <a:off x="6388817" y="6731483"/>
               <a:ext cx="881664" cy="58155"/>
             </a:xfrm>
             <a:prstGeom prst="rect">
@@ -12527,13 +12570,13 @@
         </p:sp>
         <p:sp>
           <p:nvSpPr>
-            <p:cNvPr id="282" name="tx282"/>
-            <p:cNvSpPr/>
-            <p:nvPr/>
-          </p:nvSpPr>
-          <p:spPr>
-            <a:xfrm>
-              <a:off x="6388817" y="6587847"/>
+            <p:cNvPr id="283" name="tx283"/>
+            <p:cNvSpPr/>
+            <p:nvPr/>
+          </p:nvSpPr>
+          <p:spPr>
+            <a:xfrm>
+              <a:off x="6388817" y="6598346"/>
               <a:ext cx="881664" cy="58155"/>
             </a:xfrm>
             <a:prstGeom prst="rect">
@@ -12570,13 +12613,13 @@
         </p:sp>
         <p:sp>
           <p:nvSpPr>
-            <p:cNvPr id="283" name="tx283"/>
-            <p:cNvSpPr/>
-            <p:nvPr/>
-          </p:nvSpPr>
-          <p:spPr>
-            <a:xfrm>
-              <a:off x="6149336" y="6451793"/>
+            <p:cNvPr id="284" name="tx284"/>
+            <p:cNvSpPr/>
+            <p:nvPr/>
+          </p:nvSpPr>
+          <p:spPr>
+            <a:xfrm>
+              <a:off x="6149336" y="6465209"/>
               <a:ext cx="1121145" cy="58155"/>
             </a:xfrm>
             <a:prstGeom prst="rect">
@@ -12613,13 +12656,13 @@
         </p:sp>
         <p:sp>
           <p:nvSpPr>
-            <p:cNvPr id="284" name="tx284"/>
-            <p:cNvSpPr/>
-            <p:nvPr/>
-          </p:nvSpPr>
-          <p:spPr>
-            <a:xfrm>
-              <a:off x="6295366" y="6315739"/>
+            <p:cNvPr id="285" name="tx285"/>
+            <p:cNvSpPr/>
+            <p:nvPr/>
+          </p:nvSpPr>
+          <p:spPr>
+            <a:xfrm>
+              <a:off x="6295366" y="6332071"/>
               <a:ext cx="975116" cy="58155"/>
             </a:xfrm>
             <a:prstGeom prst="rect">
@@ -12656,13 +12699,13 @@
         </p:sp>
         <p:sp>
           <p:nvSpPr>
-            <p:cNvPr id="285" name="tx285"/>
-            <p:cNvSpPr/>
-            <p:nvPr/>
-          </p:nvSpPr>
-          <p:spPr>
-            <a:xfrm>
-              <a:off x="6525794" y="6179685"/>
+            <p:cNvPr id="286" name="tx286"/>
+            <p:cNvSpPr/>
+            <p:nvPr/>
+          </p:nvSpPr>
+          <p:spPr>
+            <a:xfrm>
+              <a:off x="6525794" y="6198934"/>
               <a:ext cx="744687" cy="58155"/>
             </a:xfrm>
             <a:prstGeom prst="rect">
@@ -12699,13 +12742,13 @@
         </p:sp>
         <p:sp>
           <p:nvSpPr>
-            <p:cNvPr id="286" name="tx286"/>
-            <p:cNvSpPr/>
-            <p:nvPr/>
-          </p:nvSpPr>
-          <p:spPr>
-            <a:xfrm>
-              <a:off x="6868786" y="6043631"/>
+            <p:cNvPr id="287" name="tx287"/>
+            <p:cNvSpPr/>
+            <p:nvPr/>
+          </p:nvSpPr>
+          <p:spPr>
+            <a:xfrm>
+              <a:off x="6868786" y="6065797"/>
               <a:ext cx="401695" cy="58155"/>
             </a:xfrm>
             <a:prstGeom prst="rect">
@@ -12742,13 +12785,13 @@
         </p:sp>
         <p:sp>
           <p:nvSpPr>
-            <p:cNvPr id="287" name="tx287"/>
-            <p:cNvSpPr/>
-            <p:nvPr/>
-          </p:nvSpPr>
-          <p:spPr>
-            <a:xfrm>
-              <a:off x="6263910" y="5907578"/>
+            <p:cNvPr id="288" name="tx288"/>
+            <p:cNvSpPr/>
+            <p:nvPr/>
+          </p:nvSpPr>
+          <p:spPr>
+            <a:xfrm>
+              <a:off x="6263910" y="5932659"/>
               <a:ext cx="1006571" cy="58155"/>
             </a:xfrm>
             <a:prstGeom prst="rect">
@@ -12785,13 +12828,13 @@
         </p:sp>
         <p:sp>
           <p:nvSpPr>
-            <p:cNvPr id="288" name="tx288"/>
-            <p:cNvSpPr/>
-            <p:nvPr/>
-          </p:nvSpPr>
-          <p:spPr>
-            <a:xfrm>
-              <a:off x="6092552" y="5771524"/>
+            <p:cNvPr id="289" name="tx289"/>
+            <p:cNvSpPr/>
+            <p:nvPr/>
+          </p:nvSpPr>
+          <p:spPr>
+            <a:xfrm>
+              <a:off x="6092552" y="5799522"/>
               <a:ext cx="1177930" cy="58155"/>
             </a:xfrm>
             <a:prstGeom prst="rect">
@@ -12828,13 +12871,13 @@
         </p:sp>
         <p:sp>
           <p:nvSpPr>
-            <p:cNvPr id="289" name="tx289"/>
-            <p:cNvSpPr/>
-            <p:nvPr/>
-          </p:nvSpPr>
-          <p:spPr>
-            <a:xfrm>
-              <a:off x="6205480" y="5635470"/>
+            <p:cNvPr id="290" name="tx290"/>
+            <p:cNvSpPr/>
+            <p:nvPr/>
+          </p:nvSpPr>
+          <p:spPr>
+            <a:xfrm>
+              <a:off x="6205480" y="5666385"/>
               <a:ext cx="1065001" cy="58155"/>
             </a:xfrm>
             <a:prstGeom prst="rect">
@@ -12871,13 +12914,13 @@
         </p:sp>
         <p:sp>
           <p:nvSpPr>
-            <p:cNvPr id="290" name="tx290"/>
-            <p:cNvSpPr/>
-            <p:nvPr/>
-          </p:nvSpPr>
-          <p:spPr>
-            <a:xfrm>
-              <a:off x="6873358" y="5499416"/>
+            <p:cNvPr id="291" name="tx291"/>
+            <p:cNvSpPr/>
+            <p:nvPr/>
+          </p:nvSpPr>
+          <p:spPr>
+            <a:xfrm>
+              <a:off x="6873358" y="5533247"/>
               <a:ext cx="397123" cy="58155"/>
             </a:xfrm>
             <a:prstGeom prst="rect">
@@ -12914,13 +12957,13 @@
         </p:sp>
         <p:sp>
           <p:nvSpPr>
-            <p:cNvPr id="291" name="tx291"/>
-            <p:cNvSpPr/>
-            <p:nvPr/>
-          </p:nvSpPr>
-          <p:spPr>
-            <a:xfrm>
-              <a:off x="6384245" y="5363362"/>
+            <p:cNvPr id="292" name="tx292"/>
+            <p:cNvSpPr/>
+            <p:nvPr/>
+          </p:nvSpPr>
+          <p:spPr>
+            <a:xfrm>
+              <a:off x="6384245" y="5400110"/>
               <a:ext cx="886236" cy="58155"/>
             </a:xfrm>
             <a:prstGeom prst="rect">
@@ -12957,13 +13000,13 @@
         </p:sp>
         <p:sp>
           <p:nvSpPr>
-            <p:cNvPr id="292" name="tx292"/>
-            <p:cNvSpPr/>
-            <p:nvPr/>
-          </p:nvSpPr>
-          <p:spPr>
-            <a:xfrm>
-              <a:off x="5960055" y="5227308"/>
+            <p:cNvPr id="293" name="tx293"/>
+            <p:cNvSpPr/>
+            <p:nvPr/>
+          </p:nvSpPr>
+          <p:spPr>
+            <a:xfrm>
+              <a:off x="5960055" y="5266973"/>
               <a:ext cx="1310426" cy="58155"/>
             </a:xfrm>
             <a:prstGeom prst="rect">
@@ -13000,13 +13043,13 @@
         </p:sp>
         <p:sp>
           <p:nvSpPr>
-            <p:cNvPr id="293" name="tx293"/>
-            <p:cNvSpPr/>
-            <p:nvPr/>
-          </p:nvSpPr>
-          <p:spPr>
-            <a:xfrm>
-              <a:off x="6373638" y="5091254"/>
+            <p:cNvPr id="294" name="tx294"/>
+            <p:cNvSpPr/>
+            <p:nvPr/>
+          </p:nvSpPr>
+          <p:spPr>
+            <a:xfrm>
+              <a:off x="6373638" y="5133835"/>
               <a:ext cx="896843" cy="58155"/>
             </a:xfrm>
             <a:prstGeom prst="rect">
@@ -13043,13 +13086,13 @@
         </p:sp>
         <p:sp>
           <p:nvSpPr>
-            <p:cNvPr id="294" name="tx294"/>
-            <p:cNvSpPr/>
-            <p:nvPr/>
-          </p:nvSpPr>
-          <p:spPr>
-            <a:xfrm>
-              <a:off x="6175030" y="4955201"/>
+            <p:cNvPr id="295" name="tx295"/>
+            <p:cNvSpPr/>
+            <p:nvPr/>
+          </p:nvSpPr>
+          <p:spPr>
+            <a:xfrm>
+              <a:off x="6175030" y="5000698"/>
               <a:ext cx="1095451" cy="58155"/>
             </a:xfrm>
             <a:prstGeom prst="rect">
@@ -13086,13 +13129,13 @@
         </p:sp>
         <p:sp>
           <p:nvSpPr>
-            <p:cNvPr id="295" name="tx295"/>
-            <p:cNvSpPr/>
-            <p:nvPr/>
-          </p:nvSpPr>
-          <p:spPr>
-            <a:xfrm>
-              <a:off x="6552769" y="4819147"/>
+            <p:cNvPr id="296" name="tx296"/>
+            <p:cNvSpPr/>
+            <p:nvPr/>
+          </p:nvSpPr>
+          <p:spPr>
+            <a:xfrm>
+              <a:off x="6552769" y="4867561"/>
               <a:ext cx="717712" cy="58155"/>
             </a:xfrm>
             <a:prstGeom prst="rect">
@@ -13129,13 +13172,13 @@
         </p:sp>
         <p:sp>
           <p:nvSpPr>
-            <p:cNvPr id="296" name="tx296"/>
-            <p:cNvSpPr/>
-            <p:nvPr/>
-          </p:nvSpPr>
-          <p:spPr>
-            <a:xfrm>
-              <a:off x="6489401" y="4683093"/>
+            <p:cNvPr id="297" name="tx297"/>
+            <p:cNvSpPr/>
+            <p:nvPr/>
+          </p:nvSpPr>
+          <p:spPr>
+            <a:xfrm>
+              <a:off x="6489401" y="4734423"/>
               <a:ext cx="781080" cy="58155"/>
             </a:xfrm>
             <a:prstGeom prst="rect">
@@ -13172,13 +13215,13 @@
         </p:sp>
         <p:sp>
           <p:nvSpPr>
-            <p:cNvPr id="297" name="tx297"/>
-            <p:cNvSpPr/>
-            <p:nvPr/>
-          </p:nvSpPr>
-          <p:spPr>
-            <a:xfrm>
-              <a:off x="6638448" y="4547039"/>
+            <p:cNvPr id="298" name="tx298"/>
+            <p:cNvSpPr/>
+            <p:nvPr/>
+          </p:nvSpPr>
+          <p:spPr>
+            <a:xfrm>
+              <a:off x="6638448" y="4601286"/>
               <a:ext cx="632033" cy="58155"/>
             </a:xfrm>
             <a:prstGeom prst="rect">
@@ -13215,13 +13258,13 @@
         </p:sp>
         <p:sp>
           <p:nvSpPr>
-            <p:cNvPr id="298" name="tx298"/>
-            <p:cNvSpPr/>
-            <p:nvPr/>
-          </p:nvSpPr>
-          <p:spPr>
-            <a:xfrm>
-              <a:off x="6367695" y="4410985"/>
+            <p:cNvPr id="299" name="tx299"/>
+            <p:cNvSpPr/>
+            <p:nvPr/>
+          </p:nvSpPr>
+          <p:spPr>
+            <a:xfrm>
+              <a:off x="6367695" y="4468149"/>
               <a:ext cx="902787" cy="58155"/>
             </a:xfrm>
             <a:prstGeom prst="rect">
@@ -13258,13 +13301,13 @@
         </p:sp>
         <p:sp>
           <p:nvSpPr>
-            <p:cNvPr id="299" name="pl299"/>
-            <p:cNvSpPr/>
-            <p:nvPr/>
-          </p:nvSpPr>
-          <p:spPr>
-            <a:xfrm>
-              <a:off x="7293256" y="7025086"/>
+            <p:cNvPr id="300" name="pl300"/>
+            <p:cNvSpPr/>
+            <p:nvPr/>
+          </p:nvSpPr>
+          <p:spPr>
+            <a:xfrm>
+              <a:off x="7293256" y="7026836"/>
               <a:ext cx="28468" cy="0"/>
             </a:xfrm>
             <a:custGeom>
@@ -13298,13 +13341,13 @@
         </p:sp>
         <p:sp>
           <p:nvSpPr>
-            <p:cNvPr id="300" name="pl300"/>
-            <p:cNvSpPr/>
-            <p:nvPr/>
-          </p:nvSpPr>
-          <p:spPr>
-            <a:xfrm>
-              <a:off x="7293256" y="6889032"/>
+            <p:cNvPr id="301" name="pl301"/>
+            <p:cNvSpPr/>
+            <p:nvPr/>
+          </p:nvSpPr>
+          <p:spPr>
+            <a:xfrm>
+              <a:off x="7293256" y="6893699"/>
               <a:ext cx="28468" cy="0"/>
             </a:xfrm>
             <a:custGeom>
@@ -13338,13 +13381,13 @@
         </p:sp>
         <p:sp>
           <p:nvSpPr>
-            <p:cNvPr id="301" name="pl301"/>
-            <p:cNvSpPr/>
-            <p:nvPr/>
-          </p:nvSpPr>
-          <p:spPr>
-            <a:xfrm>
-              <a:off x="7293256" y="6752978"/>
+            <p:cNvPr id="302" name="pl302"/>
+            <p:cNvSpPr/>
+            <p:nvPr/>
+          </p:nvSpPr>
+          <p:spPr>
+            <a:xfrm>
+              <a:off x="7293256" y="6760561"/>
               <a:ext cx="28468" cy="0"/>
             </a:xfrm>
             <a:custGeom>
@@ -13378,13 +13421,13 @@
         </p:sp>
         <p:sp>
           <p:nvSpPr>
-            <p:cNvPr id="302" name="pl302"/>
-            <p:cNvSpPr/>
-            <p:nvPr/>
-          </p:nvSpPr>
-          <p:spPr>
-            <a:xfrm>
-              <a:off x="7293256" y="6616925"/>
+            <p:cNvPr id="303" name="pl303"/>
+            <p:cNvSpPr/>
+            <p:nvPr/>
+          </p:nvSpPr>
+          <p:spPr>
+            <a:xfrm>
+              <a:off x="7293256" y="6627424"/>
               <a:ext cx="28468" cy="0"/>
             </a:xfrm>
             <a:custGeom>
@@ -13418,13 +13461,13 @@
         </p:sp>
         <p:sp>
           <p:nvSpPr>
-            <p:cNvPr id="303" name="pl303"/>
-            <p:cNvSpPr/>
-            <p:nvPr/>
-          </p:nvSpPr>
-          <p:spPr>
-            <a:xfrm>
-              <a:off x="7293256" y="6480871"/>
+            <p:cNvPr id="304" name="pl304"/>
+            <p:cNvSpPr/>
+            <p:nvPr/>
+          </p:nvSpPr>
+          <p:spPr>
+            <a:xfrm>
+              <a:off x="7293256" y="6494287"/>
               <a:ext cx="28468" cy="0"/>
             </a:xfrm>
             <a:custGeom>
@@ -13458,13 +13501,13 @@
         </p:sp>
         <p:sp>
           <p:nvSpPr>
-            <p:cNvPr id="304" name="pl304"/>
-            <p:cNvSpPr/>
-            <p:nvPr/>
-          </p:nvSpPr>
-          <p:spPr>
-            <a:xfrm>
-              <a:off x="7293256" y="6344817"/>
+            <p:cNvPr id="305" name="pl305"/>
+            <p:cNvSpPr/>
+            <p:nvPr/>
+          </p:nvSpPr>
+          <p:spPr>
+            <a:xfrm>
+              <a:off x="7293256" y="6361149"/>
               <a:ext cx="28468" cy="0"/>
             </a:xfrm>
             <a:custGeom>
@@ -13498,13 +13541,13 @@
         </p:sp>
         <p:sp>
           <p:nvSpPr>
-            <p:cNvPr id="305" name="pl305"/>
-            <p:cNvSpPr/>
-            <p:nvPr/>
-          </p:nvSpPr>
-          <p:spPr>
-            <a:xfrm>
-              <a:off x="7293256" y="6208763"/>
+            <p:cNvPr id="306" name="pl306"/>
+            <p:cNvSpPr/>
+            <p:nvPr/>
+          </p:nvSpPr>
+          <p:spPr>
+            <a:xfrm>
+              <a:off x="7293256" y="6228012"/>
               <a:ext cx="28468" cy="0"/>
             </a:xfrm>
             <a:custGeom>
@@ -13538,13 +13581,13 @@
         </p:sp>
         <p:sp>
           <p:nvSpPr>
-            <p:cNvPr id="306" name="pl306"/>
-            <p:cNvSpPr/>
-            <p:nvPr/>
-          </p:nvSpPr>
-          <p:spPr>
-            <a:xfrm>
-              <a:off x="7293256" y="6072709"/>
+            <p:cNvPr id="307" name="pl307"/>
+            <p:cNvSpPr/>
+            <p:nvPr/>
+          </p:nvSpPr>
+          <p:spPr>
+            <a:xfrm>
+              <a:off x="7293256" y="6094875"/>
               <a:ext cx="28468" cy="0"/>
             </a:xfrm>
             <a:custGeom>
@@ -13578,13 +13621,13 @@
         </p:sp>
         <p:sp>
           <p:nvSpPr>
-            <p:cNvPr id="307" name="pl307"/>
-            <p:cNvSpPr/>
-            <p:nvPr/>
-          </p:nvSpPr>
-          <p:spPr>
-            <a:xfrm>
-              <a:off x="7293256" y="5936655"/>
+            <p:cNvPr id="308" name="pl308"/>
+            <p:cNvSpPr/>
+            <p:nvPr/>
+          </p:nvSpPr>
+          <p:spPr>
+            <a:xfrm>
+              <a:off x="7293256" y="5961737"/>
               <a:ext cx="28468" cy="0"/>
             </a:xfrm>
             <a:custGeom>
@@ -13618,13 +13661,13 @@
         </p:sp>
         <p:sp>
           <p:nvSpPr>
-            <p:cNvPr id="308" name="pl308"/>
-            <p:cNvSpPr/>
-            <p:nvPr/>
-          </p:nvSpPr>
-          <p:spPr>
-            <a:xfrm>
-              <a:off x="7293256" y="5800602"/>
+            <p:cNvPr id="309" name="pl309"/>
+            <p:cNvSpPr/>
+            <p:nvPr/>
+          </p:nvSpPr>
+          <p:spPr>
+            <a:xfrm>
+              <a:off x="7293256" y="5828600"/>
               <a:ext cx="28468" cy="0"/>
             </a:xfrm>
             <a:custGeom>
@@ -13658,13 +13701,13 @@
         </p:sp>
         <p:sp>
           <p:nvSpPr>
-            <p:cNvPr id="309" name="pl309"/>
-            <p:cNvSpPr/>
-            <p:nvPr/>
-          </p:nvSpPr>
-          <p:spPr>
-            <a:xfrm>
-              <a:off x="7293256" y="5664548"/>
+            <p:cNvPr id="310" name="pl310"/>
+            <p:cNvSpPr/>
+            <p:nvPr/>
+          </p:nvSpPr>
+          <p:spPr>
+            <a:xfrm>
+              <a:off x="7293256" y="5695463"/>
               <a:ext cx="28468" cy="0"/>
             </a:xfrm>
             <a:custGeom>
@@ -13698,13 +13741,13 @@
         </p:sp>
         <p:sp>
           <p:nvSpPr>
-            <p:cNvPr id="310" name="pl310"/>
-            <p:cNvSpPr/>
-            <p:nvPr/>
-          </p:nvSpPr>
-          <p:spPr>
-            <a:xfrm>
-              <a:off x="7293256" y="5528494"/>
+            <p:cNvPr id="311" name="pl311"/>
+            <p:cNvSpPr/>
+            <p:nvPr/>
+          </p:nvSpPr>
+          <p:spPr>
+            <a:xfrm>
+              <a:off x="7293256" y="5562325"/>
               <a:ext cx="28468" cy="0"/>
             </a:xfrm>
             <a:custGeom>
@@ -13738,13 +13781,13 @@
         </p:sp>
         <p:sp>
           <p:nvSpPr>
-            <p:cNvPr id="311" name="pl311"/>
-            <p:cNvSpPr/>
-            <p:nvPr/>
-          </p:nvSpPr>
-          <p:spPr>
-            <a:xfrm>
-              <a:off x="7293256" y="5392440"/>
+            <p:cNvPr id="312" name="pl312"/>
+            <p:cNvSpPr/>
+            <p:nvPr/>
+          </p:nvSpPr>
+          <p:spPr>
+            <a:xfrm>
+              <a:off x="7293256" y="5429188"/>
               <a:ext cx="28468" cy="0"/>
             </a:xfrm>
             <a:custGeom>
@@ -13778,13 +13821,13 @@
         </p:sp>
         <p:sp>
           <p:nvSpPr>
-            <p:cNvPr id="312" name="pl312"/>
-            <p:cNvSpPr/>
-            <p:nvPr/>
-          </p:nvSpPr>
-          <p:spPr>
-            <a:xfrm>
-              <a:off x="7293256" y="5256386"/>
+            <p:cNvPr id="313" name="pl313"/>
+            <p:cNvSpPr/>
+            <p:nvPr/>
+          </p:nvSpPr>
+          <p:spPr>
+            <a:xfrm>
+              <a:off x="7293256" y="5296051"/>
               <a:ext cx="28468" cy="0"/>
             </a:xfrm>
             <a:custGeom>
@@ -13818,13 +13861,13 @@
         </p:sp>
         <p:sp>
           <p:nvSpPr>
-            <p:cNvPr id="313" name="pl313"/>
-            <p:cNvSpPr/>
-            <p:nvPr/>
-          </p:nvSpPr>
-          <p:spPr>
-            <a:xfrm>
-              <a:off x="7293256" y="5120332"/>
+            <p:cNvPr id="314" name="pl314"/>
+            <p:cNvSpPr/>
+            <p:nvPr/>
+          </p:nvSpPr>
+          <p:spPr>
+            <a:xfrm>
+              <a:off x="7293256" y="5162913"/>
               <a:ext cx="28468" cy="0"/>
             </a:xfrm>
             <a:custGeom>
@@ -13858,13 +13901,13 @@
         </p:sp>
         <p:sp>
           <p:nvSpPr>
-            <p:cNvPr id="314" name="pl314"/>
-            <p:cNvSpPr/>
-            <p:nvPr/>
-          </p:nvSpPr>
-          <p:spPr>
-            <a:xfrm>
-              <a:off x="7293256" y="4984279"/>
+            <p:cNvPr id="315" name="pl315"/>
+            <p:cNvSpPr/>
+            <p:nvPr/>
+          </p:nvSpPr>
+          <p:spPr>
+            <a:xfrm>
+              <a:off x="7293256" y="5029776"/>
               <a:ext cx="28468" cy="0"/>
             </a:xfrm>
             <a:custGeom>
@@ -13898,13 +13941,13 @@
         </p:sp>
         <p:sp>
           <p:nvSpPr>
-            <p:cNvPr id="315" name="pl315"/>
-            <p:cNvSpPr/>
-            <p:nvPr/>
-          </p:nvSpPr>
-          <p:spPr>
-            <a:xfrm>
-              <a:off x="7293256" y="4848225"/>
+            <p:cNvPr id="316" name="pl316"/>
+            <p:cNvSpPr/>
+            <p:nvPr/>
+          </p:nvSpPr>
+          <p:spPr>
+            <a:xfrm>
+              <a:off x="7293256" y="4896639"/>
               <a:ext cx="28468" cy="0"/>
             </a:xfrm>
             <a:custGeom>
@@ -13938,13 +13981,13 @@
         </p:sp>
         <p:sp>
           <p:nvSpPr>
-            <p:cNvPr id="316" name="pl316"/>
-            <p:cNvSpPr/>
-            <p:nvPr/>
-          </p:nvSpPr>
-          <p:spPr>
-            <a:xfrm>
-              <a:off x="7293256" y="4712171"/>
+            <p:cNvPr id="317" name="pl317"/>
+            <p:cNvSpPr/>
+            <p:nvPr/>
+          </p:nvSpPr>
+          <p:spPr>
+            <a:xfrm>
+              <a:off x="7293256" y="4763501"/>
               <a:ext cx="28468" cy="0"/>
             </a:xfrm>
             <a:custGeom>
@@ -13978,13 +14021,13 @@
         </p:sp>
         <p:sp>
           <p:nvSpPr>
-            <p:cNvPr id="317" name="pl317"/>
-            <p:cNvSpPr/>
-            <p:nvPr/>
-          </p:nvSpPr>
-          <p:spPr>
-            <a:xfrm>
-              <a:off x="7293256" y="4576117"/>
+            <p:cNvPr id="318" name="pl318"/>
+            <p:cNvSpPr/>
+            <p:nvPr/>
+          </p:nvSpPr>
+          <p:spPr>
+            <a:xfrm>
+              <a:off x="7293256" y="4630364"/>
               <a:ext cx="28468" cy="0"/>
             </a:xfrm>
             <a:custGeom>
@@ -14018,13 +14061,13 @@
         </p:sp>
         <p:sp>
           <p:nvSpPr>
-            <p:cNvPr id="318" name="pl318"/>
-            <p:cNvSpPr/>
-            <p:nvPr/>
-          </p:nvSpPr>
-          <p:spPr>
-            <a:xfrm>
-              <a:off x="7293256" y="4440063"/>
+            <p:cNvPr id="319" name="pl319"/>
+            <p:cNvSpPr/>
+            <p:nvPr/>
+          </p:nvSpPr>
+          <p:spPr>
+            <a:xfrm>
+              <a:off x="7293256" y="4497227"/>
               <a:ext cx="28468" cy="0"/>
             </a:xfrm>
             <a:custGeom>
@@ -14058,7 +14101,7 @@
         </p:sp>
         <p:sp>
           <p:nvSpPr>
-            <p:cNvPr id="319" name="pl319"/>
+            <p:cNvPr id="320" name="pl320"/>
             <p:cNvSpPr/>
             <p:nvPr/>
           </p:nvSpPr>
@@ -14098,7 +14141,7 @@
         </p:sp>
         <p:sp>
           <p:nvSpPr>
-            <p:cNvPr id="320" name="pl320"/>
+            <p:cNvPr id="321" name="pl321"/>
             <p:cNvSpPr/>
             <p:nvPr/>
           </p:nvSpPr>
@@ -14138,7 +14181,7 @@
         </p:sp>
         <p:sp>
           <p:nvSpPr>
-            <p:cNvPr id="321" name="pl321"/>
+            <p:cNvPr id="322" name="pl322"/>
             <p:cNvSpPr/>
             <p:nvPr/>
           </p:nvSpPr>
@@ -14178,7 +14221,7 @@
         </p:sp>
         <p:sp>
           <p:nvSpPr>
-            <p:cNvPr id="322" name="pl322"/>
+            <p:cNvPr id="323" name="pl323"/>
             <p:cNvSpPr/>
             <p:nvPr/>
           </p:nvSpPr>
@@ -14218,7 +14261,7 @@
         </p:sp>
         <p:sp>
           <p:nvSpPr>
-            <p:cNvPr id="323" name="pl323"/>
+            <p:cNvPr id="324" name="pl324"/>
             <p:cNvSpPr/>
             <p:nvPr/>
           </p:nvSpPr>
@@ -14258,7 +14301,7 @@
         </p:sp>
         <p:sp>
           <p:nvSpPr>
-            <p:cNvPr id="324" name="tx324"/>
+            <p:cNvPr id="325" name="tx325"/>
             <p:cNvSpPr/>
             <p:nvPr/>
           </p:nvSpPr>
@@ -14301,7 +14344,7 @@
         </p:sp>
         <p:sp>
           <p:nvSpPr>
-            <p:cNvPr id="325" name="tx325"/>
+            <p:cNvPr id="326" name="tx326"/>
             <p:cNvSpPr/>
             <p:nvPr/>
           </p:nvSpPr>
@@ -14344,7 +14387,7 @@
         </p:sp>
         <p:sp>
           <p:nvSpPr>
-            <p:cNvPr id="326" name="tx326"/>
+            <p:cNvPr id="327" name="tx327"/>
             <p:cNvSpPr/>
             <p:nvPr/>
           </p:nvSpPr>
@@ -14387,7 +14430,7 @@
         </p:sp>
         <p:sp>
           <p:nvSpPr>
-            <p:cNvPr id="327" name="tx327"/>
+            <p:cNvPr id="328" name="tx328"/>
             <p:cNvSpPr/>
             <p:nvPr/>
           </p:nvSpPr>
@@ -14430,7 +14473,7 @@
         </p:sp>
         <p:sp>
           <p:nvSpPr>
-            <p:cNvPr id="328" name="tx328"/>
+            <p:cNvPr id="329" name="tx329"/>
             <p:cNvSpPr/>
             <p:nvPr/>
           </p:nvSpPr>
@@ -14473,7 +14516,7 @@
         </p:sp>
         <p:sp>
           <p:nvSpPr>
-            <p:cNvPr id="329" name="rc329"/>
+            <p:cNvPr id="330" name="rc330"/>
             <p:cNvSpPr/>
             <p:nvPr/>
           </p:nvSpPr>
@@ -14499,7 +14542,7 @@
         </p:sp>
         <p:sp>
           <p:nvSpPr>
-            <p:cNvPr id="330" name="rc330"/>
+            <p:cNvPr id="331" name="rc331"/>
             <p:cNvSpPr/>
             <p:nvPr/>
           </p:nvSpPr>
@@ -14525,7 +14568,7 @@
         </p:sp>
         <p:sp>
           <p:nvSpPr>
-            <p:cNvPr id="331" name="rc331"/>
+            <p:cNvPr id="332" name="rc332"/>
             <p:cNvSpPr/>
             <p:nvPr/>
           </p:nvSpPr>
@@ -14551,7 +14594,7 @@
         </p:sp>
         <p:sp>
           <p:nvSpPr>
-            <p:cNvPr id="332" name="rc332"/>
+            <p:cNvPr id="333" name="rc333"/>
             <p:cNvSpPr/>
             <p:nvPr/>
           </p:nvSpPr>
@@ -14577,7 +14620,7 @@
         </p:sp>
         <p:sp>
           <p:nvSpPr>
-            <p:cNvPr id="333" name="rc333"/>
+            <p:cNvPr id="334" name="rc334"/>
             <p:cNvSpPr/>
             <p:nvPr/>
           </p:nvSpPr>
@@ -14603,7 +14646,7 @@
         </p:sp>
         <p:sp>
           <p:nvSpPr>
-            <p:cNvPr id="334" name="rc334"/>
+            <p:cNvPr id="335" name="rc335"/>
             <p:cNvSpPr/>
             <p:nvPr/>
           </p:nvSpPr>
@@ -14629,7 +14672,7 @@
         </p:sp>
         <p:sp>
           <p:nvSpPr>
-            <p:cNvPr id="335" name="rc335"/>
+            <p:cNvPr id="336" name="rc336"/>
             <p:cNvSpPr/>
             <p:nvPr/>
           </p:nvSpPr>
@@ -14655,7 +14698,7 @@
         </p:sp>
         <p:sp>
           <p:nvSpPr>
-            <p:cNvPr id="336" name="tx336"/>
+            <p:cNvPr id="337" name="tx337"/>
             <p:cNvSpPr/>
             <p:nvPr/>
           </p:nvSpPr>
@@ -14698,7 +14741,7 @@
         </p:sp>
         <p:sp>
           <p:nvSpPr>
-            <p:cNvPr id="337" name="tx337"/>
+            <p:cNvPr id="338" name="tx338"/>
             <p:cNvSpPr/>
             <p:nvPr/>
           </p:nvSpPr>
@@ -14741,7 +14784,7 @@
         </p:sp>
         <p:sp>
           <p:nvSpPr>
-            <p:cNvPr id="338" name="tx338"/>
+            <p:cNvPr id="339" name="tx339"/>
             <p:cNvSpPr/>
             <p:nvPr/>
           </p:nvSpPr>
@@ -14784,13 +14827,13 @@
         </p:sp>
         <p:sp>
           <p:nvSpPr>
-            <p:cNvPr id="339" name="tx339"/>
-            <p:cNvSpPr/>
-            <p:nvPr/>
-          </p:nvSpPr>
-          <p:spPr>
-            <a:xfrm>
-              <a:off x="7321725" y="4092737"/>
+            <p:cNvPr id="340" name="tx340"/>
+            <p:cNvSpPr/>
+            <p:nvPr/>
+          </p:nvSpPr>
+          <p:spPr>
+            <a:xfrm>
+              <a:off x="7321725" y="4151650"/>
               <a:ext cx="3652662" cy="74432"/>
             </a:xfrm>
             <a:prstGeom prst="rect">
@@ -14827,13 +14870,13 @@
         </p:sp>
         <p:sp>
           <p:nvSpPr>
-            <p:cNvPr id="340" name="tx340"/>
-            <p:cNvSpPr/>
-            <p:nvPr/>
-          </p:nvSpPr>
-          <p:spPr>
-            <a:xfrm>
-              <a:off x="7321725" y="4205208"/>
+            <p:cNvPr id="341" name="tx341"/>
+            <p:cNvSpPr/>
+            <p:nvPr/>
+          </p:nvSpPr>
+          <p:spPr>
+            <a:xfrm>
+              <a:off x="7321725" y="4264122"/>
               <a:ext cx="2334828" cy="74432"/>
             </a:xfrm>
             <a:prstGeom prst="rect">
@@ -14870,13 +14913,13 @@
         </p:sp>
         <p:sp>
           <p:nvSpPr>
-            <p:cNvPr id="341" name="tx341"/>
-            <p:cNvSpPr/>
-            <p:nvPr/>
-          </p:nvSpPr>
-          <p:spPr>
-            <a:xfrm>
-              <a:off x="7321725" y="3918117"/>
+            <p:cNvPr id="342" name="tx342"/>
+            <p:cNvSpPr/>
+            <p:nvPr/>
+          </p:nvSpPr>
+          <p:spPr>
+            <a:xfrm>
+              <a:off x="7321725" y="3977031"/>
               <a:ext cx="2504998" cy="90982"/>
             </a:xfrm>
             <a:prstGeom prst="rect">
@@ -14913,13 +14956,13 @@
         </p:sp>
         <p:sp>
           <p:nvSpPr>
-            <p:cNvPr id="342" name="tx342"/>
-            <p:cNvSpPr/>
-            <p:nvPr/>
-          </p:nvSpPr>
-          <p:spPr>
-            <a:xfrm>
-              <a:off x="5940465" y="3920531"/>
+            <p:cNvPr id="343" name="tx343"/>
+            <p:cNvSpPr/>
+            <p:nvPr/>
+          </p:nvSpPr>
+          <p:spPr>
+            <a:xfrm>
+              <a:off x="5940465" y="3978560"/>
               <a:ext cx="93085" cy="109179"/>
             </a:xfrm>
             <a:prstGeom prst="rect">
